--- a/slides/modules/m19-service-mesh-advanced-gateways.pptx
+++ b/slides/modules/m19-service-mesh-advanced-gateways.pptx
@@ -14,6 +14,7 @@
     <p:sldId id="262" r:id="rId14"/>
     <p:sldId id="263" r:id="rId15"/>
     <p:sldId id="264" r:id="rId16"/>
+    <p:sldId id="265" r:id="rId17"/>
   </p:sldIdLst>
   <p:sldSz cx="12191695" cy="6858000" type="screen4x3"/>
   <p:notesSz cx="6858000" cy="9144000"/>
@@ -1001,6 +1002,76 @@
           <a:p>
             <a:r>
               <a:t>Close on the ingress boundary and the transfer. Getting traffic into the mesh is the job of an ingress gateway. The honest boundary worth carrying to a customer: Routes and the newer Gateway API handle HTTP(S) ingress well — for most web traffic you don't need the mesh's gateway. But raw TCP and TLS passthrough by SNI are different: a Route can't route an arbitrary TCP protocol, and on supported OpenShift channels the experimental L4 Gateway API resources (TCPRoute, TLSRoute) aren't available — they were absent on this cluster. So when Parasol's legacy partner bureaus send claim feeds over raw TCP, the Istio ingress Gateway with a TCP or TLS-passthrough listener is the supported path. The decision guide: Gateway API or Routes for HTTP(S); Istio Gateway/VirtualService for raw-TCP and passthrough today. In the optional encore you build exactly that raw-TCP path and add a native gateway rate limit with an EnvoyFilter — hammer it, read the 429s — framed honestly as a platform capability, not a replacement for a full API-management product. Take the questions back to your org: is your east-west traffic provably mutual-TLS encrypted and gated by identity, or just assumed safe because it's "inside the cluster"? Can you canary 10% without a redeploy? Do you have an answer when a partner needs raw TCP?</a:t>
+            </a:r>
+          </a:p>
+        </p:txBody>
+      </p:sp>
+      <p:sp>
+        <p:nvSpPr>
+          <p:cNvPr id="4" name="Slide Number Placeholder 3"/>
+          <p:cNvSpPr>
+            <a:spLocks noGrp="1"/>
+          </p:cNvSpPr>
+          <p:nvPr>
+            <p:ph type="sldNum" idx="5" sz="quarter"/>
+          </p:nvPr>
+        </p:nvSpPr>
+        <p:spPr/>
+      </p:sp>
+    </p:spTree>
+  </p:cSld>
+  <p:clrMapOvr>
+    <a:masterClrMapping/>
+  </p:clrMapOvr>
+</p:notes>
+</file>
+
+<file path=ppt/notesSlides/notesSlide9.xml><?xml version="1.0" encoding="utf-8"?>
+<p:notes xmlns:a="http://schemas.openxmlformats.org/drawingml/2006/main" xmlns:p="http://schemas.openxmlformats.org/presentationml/2006/main" xmlns:r="http://schemas.openxmlformats.org/officeDocument/2006/relationships">
+  <p:cSld>
+    <p:spTree>
+      <p:nvGrpSpPr>
+        <p:cNvPr id="1" name=""/>
+        <p:cNvGrpSpPr/>
+        <p:nvPr/>
+      </p:nvGrpSpPr>
+      <p:grpSpPr>
+        <a:xfrm>
+          <a:off x="0" y="0"/>
+          <a:ext cx="0" cy="0"/>
+          <a:chOff x="0" y="0"/>
+          <a:chExt cx="0" cy="0"/>
+        </a:xfrm>
+      </p:grpSpPr>
+      <p:sp>
+        <p:nvSpPr>
+          <p:cNvPr id="2" name="Slide Image Placeholder 1"/>
+          <p:cNvSpPr>
+            <a:spLocks noGrp="1"/>
+          </p:cNvSpPr>
+          <p:nvPr>
+            <p:ph type="sldImg" idx="2"/>
+          </p:nvPr>
+        </p:nvSpPr>
+        <p:spPr/>
+      </p:sp>
+      <p:sp>
+        <p:nvSpPr>
+          <p:cNvPr id="3" name="Notes Placeholder 2"/>
+          <p:cNvSpPr>
+            <a:spLocks noGrp="1"/>
+          </p:cNvSpPr>
+          <p:nvPr>
+            <p:ph type="body" idx="3" sz="quarter"/>
+          </p:nvPr>
+        </p:nvSpPr>
+        <p:spPr/>
+        <p:txBody>
+          <a:bodyPr/>
+          <a:lstStyle/>
+          <a:p>
+            <a:r>
+              <a:t>Concept diagram: What you built.</a:t>
             </a:r>
           </a:p>
         </p:txBody>
@@ -4209,6 +4280,372 @@
 </p:sld>
 </file>
 
+<file path=ppt/slides/slide10.xml><?xml version="1.0" encoding="utf-8"?>
+<p:sld xmlns:a="http://schemas.openxmlformats.org/drawingml/2006/main" xmlns:p="http://schemas.openxmlformats.org/presentationml/2006/main" xmlns:r="http://schemas.openxmlformats.org/officeDocument/2006/relationships">
+  <p:cSld>
+    <p:spTree>
+      <p:nvGrpSpPr>
+        <p:cNvPr id="1" name=""/>
+        <p:cNvGrpSpPr/>
+        <p:nvPr/>
+      </p:nvGrpSpPr>
+      <p:grpSpPr/>
+      <p:pic>
+        <p:nvPicPr>
+          <p:cNvPr id="2" name="Picture 1" descr="redhat_logo.jpg"/>
+          <p:cNvPicPr>
+            <a:picLocks noChangeAspect="1"/>
+          </p:cNvPicPr>
+          <p:nvPr/>
+        </p:nvPicPr>
+        <p:blipFill>
+          <a:blip r:embed="rId2"/>
+          <a:stretch>
+            <a:fillRect/>
+          </a:stretch>
+        </p:blipFill>
+        <p:spPr>
+          <a:xfrm>
+            <a:off x="10326319" y="475488"/>
+            <a:ext cx="1024128" cy="242248"/>
+          </a:xfrm>
+          <a:prstGeom prst="rect">
+            <a:avLst/>
+          </a:prstGeom>
+        </p:spPr>
+      </p:pic>
+      <p:sp>
+        <p:nvSpPr>
+          <p:cNvPr id="3" name="TextBox 2"/>
+          <p:cNvSpPr txBox="1"/>
+          <p:nvPr/>
+        </p:nvSpPr>
+        <p:spPr>
+          <a:xfrm>
+            <a:off x="841248" y="548640"/>
+            <a:ext cx="8595360" cy="274320"/>
+          </a:xfrm>
+          <a:prstGeom prst="rect">
+            <a:avLst/>
+          </a:prstGeom>
+          <a:noFill/>
+        </p:spPr>
+        <p:txBody>
+          <a:bodyPr wrap="square" anchor="t" lIns="0" rIns="0" tIns="0" bIns="0">
+            <a:spAutoFit/>
+          </a:bodyPr>
+          <a:lstStyle/>
+          <a:p>
+            <a:pPr algn="l">
+              <a:lnSpc>
+                <a:spcPct val="106000"/>
+              </a:lnSpc>
+              <a:spcBef>
+                <a:spcPts val="0"/>
+              </a:spcBef>
+              <a:spcAft>
+                <a:spcPts val="0"/>
+              </a:spcAft>
+            </a:pPr>
+            <a:r>
+              <a:rPr sz="1250" b="1" spc="220">
+                <a:solidFill>
+                  <a:srgbClr val="EE0000"/>
+                </a:solidFill>
+                <a:latin typeface="Red Hat Display"/>
+              </a:rPr>
+              <a:t>M19 · SERVICE MESH 3 &amp; ADVANCED GATEWAYS</a:t>
+            </a:r>
+          </a:p>
+        </p:txBody>
+      </p:sp>
+      <p:sp>
+        <p:nvSpPr>
+          <p:cNvPr id="4" name="TextBox 3"/>
+          <p:cNvSpPr txBox="1"/>
+          <p:nvPr/>
+        </p:nvSpPr>
+        <p:spPr>
+          <a:xfrm>
+            <a:off x="841248" y="877824"/>
+            <a:ext cx="10515600" cy="548640"/>
+          </a:xfrm>
+          <a:prstGeom prst="rect">
+            <a:avLst/>
+          </a:prstGeom>
+          <a:noFill/>
+        </p:spPr>
+        <p:txBody>
+          <a:bodyPr wrap="none" anchor="t" lIns="0" rIns="0" tIns="0" bIns="0">
+            <a:spAutoFit/>
+          </a:bodyPr>
+          <a:lstStyle/>
+          <a:p>
+            <a:pPr algn="l">
+              <a:lnSpc>
+                <a:spcPct val="100000"/>
+              </a:lnSpc>
+              <a:spcBef>
+                <a:spcPts val="0"/>
+              </a:spcBef>
+              <a:spcAft>
+                <a:spcPts val="0"/>
+              </a:spcAft>
+            </a:pPr>
+            <a:r>
+              <a:rPr sz="2500" b="1">
+                <a:solidFill>
+                  <a:srgbClr val="1A1A1A"/>
+                </a:solidFill>
+                <a:latin typeface="Red Hat Display"/>
+              </a:rPr>
+              <a:t>What you built</a:t>
+            </a:r>
+          </a:p>
+        </p:txBody>
+      </p:sp>
+      <p:cxnSp>
+        <p:nvCxnSpPr>
+          <p:cNvPr id="5" name="Connector 4"/>
+          <p:cNvCxnSpPr/>
+          <p:nvPr/>
+        </p:nvCxnSpPr>
+        <p:spPr>
+          <a:xfrm>
+            <a:off x="841248" y="1554480"/>
+            <a:ext cx="1371600" cy="0"/>
+          </a:xfrm>
+          <a:prstGeom prst="bentConnector3">
+            <a:avLst/>
+          </a:prstGeom>
+          <a:ln w="31750">
+            <a:solidFill>
+              <a:srgbClr val="EE0000"/>
+            </a:solidFill>
+          </a:ln>
+          <a:effectLst/>
+        </p:spPr>
+        <p:style>
+          <a:lnRef idx="2">
+            <a:schemeClr val="accent1"/>
+          </a:lnRef>
+          <a:fillRef idx="0">
+            <a:schemeClr val="accent1"/>
+          </a:fillRef>
+          <a:effectRef idx="1">
+            <a:schemeClr val="accent1"/>
+          </a:effectRef>
+          <a:fontRef idx="minor">
+            <a:schemeClr val="tx1"/>
+          </a:fontRef>
+        </p:style>
+      </p:cxnSp>
+      <p:sp>
+        <p:nvSpPr>
+          <p:cNvPr id="6" name="Rounded Rectangle 5"/>
+          <p:cNvSpPr/>
+          <p:nvPr/>
+        </p:nvSpPr>
+        <p:spPr>
+          <a:xfrm>
+            <a:off x="841248" y="2331720"/>
+            <a:ext cx="10509199" cy="3794760"/>
+          </a:xfrm>
+          <a:prstGeom prst="roundRect">
+            <a:avLst>
+              <a:gd name="adj" fmla="val 4000"/>
+            </a:avLst>
+          </a:prstGeom>
+          <a:solidFill>
+            <a:srgbClr val="FFFFFF"/>
+          </a:solidFill>
+          <a:ln w="15240">
+            <a:solidFill>
+              <a:srgbClr val="DDE1E6"/>
+            </a:solidFill>
+          </a:ln>
+          <a:effectLst/>
+        </p:spPr>
+        <p:style>
+          <a:lnRef idx="1">
+            <a:schemeClr val="accent1"/>
+          </a:lnRef>
+          <a:fillRef idx="3">
+            <a:schemeClr val="accent1"/>
+          </a:fillRef>
+          <a:effectRef idx="2">
+            <a:schemeClr val="accent1"/>
+          </a:effectRef>
+          <a:fontRef idx="minor">
+            <a:schemeClr val="lt1"/>
+          </a:fontRef>
+        </p:style>
+        <p:txBody>
+          <a:bodyPr rtlCol="0" anchor="ctr"/>
+          <a:lstStyle/>
+          <a:p>
+            <a:pPr algn="ctr"/>
+          </a:p>
+        </p:txBody>
+      </p:sp>
+      <p:pic>
+        <p:nvPicPr>
+          <p:cNvPr id="7" name="Picture 6" descr="03-what-you-built.png"/>
+          <p:cNvPicPr>
+            <a:picLocks noChangeAspect="1"/>
+          </p:cNvPicPr>
+          <p:nvPr/>
+        </p:nvPicPr>
+        <p:blipFill>
+          <a:blip r:embed="rId3"/>
+          <a:stretch>
+            <a:fillRect/>
+          </a:stretch>
+        </p:blipFill>
+        <p:spPr>
+          <a:xfrm>
+            <a:off x="3230019" y="2532888"/>
+            <a:ext cx="5731656" cy="3392424"/>
+          </a:xfrm>
+          <a:prstGeom prst="rect">
+            <a:avLst/>
+          </a:prstGeom>
+        </p:spPr>
+      </p:pic>
+      <p:cxnSp>
+        <p:nvCxnSpPr>
+          <p:cNvPr id="8" name="Connector 7"/>
+          <p:cNvCxnSpPr/>
+          <p:nvPr/>
+        </p:nvCxnSpPr>
+        <p:spPr>
+          <a:xfrm>
+            <a:off x="841248" y="6437376"/>
+            <a:ext cx="10509199" cy="0"/>
+          </a:xfrm>
+          <a:prstGeom prst="bentConnector3">
+            <a:avLst/>
+          </a:prstGeom>
+          <a:ln w="12700">
+            <a:solidFill>
+              <a:srgbClr val="DDE1E6"/>
+            </a:solidFill>
+          </a:ln>
+          <a:effectLst/>
+        </p:spPr>
+        <p:style>
+          <a:lnRef idx="2">
+            <a:schemeClr val="accent1"/>
+          </a:lnRef>
+          <a:fillRef idx="0">
+            <a:schemeClr val="accent1"/>
+          </a:fillRef>
+          <a:effectRef idx="1">
+            <a:schemeClr val="accent1"/>
+          </a:effectRef>
+          <a:fontRef idx="minor">
+            <a:schemeClr val="tx1"/>
+          </a:fontRef>
+        </p:style>
+      </p:cxnSp>
+      <p:sp>
+        <p:nvSpPr>
+          <p:cNvPr id="9" name="TextBox 8"/>
+          <p:cNvSpPr txBox="1"/>
+          <p:nvPr/>
+        </p:nvSpPr>
+        <p:spPr>
+          <a:xfrm>
+            <a:off x="841248" y="6473952"/>
+            <a:ext cx="7315200" cy="274320"/>
+          </a:xfrm>
+          <a:prstGeom prst="rect">
+            <a:avLst/>
+          </a:prstGeom>
+          <a:noFill/>
+        </p:spPr>
+        <p:txBody>
+          <a:bodyPr wrap="square" anchor="t" lIns="0" rIns="0" tIns="0" bIns="0">
+            <a:spAutoFit/>
+          </a:bodyPr>
+          <a:lstStyle/>
+          <a:p>
+            <a:pPr algn="l">
+              <a:lnSpc>
+                <a:spcPct val="106000"/>
+              </a:lnSpc>
+              <a:spcBef>
+                <a:spcPts val="0"/>
+              </a:spcBef>
+              <a:spcAft>
+                <a:spcPts val="0"/>
+              </a:spcAft>
+            </a:pPr>
+            <a:r>
+              <a:rPr sz="950" b="0">
+                <a:solidFill>
+                  <a:srgbClr val="8A9099"/>
+                </a:solidFill>
+                <a:latin typeface="Red Hat Text"/>
+              </a:rPr>
+              <a:t>CONFIDENTIAL</a:t>
+            </a:r>
+          </a:p>
+        </p:txBody>
+      </p:sp>
+      <p:sp>
+        <p:nvSpPr>
+          <p:cNvPr id="10" name="TextBox 9"/>
+          <p:cNvSpPr txBox="1"/>
+          <p:nvPr/>
+        </p:nvSpPr>
+        <p:spPr>
+          <a:xfrm>
+            <a:off x="10801807" y="6473952"/>
+            <a:ext cx="548640" cy="274320"/>
+          </a:xfrm>
+          <a:prstGeom prst="rect">
+            <a:avLst/>
+          </a:prstGeom>
+          <a:noFill/>
+        </p:spPr>
+        <p:txBody>
+          <a:bodyPr wrap="square" anchor="t" lIns="0" rIns="0" tIns="0" bIns="0">
+            <a:spAutoFit/>
+          </a:bodyPr>
+          <a:lstStyle/>
+          <a:p>
+            <a:pPr algn="r">
+              <a:lnSpc>
+                <a:spcPct val="106000"/>
+              </a:lnSpc>
+              <a:spcBef>
+                <a:spcPts val="0"/>
+              </a:spcBef>
+              <a:spcAft>
+                <a:spcPts val="0"/>
+              </a:spcAft>
+            </a:pPr>
+            <a:r>
+              <a:rPr sz="950" b="0">
+                <a:solidFill>
+                  <a:srgbClr val="8A9099"/>
+                </a:solidFill>
+                <a:latin typeface="Red Hat Text"/>
+              </a:rPr>
+              <a:t>9</a:t>
+            </a:r>
+          </a:p>
+        </p:txBody>
+      </p:sp>
+    </p:spTree>
+  </p:cSld>
+  <p:clrMapOvr>
+    <a:masterClrMapping/>
+  </p:clrMapOvr>
+</p:sld>
+</file>
+
 <file path=ppt/slides/slide2.xml><?xml version="1.0" encoding="utf-8"?>
 <p:sld xmlns:a="http://schemas.openxmlformats.org/drawingml/2006/main" xmlns:p="http://schemas.openxmlformats.org/presentationml/2006/main" xmlns:r="http://schemas.openxmlformats.org/officeDocument/2006/relationships">
   <p:cSld>
@@ -4423,11 +4860,11 @@
         <p:spPr>
           <a:xfrm>
             <a:off x="841248" y="2670048"/>
-            <a:ext cx="5715000" cy="530352"/>
+            <a:ext cx="5138928" cy="786384"/>
           </a:xfrm>
           <a:prstGeom prst="roundRect">
             <a:avLst>
-              <a:gd name="adj" fmla="val 6000"/>
+              <a:gd name="adj" fmla="val 7000"/>
             </a:avLst>
           </a:prstGeom>
           <a:solidFill>
@@ -4462,9 +4899,55 @@
           </a:p>
         </p:txBody>
       </p:sp>
+      <p:sp>
+        <p:nvSpPr>
+          <p:cNvPr id="8" name="Rounded Rectangle 7"/>
+          <p:cNvSpPr/>
+          <p:nvPr/>
+        </p:nvSpPr>
+        <p:spPr>
+          <a:xfrm>
+            <a:off x="987552" y="2807208"/>
+            <a:ext cx="512064" cy="512064"/>
+          </a:xfrm>
+          <a:prstGeom prst="roundRect">
+            <a:avLst>
+              <a:gd name="adj" fmla="val 26000"/>
+            </a:avLst>
+          </a:prstGeom>
+          <a:solidFill>
+            <a:srgbClr val="EE0000"/>
+          </a:solidFill>
+          <a:ln>
+            <a:noFill/>
+          </a:ln>
+          <a:effectLst/>
+        </p:spPr>
+        <p:style>
+          <a:lnRef idx="1">
+            <a:schemeClr val="accent1"/>
+          </a:lnRef>
+          <a:fillRef idx="3">
+            <a:schemeClr val="accent1"/>
+          </a:fillRef>
+          <a:effectRef idx="2">
+            <a:schemeClr val="accent1"/>
+          </a:effectRef>
+          <a:fontRef idx="minor">
+            <a:schemeClr val="lt1"/>
+          </a:fontRef>
+        </p:style>
+        <p:txBody>
+          <a:bodyPr rtlCol="0" anchor="ctr"/>
+          <a:lstStyle/>
+          <a:p>
+            <a:pPr algn="ctr"/>
+          </a:p>
+        </p:txBody>
+      </p:sp>
       <p:pic>
         <p:nvPicPr>
-          <p:cNvPr id="8" name="Picture 7" descr="check_steel.png"/>
+          <p:cNvPr id="9" name="Picture 8" descr="check_white.png"/>
           <p:cNvPicPr>
             <a:picLocks noChangeAspect="1"/>
           </p:cNvPicPr>
@@ -4478,8 +4961,8 @@
         </p:blipFill>
         <p:spPr>
           <a:xfrm>
-            <a:off x="987552" y="2816352"/>
-            <a:ext cx="237744" cy="237744"/>
+            <a:off x="1110447" y="2930103"/>
+            <a:ext cx="266273" cy="266273"/>
           </a:xfrm>
           <a:prstGeom prst="rect">
             <a:avLst/>
@@ -4488,14 +4971,14 @@
       </p:pic>
       <p:sp>
         <p:nvSpPr>
-          <p:cNvPr id="9" name="TextBox 8"/>
+          <p:cNvPr id="10" name="TextBox 9"/>
           <p:cNvSpPr txBox="1"/>
           <p:nvPr/>
         </p:nvSpPr>
         <p:spPr>
           <a:xfrm>
-            <a:off x="1353312" y="2670048"/>
-            <a:ext cx="5029200" cy="530352"/>
+            <a:off x="1627632" y="2670048"/>
+            <a:ext cx="4206240" cy="786384"/>
           </a:xfrm>
           <a:prstGeom prst="rect">
             <a:avLst/>
@@ -4520,7 +5003,7 @@
               </a:spcAft>
             </a:pPr>
             <a:r>
-              <a:rPr sz="1200" b="0">
+              <a:rPr sz="1150" b="0">
                 <a:solidFill>
                   <a:srgbClr val="1A1A1A"/>
                 </a:solidFill>
@@ -4533,18 +5016,18 @@
       </p:sp>
       <p:sp>
         <p:nvSpPr>
-          <p:cNvPr id="10" name="Rounded Rectangle 9"/>
+          <p:cNvPr id="11" name="Rounded Rectangle 10"/>
           <p:cNvSpPr/>
           <p:nvPr/>
         </p:nvSpPr>
         <p:spPr>
           <a:xfrm>
-            <a:off x="841248" y="3273552"/>
-            <a:ext cx="5715000" cy="530352"/>
+            <a:off x="6254496" y="2670048"/>
+            <a:ext cx="5138928" cy="786384"/>
           </a:xfrm>
           <a:prstGeom prst="roundRect">
             <a:avLst>
-              <a:gd name="adj" fmla="val 6000"/>
+              <a:gd name="adj" fmla="val 7000"/>
             </a:avLst>
           </a:prstGeom>
           <a:solidFill>
@@ -4579,9 +5062,55 @@
           </a:p>
         </p:txBody>
       </p:sp>
+      <p:sp>
+        <p:nvSpPr>
+          <p:cNvPr id="12" name="Rounded Rectangle 11"/>
+          <p:cNvSpPr/>
+          <p:nvPr/>
+        </p:nvSpPr>
+        <p:spPr>
+          <a:xfrm>
+            <a:off x="6400800" y="2807208"/>
+            <a:ext cx="512064" cy="512064"/>
+          </a:xfrm>
+          <a:prstGeom prst="roundRect">
+            <a:avLst>
+              <a:gd name="adj" fmla="val 26000"/>
+            </a:avLst>
+          </a:prstGeom>
+          <a:solidFill>
+            <a:srgbClr val="EE0000"/>
+          </a:solidFill>
+          <a:ln>
+            <a:noFill/>
+          </a:ln>
+          <a:effectLst/>
+        </p:spPr>
+        <p:style>
+          <a:lnRef idx="1">
+            <a:schemeClr val="accent1"/>
+          </a:lnRef>
+          <a:fillRef idx="3">
+            <a:schemeClr val="accent1"/>
+          </a:fillRef>
+          <a:effectRef idx="2">
+            <a:schemeClr val="accent1"/>
+          </a:effectRef>
+          <a:fontRef idx="minor">
+            <a:schemeClr val="lt1"/>
+          </a:fontRef>
+        </p:style>
+        <p:txBody>
+          <a:bodyPr rtlCol="0" anchor="ctr"/>
+          <a:lstStyle/>
+          <a:p>
+            <a:pPr algn="ctr"/>
+          </a:p>
+        </p:txBody>
+      </p:sp>
       <p:pic>
         <p:nvPicPr>
-          <p:cNvPr id="11" name="Picture 10" descr="check_steel.png"/>
+          <p:cNvPr id="13" name="Picture 12" descr="check_white.png"/>
           <p:cNvPicPr>
             <a:picLocks noChangeAspect="1"/>
           </p:cNvPicPr>
@@ -4595,8 +5124,8 @@
         </p:blipFill>
         <p:spPr>
           <a:xfrm>
-            <a:off x="987552" y="3419856"/>
-            <a:ext cx="237744" cy="237744"/>
+            <a:off x="6523695" y="2930103"/>
+            <a:ext cx="266273" cy="266273"/>
           </a:xfrm>
           <a:prstGeom prst="rect">
             <a:avLst/>
@@ -4605,14 +5134,14 @@
       </p:pic>
       <p:sp>
         <p:nvSpPr>
-          <p:cNvPr id="12" name="TextBox 11"/>
+          <p:cNvPr id="14" name="TextBox 13"/>
           <p:cNvSpPr txBox="1"/>
           <p:nvPr/>
         </p:nvSpPr>
         <p:spPr>
           <a:xfrm>
-            <a:off x="1353312" y="3273552"/>
-            <a:ext cx="5029200" cy="530352"/>
+            <a:off x="7040880" y="2670048"/>
+            <a:ext cx="4206240" cy="786384"/>
           </a:xfrm>
           <a:prstGeom prst="rect">
             <a:avLst/>
@@ -4637,7 +5166,7 @@
               </a:spcAft>
             </a:pPr>
             <a:r>
-              <a:rPr sz="1200" b="0">
+              <a:rPr sz="1150" b="0">
                 <a:solidFill>
                   <a:srgbClr val="1A1A1A"/>
                 </a:solidFill>
@@ -4650,18 +5179,18 @@
       </p:sp>
       <p:sp>
         <p:nvSpPr>
-          <p:cNvPr id="13" name="Rounded Rectangle 12"/>
+          <p:cNvPr id="15" name="Rounded Rectangle 14"/>
           <p:cNvSpPr/>
           <p:nvPr/>
         </p:nvSpPr>
         <p:spPr>
           <a:xfrm>
-            <a:off x="841248" y="3877056"/>
-            <a:ext cx="5715000" cy="530352"/>
+            <a:off x="841248" y="3602736"/>
+            <a:ext cx="5138928" cy="786384"/>
           </a:xfrm>
           <a:prstGeom prst="roundRect">
             <a:avLst>
-              <a:gd name="adj" fmla="val 6000"/>
+              <a:gd name="adj" fmla="val 7000"/>
             </a:avLst>
           </a:prstGeom>
           <a:solidFill>
@@ -4696,9 +5225,55 @@
           </a:p>
         </p:txBody>
       </p:sp>
+      <p:sp>
+        <p:nvSpPr>
+          <p:cNvPr id="16" name="Rounded Rectangle 15"/>
+          <p:cNvSpPr/>
+          <p:nvPr/>
+        </p:nvSpPr>
+        <p:spPr>
+          <a:xfrm>
+            <a:off x="987552" y="3739896"/>
+            <a:ext cx="512064" cy="512064"/>
+          </a:xfrm>
+          <a:prstGeom prst="roundRect">
+            <a:avLst>
+              <a:gd name="adj" fmla="val 26000"/>
+            </a:avLst>
+          </a:prstGeom>
+          <a:solidFill>
+            <a:srgbClr val="EE0000"/>
+          </a:solidFill>
+          <a:ln>
+            <a:noFill/>
+          </a:ln>
+          <a:effectLst/>
+        </p:spPr>
+        <p:style>
+          <a:lnRef idx="1">
+            <a:schemeClr val="accent1"/>
+          </a:lnRef>
+          <a:fillRef idx="3">
+            <a:schemeClr val="accent1"/>
+          </a:fillRef>
+          <a:effectRef idx="2">
+            <a:schemeClr val="accent1"/>
+          </a:effectRef>
+          <a:fontRef idx="minor">
+            <a:schemeClr val="lt1"/>
+          </a:fontRef>
+        </p:style>
+        <p:txBody>
+          <a:bodyPr rtlCol="0" anchor="ctr"/>
+          <a:lstStyle/>
+          <a:p>
+            <a:pPr algn="ctr"/>
+          </a:p>
+        </p:txBody>
+      </p:sp>
       <p:pic>
         <p:nvPicPr>
-          <p:cNvPr id="14" name="Picture 13" descr="check_steel.png"/>
+          <p:cNvPr id="17" name="Picture 16" descr="check_white.png"/>
           <p:cNvPicPr>
             <a:picLocks noChangeAspect="1"/>
           </p:cNvPicPr>
@@ -4712,8 +5287,8 @@
         </p:blipFill>
         <p:spPr>
           <a:xfrm>
-            <a:off x="987552" y="4023360"/>
-            <a:ext cx="237744" cy="237744"/>
+            <a:off x="1110447" y="3862791"/>
+            <a:ext cx="266273" cy="266273"/>
           </a:xfrm>
           <a:prstGeom prst="rect">
             <a:avLst/>
@@ -4722,14 +5297,14 @@
       </p:pic>
       <p:sp>
         <p:nvSpPr>
-          <p:cNvPr id="15" name="TextBox 14"/>
+          <p:cNvPr id="18" name="TextBox 17"/>
           <p:cNvSpPr txBox="1"/>
           <p:nvPr/>
         </p:nvSpPr>
         <p:spPr>
           <a:xfrm>
-            <a:off x="1353312" y="3877056"/>
-            <a:ext cx="5029200" cy="530352"/>
+            <a:off x="1627632" y="3602736"/>
+            <a:ext cx="4206240" cy="786384"/>
           </a:xfrm>
           <a:prstGeom prst="rect">
             <a:avLst/>
@@ -4754,7 +5329,7 @@
               </a:spcAft>
             </a:pPr>
             <a:r>
-              <a:rPr sz="1200" b="0">
+              <a:rPr sz="1150" b="0">
                 <a:solidFill>
                   <a:srgbClr val="1A1A1A"/>
                 </a:solidFill>
@@ -4767,18 +5342,18 @@
       </p:sp>
       <p:sp>
         <p:nvSpPr>
-          <p:cNvPr id="16" name="Rounded Rectangle 15"/>
+          <p:cNvPr id="19" name="Rounded Rectangle 18"/>
           <p:cNvSpPr/>
           <p:nvPr/>
         </p:nvSpPr>
         <p:spPr>
           <a:xfrm>
-            <a:off x="841248" y="4480560"/>
-            <a:ext cx="5715000" cy="530352"/>
+            <a:off x="6254496" y="3602736"/>
+            <a:ext cx="5138928" cy="786384"/>
           </a:xfrm>
           <a:prstGeom prst="roundRect">
             <a:avLst>
-              <a:gd name="adj" fmla="val 6000"/>
+              <a:gd name="adj" fmla="val 7000"/>
             </a:avLst>
           </a:prstGeom>
           <a:solidFill>
@@ -4813,9 +5388,55 @@
           </a:p>
         </p:txBody>
       </p:sp>
+      <p:sp>
+        <p:nvSpPr>
+          <p:cNvPr id="20" name="Rounded Rectangle 19"/>
+          <p:cNvSpPr/>
+          <p:nvPr/>
+        </p:nvSpPr>
+        <p:spPr>
+          <a:xfrm>
+            <a:off x="6400800" y="3739896"/>
+            <a:ext cx="512064" cy="512064"/>
+          </a:xfrm>
+          <a:prstGeom prst="roundRect">
+            <a:avLst>
+              <a:gd name="adj" fmla="val 26000"/>
+            </a:avLst>
+          </a:prstGeom>
+          <a:solidFill>
+            <a:srgbClr val="EE0000"/>
+          </a:solidFill>
+          <a:ln>
+            <a:noFill/>
+          </a:ln>
+          <a:effectLst/>
+        </p:spPr>
+        <p:style>
+          <a:lnRef idx="1">
+            <a:schemeClr val="accent1"/>
+          </a:lnRef>
+          <a:fillRef idx="3">
+            <a:schemeClr val="accent1"/>
+          </a:fillRef>
+          <a:effectRef idx="2">
+            <a:schemeClr val="accent1"/>
+          </a:effectRef>
+          <a:fontRef idx="minor">
+            <a:schemeClr val="lt1"/>
+          </a:fontRef>
+        </p:style>
+        <p:txBody>
+          <a:bodyPr rtlCol="0" anchor="ctr"/>
+          <a:lstStyle/>
+          <a:p>
+            <a:pPr algn="ctr"/>
+          </a:p>
+        </p:txBody>
+      </p:sp>
       <p:pic>
         <p:nvPicPr>
-          <p:cNvPr id="17" name="Picture 16" descr="check_steel.png"/>
+          <p:cNvPr id="21" name="Picture 20" descr="check_white.png"/>
           <p:cNvPicPr>
             <a:picLocks noChangeAspect="1"/>
           </p:cNvPicPr>
@@ -4829,8 +5450,8 @@
         </p:blipFill>
         <p:spPr>
           <a:xfrm>
-            <a:off x="987552" y="4626864"/>
-            <a:ext cx="237744" cy="237744"/>
+            <a:off x="6523695" y="3862791"/>
+            <a:ext cx="266273" cy="266273"/>
           </a:xfrm>
           <a:prstGeom prst="rect">
             <a:avLst/>
@@ -4839,14 +5460,14 @@
       </p:pic>
       <p:sp>
         <p:nvSpPr>
-          <p:cNvPr id="18" name="TextBox 17"/>
+          <p:cNvPr id="22" name="TextBox 21"/>
           <p:cNvSpPr txBox="1"/>
           <p:nvPr/>
         </p:nvSpPr>
         <p:spPr>
           <a:xfrm>
-            <a:off x="1353312" y="4480560"/>
-            <a:ext cx="5029200" cy="530352"/>
+            <a:off x="7040880" y="3602736"/>
+            <a:ext cx="4206240" cy="786384"/>
           </a:xfrm>
           <a:prstGeom prst="rect">
             <a:avLst/>
@@ -4871,7 +5492,7 @@
               </a:spcAft>
             </a:pPr>
             <a:r>
-              <a:rPr sz="1200" b="0">
+              <a:rPr sz="1150" b="0">
                 <a:solidFill>
                   <a:srgbClr val="1A1A1A"/>
                 </a:solidFill>
@@ -4884,18 +5505,18 @@
       </p:sp>
       <p:sp>
         <p:nvSpPr>
-          <p:cNvPr id="19" name="Rounded Rectangle 18"/>
+          <p:cNvPr id="23" name="Rounded Rectangle 22"/>
           <p:cNvSpPr/>
           <p:nvPr/>
         </p:nvSpPr>
         <p:spPr>
           <a:xfrm>
-            <a:off x="841248" y="5084064"/>
-            <a:ext cx="5715000" cy="530352"/>
+            <a:off x="841248" y="4535424"/>
+            <a:ext cx="5138928" cy="786384"/>
           </a:xfrm>
           <a:prstGeom prst="roundRect">
             <a:avLst>
-              <a:gd name="adj" fmla="val 6000"/>
+              <a:gd name="adj" fmla="val 7000"/>
             </a:avLst>
           </a:prstGeom>
           <a:solidFill>
@@ -4930,9 +5551,55 @@
           </a:p>
         </p:txBody>
       </p:sp>
+      <p:sp>
+        <p:nvSpPr>
+          <p:cNvPr id="24" name="Rounded Rectangle 23"/>
+          <p:cNvSpPr/>
+          <p:nvPr/>
+        </p:nvSpPr>
+        <p:spPr>
+          <a:xfrm>
+            <a:off x="987552" y="4672584"/>
+            <a:ext cx="512064" cy="512064"/>
+          </a:xfrm>
+          <a:prstGeom prst="roundRect">
+            <a:avLst>
+              <a:gd name="adj" fmla="val 26000"/>
+            </a:avLst>
+          </a:prstGeom>
+          <a:solidFill>
+            <a:srgbClr val="EE0000"/>
+          </a:solidFill>
+          <a:ln>
+            <a:noFill/>
+          </a:ln>
+          <a:effectLst/>
+        </p:spPr>
+        <p:style>
+          <a:lnRef idx="1">
+            <a:schemeClr val="accent1"/>
+          </a:lnRef>
+          <a:fillRef idx="3">
+            <a:schemeClr val="accent1"/>
+          </a:fillRef>
+          <a:effectRef idx="2">
+            <a:schemeClr val="accent1"/>
+          </a:effectRef>
+          <a:fontRef idx="minor">
+            <a:schemeClr val="lt1"/>
+          </a:fontRef>
+        </p:style>
+        <p:txBody>
+          <a:bodyPr rtlCol="0" anchor="ctr"/>
+          <a:lstStyle/>
+          <a:p>
+            <a:pPr algn="ctr"/>
+          </a:p>
+        </p:txBody>
+      </p:sp>
       <p:pic>
         <p:nvPicPr>
-          <p:cNvPr id="20" name="Picture 19" descr="check_steel.png"/>
+          <p:cNvPr id="25" name="Picture 24" descr="check_white.png"/>
           <p:cNvPicPr>
             <a:picLocks noChangeAspect="1"/>
           </p:cNvPicPr>
@@ -4946,8 +5613,8 @@
         </p:blipFill>
         <p:spPr>
           <a:xfrm>
-            <a:off x="987552" y="5230368"/>
-            <a:ext cx="237744" cy="237744"/>
+            <a:off x="1110447" y="4795479"/>
+            <a:ext cx="266273" cy="266273"/>
           </a:xfrm>
           <a:prstGeom prst="rect">
             <a:avLst/>
@@ -4956,14 +5623,14 @@
       </p:pic>
       <p:sp>
         <p:nvSpPr>
-          <p:cNvPr id="21" name="TextBox 20"/>
+          <p:cNvPr id="26" name="TextBox 25"/>
           <p:cNvSpPr txBox="1"/>
           <p:nvPr/>
         </p:nvSpPr>
         <p:spPr>
           <a:xfrm>
-            <a:off x="1353312" y="5084064"/>
-            <a:ext cx="5029200" cy="530352"/>
+            <a:off x="1627632" y="4535424"/>
+            <a:ext cx="4206240" cy="786384"/>
           </a:xfrm>
           <a:prstGeom prst="rect">
             <a:avLst/>
@@ -4988,221 +5655,13 @@
               </a:spcAft>
             </a:pPr>
             <a:r>
-              <a:rPr sz="1200" b="0">
+              <a:rPr sz="1150" b="0">
                 <a:solidFill>
                   <a:srgbClr val="1A1A1A"/>
                 </a:solidFill>
                 <a:latin typeface="Red Hat Text"/>
               </a:rPr>
               <a:t>A mesh moves it into a proxy beside every workload</a:t>
-            </a:r>
-          </a:p>
-        </p:txBody>
-      </p:sp>
-      <p:sp>
-        <p:nvSpPr>
-          <p:cNvPr id="22" name="Rounded Rectangle 21"/>
-          <p:cNvSpPr/>
-          <p:nvPr/>
-        </p:nvSpPr>
-        <p:spPr>
-          <a:xfrm>
-            <a:off x="6812280" y="2670048"/>
-            <a:ext cx="4538167" cy="2944368"/>
-          </a:xfrm>
-          <a:prstGeom prst="roundRect">
-            <a:avLst>
-              <a:gd name="adj" fmla="val 4000"/>
-            </a:avLst>
-          </a:prstGeom>
-          <a:solidFill>
-            <a:srgbClr val="FFFFFF"/>
-          </a:solidFill>
-          <a:ln w="15240">
-            <a:solidFill>
-              <a:srgbClr val="DDE1E6"/>
-            </a:solidFill>
-          </a:ln>
-          <a:effectLst/>
-        </p:spPr>
-        <p:style>
-          <a:lnRef idx="1">
-            <a:schemeClr val="accent1"/>
-          </a:lnRef>
-          <a:fillRef idx="3">
-            <a:schemeClr val="accent1"/>
-          </a:fillRef>
-          <a:effectRef idx="2">
-            <a:schemeClr val="accent1"/>
-          </a:effectRef>
-          <a:fontRef idx="minor">
-            <a:schemeClr val="lt1"/>
-          </a:fontRef>
-        </p:style>
-        <p:txBody>
-          <a:bodyPr rtlCol="0" anchor="ctr"/>
-          <a:lstStyle/>
-          <a:p>
-            <a:pPr algn="ctr"/>
-          </a:p>
-        </p:txBody>
-      </p:sp>
-      <p:sp>
-        <p:nvSpPr>
-          <p:cNvPr id="23" name="Rounded Rectangle 22"/>
-          <p:cNvSpPr/>
-          <p:nvPr/>
-        </p:nvSpPr>
-        <p:spPr>
-          <a:xfrm>
-            <a:off x="7013448" y="2871216"/>
-            <a:ext cx="1298448" cy="310896"/>
-          </a:xfrm>
-          <a:prstGeom prst="roundRect">
-            <a:avLst>
-              <a:gd name="adj" fmla="val 50000"/>
-            </a:avLst>
-          </a:prstGeom>
-          <a:solidFill>
-            <a:srgbClr val="FCECEC"/>
-          </a:solidFill>
-          <a:ln>
-            <a:noFill/>
-          </a:ln>
-          <a:effectLst/>
-        </p:spPr>
-        <p:style>
-          <a:lnRef idx="1">
-            <a:schemeClr val="accent1"/>
-          </a:lnRef>
-          <a:fillRef idx="3">
-            <a:schemeClr val="accent1"/>
-          </a:fillRef>
-          <a:effectRef idx="2">
-            <a:schemeClr val="accent1"/>
-          </a:effectRef>
-          <a:fontRef idx="minor">
-            <a:schemeClr val="lt1"/>
-          </a:fontRef>
-        </p:style>
-        <p:txBody>
-          <a:bodyPr rtlCol="0" anchor="ctr"/>
-          <a:lstStyle/>
-          <a:p>
-            <a:pPr algn="ctr"/>
-          </a:p>
-        </p:txBody>
-      </p:sp>
-      <p:sp>
-        <p:nvSpPr>
-          <p:cNvPr id="24" name="TextBox 23"/>
-          <p:cNvSpPr txBox="1"/>
-          <p:nvPr/>
-        </p:nvSpPr>
-        <p:spPr>
-          <a:xfrm>
-            <a:off x="7013448" y="2871216"/>
-            <a:ext cx="1298448" cy="310896"/>
-          </a:xfrm>
-          <a:prstGeom prst="rect">
-            <a:avLst/>
-          </a:prstGeom>
-          <a:noFill/>
-        </p:spPr>
-        <p:txBody>
-          <a:bodyPr wrap="none" anchor="ctr" lIns="0" rIns="0" tIns="0" bIns="0">
-            <a:spAutoFit/>
-          </a:bodyPr>
-          <a:lstStyle/>
-          <a:p>
-            <a:pPr algn="ctr">
-              <a:lnSpc>
-                <a:spcPct val="106000"/>
-              </a:lnSpc>
-              <a:spcBef>
-                <a:spcPts val="0"/>
-              </a:spcBef>
-              <a:spcAft>
-                <a:spcPts val="0"/>
-              </a:spcAft>
-            </a:pPr>
-            <a:r>
-              <a:rPr sz="850" b="1">
-                <a:solidFill>
-                  <a:srgbClr val="B80000"/>
-                </a:solidFill>
-                <a:latin typeface="Red Hat Display"/>
-              </a:rPr>
-              <a:t>MEDIA PASS</a:t>
-            </a:r>
-          </a:p>
-        </p:txBody>
-      </p:sp>
-      <p:pic>
-        <p:nvPicPr>
-          <p:cNvPr id="25" name="Picture 24" descr="eye_slate.png"/>
-          <p:cNvPicPr>
-            <a:picLocks noChangeAspect="1"/>
-          </p:cNvPicPr>
-          <p:nvPr/>
-        </p:nvPicPr>
-        <p:blipFill>
-          <a:blip r:embed="rId4"/>
-          <a:stretch>
-            <a:fillRect/>
-          </a:stretch>
-        </p:blipFill>
-        <p:spPr>
-          <a:xfrm>
-            <a:off x="8843619" y="3383280"/>
-            <a:ext cx="475488" cy="475488"/>
-          </a:xfrm>
-          <a:prstGeom prst="rect">
-            <a:avLst/>
-          </a:prstGeom>
-        </p:spPr>
-      </p:pic>
-      <p:sp>
-        <p:nvSpPr>
-          <p:cNvPr id="26" name="TextBox 25"/>
-          <p:cNvSpPr txBox="1"/>
-          <p:nvPr/>
-        </p:nvSpPr>
-        <p:spPr>
-          <a:xfrm>
-            <a:off x="7050024" y="3995928"/>
-            <a:ext cx="4062679" cy="1481328"/>
-          </a:xfrm>
-          <a:prstGeom prst="rect">
-            <a:avLst/>
-          </a:prstGeom>
-          <a:noFill/>
-        </p:spPr>
-        <p:txBody>
-          <a:bodyPr wrap="square" anchor="t" lIns="0" rIns="0" tIns="0" bIns="0">
-            <a:spAutoFit/>
-          </a:bodyPr>
-          <a:lstStyle/>
-          <a:p>
-            <a:pPr algn="l">
-              <a:lnSpc>
-                <a:spcPct val="120000"/>
-              </a:lnSpc>
-              <a:spcBef>
-                <a:spcPts val="0"/>
-              </a:spcBef>
-              <a:spcAft>
-                <a:spcPts val="0"/>
-              </a:spcAft>
-            </a:pPr>
-            <a:r>
-              <a:rPr sz="950" b="0">
-                <a:solidFill>
-                  <a:srgbClr val="8A9099"/>
-                </a:solidFill>
-                <a:latin typeface="Red Hat Text"/>
-              </a:rPr>
-              <a:t>A three-node chain (web → claims → fraud) with a red "hang" on the fraud node and back-pressure arrows piling up on claims and web; a side caption "one slow service, whole-site outage."</a:t>
             </a:r>
           </a:p>
         </p:txBody>
@@ -5510,7 +5969,7 @@
         <p:spPr>
           <a:xfrm>
             <a:off x="841248" y="2395728"/>
-            <a:ext cx="5715000" cy="530352"/>
+            <a:ext cx="4160520" cy="475488"/>
           </a:xfrm>
           <a:prstGeom prst="roundRect">
             <a:avLst>
@@ -5565,8 +6024,8 @@
         </p:blipFill>
         <p:spPr>
           <a:xfrm>
-            <a:off x="987552" y="2542032"/>
-            <a:ext cx="237744" cy="237744"/>
+            <a:off x="969264" y="2532888"/>
+            <a:ext cx="201168" cy="201168"/>
           </a:xfrm>
           <a:prstGeom prst="rect">
             <a:avLst/>
@@ -5581,8 +6040,8 @@
         </p:nvSpPr>
         <p:spPr>
           <a:xfrm>
-            <a:off x="1353312" y="2395728"/>
-            <a:ext cx="5029200" cy="530352"/>
+            <a:off x="1280160" y="2395728"/>
+            <a:ext cx="3593591" cy="475488"/>
           </a:xfrm>
           <a:prstGeom prst="rect">
             <a:avLst/>
@@ -5607,7 +6066,7 @@
               </a:spcAft>
             </a:pPr>
             <a:r>
-              <a:rPr sz="1200" b="0">
+              <a:rPr sz="1050" b="0">
                 <a:solidFill>
                   <a:srgbClr val="1A1A1A"/>
                 </a:solidFill>
@@ -5626,8 +6085,8 @@
         </p:nvSpPr>
         <p:spPr>
           <a:xfrm>
-            <a:off x="841248" y="2999232"/>
-            <a:ext cx="5715000" cy="530352"/>
+            <a:off x="841248" y="2944368"/>
+            <a:ext cx="4160520" cy="475488"/>
           </a:xfrm>
           <a:prstGeom prst="roundRect">
             <a:avLst>
@@ -5682,8 +6141,8 @@
         </p:blipFill>
         <p:spPr>
           <a:xfrm>
-            <a:off x="987552" y="3145536"/>
-            <a:ext cx="237744" cy="237744"/>
+            <a:off x="969264" y="3081528"/>
+            <a:ext cx="201168" cy="201168"/>
           </a:xfrm>
           <a:prstGeom prst="rect">
             <a:avLst/>
@@ -5698,8 +6157,8 @@
         </p:nvSpPr>
         <p:spPr>
           <a:xfrm>
-            <a:off x="1353312" y="2999232"/>
-            <a:ext cx="5029200" cy="530352"/>
+            <a:off x="1280160" y="2944368"/>
+            <a:ext cx="3593591" cy="475488"/>
           </a:xfrm>
           <a:prstGeom prst="rect">
             <a:avLst/>
@@ -5724,7 +6183,7 @@
               </a:spcAft>
             </a:pPr>
             <a:r>
-              <a:rPr sz="1200" b="0">
+              <a:rPr sz="1050" b="0">
                 <a:solidFill>
                   <a:srgbClr val="1A1A1A"/>
                 </a:solidFill>
@@ -5743,8 +6202,8 @@
         </p:nvSpPr>
         <p:spPr>
           <a:xfrm>
-            <a:off x="841248" y="3602736"/>
-            <a:ext cx="5715000" cy="530352"/>
+            <a:off x="841248" y="3493008"/>
+            <a:ext cx="4160520" cy="475488"/>
           </a:xfrm>
           <a:prstGeom prst="roundRect">
             <a:avLst>
@@ -5799,8 +6258,8 @@
         </p:blipFill>
         <p:spPr>
           <a:xfrm>
-            <a:off x="987552" y="3749040"/>
-            <a:ext cx="237744" cy="237744"/>
+            <a:off x="969264" y="3630168"/>
+            <a:ext cx="201168" cy="201168"/>
           </a:xfrm>
           <a:prstGeom prst="rect">
             <a:avLst/>
@@ -5815,8 +6274,8 @@
         </p:nvSpPr>
         <p:spPr>
           <a:xfrm>
-            <a:off x="1353312" y="3602736"/>
-            <a:ext cx="5029200" cy="530352"/>
+            <a:off x="1280160" y="3493008"/>
+            <a:ext cx="3593591" cy="475488"/>
           </a:xfrm>
           <a:prstGeom prst="rect">
             <a:avLst/>
@@ -5841,7 +6300,7 @@
               </a:spcAft>
             </a:pPr>
             <a:r>
-              <a:rPr sz="1200" b="0">
+              <a:rPr sz="1050" b="0">
                 <a:solidFill>
                   <a:srgbClr val="1A1A1A"/>
                 </a:solidFill>
@@ -5860,8 +6319,8 @@
         </p:nvSpPr>
         <p:spPr>
           <a:xfrm>
-            <a:off x="841248" y="4206240"/>
-            <a:ext cx="5715000" cy="530352"/>
+            <a:off x="841248" y="4041648"/>
+            <a:ext cx="4160520" cy="475488"/>
           </a:xfrm>
           <a:prstGeom prst="roundRect">
             <a:avLst>
@@ -5916,8 +6375,8 @@
         </p:blipFill>
         <p:spPr>
           <a:xfrm>
-            <a:off x="987552" y="4352544"/>
-            <a:ext cx="237744" cy="237744"/>
+            <a:off x="969264" y="4178807"/>
+            <a:ext cx="201168" cy="201168"/>
           </a:xfrm>
           <a:prstGeom prst="rect">
             <a:avLst/>
@@ -5932,8 +6391,8 @@
         </p:nvSpPr>
         <p:spPr>
           <a:xfrm>
-            <a:off x="1353312" y="4206240"/>
-            <a:ext cx="5029200" cy="530352"/>
+            <a:off x="1280160" y="4041648"/>
+            <a:ext cx="3593591" cy="475488"/>
           </a:xfrm>
           <a:prstGeom prst="rect">
             <a:avLst/>
@@ -5958,7 +6417,7 @@
               </a:spcAft>
             </a:pPr>
             <a:r>
-              <a:rPr sz="1200" b="0">
+              <a:rPr sz="1050" b="0">
                 <a:solidFill>
                   <a:srgbClr val="1A1A1A"/>
                 </a:solidFill>
@@ -5977,8 +6436,8 @@
         </p:nvSpPr>
         <p:spPr>
           <a:xfrm>
-            <a:off x="841248" y="4809744"/>
-            <a:ext cx="5715000" cy="530352"/>
+            <a:off x="841248" y="4590288"/>
+            <a:ext cx="4160520" cy="475488"/>
           </a:xfrm>
           <a:prstGeom prst="roundRect">
             <a:avLst>
@@ -6033,8 +6492,8 @@
         </p:blipFill>
         <p:spPr>
           <a:xfrm>
-            <a:off x="987552" y="4956048"/>
-            <a:ext cx="237744" cy="237744"/>
+            <a:off x="969264" y="4727447"/>
+            <a:ext cx="201168" cy="201168"/>
           </a:xfrm>
           <a:prstGeom prst="rect">
             <a:avLst/>
@@ -6049,8 +6508,8 @@
         </p:nvSpPr>
         <p:spPr>
           <a:xfrm>
-            <a:off x="1353312" y="4809744"/>
-            <a:ext cx="5029200" cy="530352"/>
+            <a:off x="1280160" y="4590288"/>
+            <a:ext cx="3593591" cy="475488"/>
           </a:xfrm>
           <a:prstGeom prst="rect">
             <a:avLst/>
@@ -6075,7 +6534,7 @@
               </a:spcAft>
             </a:pPr>
             <a:r>
-              <a:rPr sz="1200" b="0">
+              <a:rPr sz="1050" b="0">
                 <a:solidFill>
                   <a:srgbClr val="1A1A1A"/>
                 </a:solidFill>
@@ -6094,8 +6553,8 @@
         </p:nvSpPr>
         <p:spPr>
           <a:xfrm>
-            <a:off x="6812280" y="2395728"/>
-            <a:ext cx="4538167" cy="2944368"/>
+            <a:off x="5385816" y="2685140"/>
+            <a:ext cx="5964631" cy="2164375"/>
           </a:xfrm>
           <a:prstGeom prst="roundRect">
             <a:avLst>
@@ -6134,100 +6593,9 @@
           </a:p>
         </p:txBody>
       </p:sp>
-      <p:sp>
-        <p:nvSpPr>
-          <p:cNvPr id="22" name="Rounded Rectangle 21"/>
-          <p:cNvSpPr/>
-          <p:nvPr/>
-        </p:nvSpPr>
-        <p:spPr>
-          <a:xfrm>
-            <a:off x="7013448" y="2596896"/>
-            <a:ext cx="1298448" cy="310896"/>
-          </a:xfrm>
-          <a:prstGeom prst="roundRect">
-            <a:avLst>
-              <a:gd name="adj" fmla="val 50000"/>
-            </a:avLst>
-          </a:prstGeom>
-          <a:solidFill>
-            <a:srgbClr val="FCECEC"/>
-          </a:solidFill>
-          <a:ln>
-            <a:noFill/>
-          </a:ln>
-          <a:effectLst/>
-        </p:spPr>
-        <p:style>
-          <a:lnRef idx="1">
-            <a:schemeClr val="accent1"/>
-          </a:lnRef>
-          <a:fillRef idx="3">
-            <a:schemeClr val="accent1"/>
-          </a:fillRef>
-          <a:effectRef idx="2">
-            <a:schemeClr val="accent1"/>
-          </a:effectRef>
-          <a:fontRef idx="minor">
-            <a:schemeClr val="lt1"/>
-          </a:fontRef>
-        </p:style>
-        <p:txBody>
-          <a:bodyPr rtlCol="0" anchor="ctr"/>
-          <a:lstStyle/>
-          <a:p>
-            <a:pPr algn="ctr"/>
-          </a:p>
-        </p:txBody>
-      </p:sp>
-      <p:sp>
-        <p:nvSpPr>
-          <p:cNvPr id="23" name="TextBox 22"/>
-          <p:cNvSpPr txBox="1"/>
-          <p:nvPr/>
-        </p:nvSpPr>
-        <p:spPr>
-          <a:xfrm>
-            <a:off x="7013448" y="2596896"/>
-            <a:ext cx="1298448" cy="310896"/>
-          </a:xfrm>
-          <a:prstGeom prst="rect">
-            <a:avLst/>
-          </a:prstGeom>
-          <a:noFill/>
-        </p:spPr>
-        <p:txBody>
-          <a:bodyPr wrap="none" anchor="ctr" lIns="0" rIns="0" tIns="0" bIns="0">
-            <a:spAutoFit/>
-          </a:bodyPr>
-          <a:lstStyle/>
-          <a:p>
-            <a:pPr algn="ctr">
-              <a:lnSpc>
-                <a:spcPct val="106000"/>
-              </a:lnSpc>
-              <a:spcBef>
-                <a:spcPts val="0"/>
-              </a:spcBef>
-              <a:spcAft>
-                <a:spcPts val="0"/>
-              </a:spcAft>
-            </a:pPr>
-            <a:r>
-              <a:rPr sz="850" b="1">
-                <a:solidFill>
-                  <a:srgbClr val="B80000"/>
-                </a:solidFill>
-                <a:latin typeface="Red Hat Display"/>
-              </a:rPr>
-              <a:t>MEDIA PASS</a:t>
-            </a:r>
-          </a:p>
-        </p:txBody>
-      </p:sp>
       <p:pic>
         <p:nvPicPr>
-          <p:cNvPr id="24" name="Picture 23" descr="eye_slate.png"/>
+          <p:cNvPr id="22" name="Picture 21" descr="01-mesh-architecture.png"/>
           <p:cNvPicPr>
             <a:picLocks noChangeAspect="1"/>
           </p:cNvPicPr>
@@ -6241,62 +6609,17 @@
         </p:blipFill>
         <p:spPr>
           <a:xfrm>
-            <a:off x="8843619" y="3108960"/>
-            <a:ext cx="475488" cy="475488"/>
+            <a:off x="5532120" y="2831444"/>
+            <a:ext cx="5672023" cy="1871767"/>
           </a:xfrm>
           <a:prstGeom prst="rect">
             <a:avLst/>
           </a:prstGeom>
         </p:spPr>
       </p:pic>
-      <p:sp>
-        <p:nvSpPr>
-          <p:cNvPr id="25" name="TextBox 24"/>
-          <p:cNvSpPr txBox="1"/>
-          <p:nvPr/>
-        </p:nvSpPr>
-        <p:spPr>
-          <a:xfrm>
-            <a:off x="7050024" y="3721608"/>
-            <a:ext cx="4062679" cy="1481328"/>
-          </a:xfrm>
-          <a:prstGeom prst="rect">
-            <a:avLst/>
-          </a:prstGeom>
-          <a:noFill/>
-        </p:spPr>
-        <p:txBody>
-          <a:bodyPr wrap="square" anchor="t" lIns="0" rIns="0" tIns="0" bIns="0">
-            <a:spAutoFit/>
-          </a:bodyPr>
-          <a:lstStyle/>
-          <a:p>
-            <a:pPr algn="l">
-              <a:lnSpc>
-                <a:spcPct val="120000"/>
-              </a:lnSpc>
-              <a:spcBef>
-                <a:spcPts val="0"/>
-              </a:spcBef>
-              <a:spcAft>
-                <a:spcPts val="0"/>
-              </a:spcAft>
-            </a:pPr>
-            <a:r>
-              <a:rPr sz="950" b="0">
-                <a:solidFill>
-                  <a:srgbClr val="8A9099"/>
-                </a:solidFill>
-                <a:latin typeface="Red Hat Text"/>
-              </a:rPr>
-              <a:t>Reuse concept diagram service-mesh-advanced-gateways-...-01-mesh-architecture.svg — blue control plane (istiod + Kiali) pushing config/certs down to amber sidecar proxies wrapping green app containers, with an un-meshed red client outside.</a:t>
-            </a:r>
-          </a:p>
-        </p:txBody>
-      </p:sp>
       <p:cxnSp>
         <p:nvCxnSpPr>
-          <p:cNvPr id="26" name="Connector 25"/>
+          <p:cNvPr id="23" name="Connector 22"/>
           <p:cNvCxnSpPr/>
           <p:nvPr/>
         </p:nvCxnSpPr>
@@ -6332,7 +6655,7 @@
       </p:cxnSp>
       <p:sp>
         <p:nvSpPr>
-          <p:cNvPr id="27" name="TextBox 26"/>
+          <p:cNvPr id="24" name="TextBox 23"/>
           <p:cNvSpPr txBox="1"/>
           <p:nvPr/>
         </p:nvSpPr>
@@ -6377,7 +6700,7 @@
       </p:sp>
       <p:sp>
         <p:nvSpPr>
-          <p:cNvPr id="28" name="TextBox 27"/>
+          <p:cNvPr id="25" name="TextBox 24"/>
           <p:cNvSpPr txBox="1"/>
           <p:nvPr/>
         </p:nvSpPr>
@@ -6597,11 +6920,11 @@
         <p:spPr>
           <a:xfrm>
             <a:off x="841248" y="2395728"/>
-            <a:ext cx="5715000" cy="530352"/>
+            <a:ext cx="5138928" cy="786384"/>
           </a:xfrm>
           <a:prstGeom prst="roundRect">
             <a:avLst>
-              <a:gd name="adj" fmla="val 6000"/>
+              <a:gd name="adj" fmla="val 7000"/>
             </a:avLst>
           </a:prstGeom>
           <a:solidFill>
@@ -6636,9 +6959,55 @@
           </a:p>
         </p:txBody>
       </p:sp>
+      <p:sp>
+        <p:nvSpPr>
+          <p:cNvPr id="7" name="Rounded Rectangle 6"/>
+          <p:cNvSpPr/>
+          <p:nvPr/>
+        </p:nvSpPr>
+        <p:spPr>
+          <a:xfrm>
+            <a:off x="987552" y="2532888"/>
+            <a:ext cx="512064" cy="512064"/>
+          </a:xfrm>
+          <a:prstGeom prst="roundRect">
+            <a:avLst>
+              <a:gd name="adj" fmla="val 26000"/>
+            </a:avLst>
+          </a:prstGeom>
+          <a:solidFill>
+            <a:srgbClr val="EE0000"/>
+          </a:solidFill>
+          <a:ln>
+            <a:noFill/>
+          </a:ln>
+          <a:effectLst/>
+        </p:spPr>
+        <p:style>
+          <a:lnRef idx="1">
+            <a:schemeClr val="accent1"/>
+          </a:lnRef>
+          <a:fillRef idx="3">
+            <a:schemeClr val="accent1"/>
+          </a:fillRef>
+          <a:effectRef idx="2">
+            <a:schemeClr val="accent1"/>
+          </a:effectRef>
+          <a:fontRef idx="minor">
+            <a:schemeClr val="lt1"/>
+          </a:fontRef>
+        </p:style>
+        <p:txBody>
+          <a:bodyPr rtlCol="0" anchor="ctr"/>
+          <a:lstStyle/>
+          <a:p>
+            <a:pPr algn="ctr"/>
+          </a:p>
+        </p:txBody>
+      </p:sp>
       <p:pic>
         <p:nvPicPr>
-          <p:cNvPr id="7" name="Picture 6" descr="check_steel.png"/>
+          <p:cNvPr id="8" name="Picture 7" descr="check_white.png"/>
           <p:cNvPicPr>
             <a:picLocks noChangeAspect="1"/>
           </p:cNvPicPr>
@@ -6652,8 +7021,8 @@
         </p:blipFill>
         <p:spPr>
           <a:xfrm>
-            <a:off x="987552" y="2542032"/>
-            <a:ext cx="237744" cy="237744"/>
+            <a:off x="1110447" y="2655783"/>
+            <a:ext cx="266273" cy="266273"/>
           </a:xfrm>
           <a:prstGeom prst="rect">
             <a:avLst/>
@@ -6662,14 +7031,14 @@
       </p:pic>
       <p:sp>
         <p:nvSpPr>
-          <p:cNvPr id="8" name="TextBox 7"/>
+          <p:cNvPr id="9" name="TextBox 8"/>
           <p:cNvSpPr txBox="1"/>
           <p:nvPr/>
         </p:nvSpPr>
         <p:spPr>
           <a:xfrm>
-            <a:off x="1353312" y="2395728"/>
-            <a:ext cx="5029200" cy="530352"/>
+            <a:off x="1627632" y="2395728"/>
+            <a:ext cx="4206240" cy="786384"/>
           </a:xfrm>
           <a:prstGeom prst="rect">
             <a:avLst/>
@@ -6694,7 +7063,7 @@
               </a:spcAft>
             </a:pPr>
             <a:r>
-              <a:rPr sz="1200" b="0">
+              <a:rPr sz="1150" b="0">
                 <a:solidFill>
                   <a:srgbClr val="1A1A1A"/>
                 </a:solidFill>
@@ -6707,18 +7076,18 @@
       </p:sp>
       <p:sp>
         <p:nvSpPr>
-          <p:cNvPr id="9" name="Rounded Rectangle 8"/>
+          <p:cNvPr id="10" name="Rounded Rectangle 9"/>
           <p:cNvSpPr/>
           <p:nvPr/>
         </p:nvSpPr>
         <p:spPr>
           <a:xfrm>
-            <a:off x="841248" y="2999232"/>
-            <a:ext cx="5715000" cy="530352"/>
+            <a:off x="6254496" y="2395728"/>
+            <a:ext cx="5138928" cy="786384"/>
           </a:xfrm>
           <a:prstGeom prst="roundRect">
             <a:avLst>
-              <a:gd name="adj" fmla="val 6000"/>
+              <a:gd name="adj" fmla="val 7000"/>
             </a:avLst>
           </a:prstGeom>
           <a:solidFill>
@@ -6753,9 +7122,55 @@
           </a:p>
         </p:txBody>
       </p:sp>
+      <p:sp>
+        <p:nvSpPr>
+          <p:cNvPr id="11" name="Rounded Rectangle 10"/>
+          <p:cNvSpPr/>
+          <p:nvPr/>
+        </p:nvSpPr>
+        <p:spPr>
+          <a:xfrm>
+            <a:off x="6400800" y="2532888"/>
+            <a:ext cx="512064" cy="512064"/>
+          </a:xfrm>
+          <a:prstGeom prst="roundRect">
+            <a:avLst>
+              <a:gd name="adj" fmla="val 26000"/>
+            </a:avLst>
+          </a:prstGeom>
+          <a:solidFill>
+            <a:srgbClr val="EE0000"/>
+          </a:solidFill>
+          <a:ln>
+            <a:noFill/>
+          </a:ln>
+          <a:effectLst/>
+        </p:spPr>
+        <p:style>
+          <a:lnRef idx="1">
+            <a:schemeClr val="accent1"/>
+          </a:lnRef>
+          <a:fillRef idx="3">
+            <a:schemeClr val="accent1"/>
+          </a:fillRef>
+          <a:effectRef idx="2">
+            <a:schemeClr val="accent1"/>
+          </a:effectRef>
+          <a:fontRef idx="minor">
+            <a:schemeClr val="lt1"/>
+          </a:fontRef>
+        </p:style>
+        <p:txBody>
+          <a:bodyPr rtlCol="0" anchor="ctr"/>
+          <a:lstStyle/>
+          <a:p>
+            <a:pPr algn="ctr"/>
+          </a:p>
+        </p:txBody>
+      </p:sp>
       <p:pic>
         <p:nvPicPr>
-          <p:cNvPr id="10" name="Picture 9" descr="check_steel.png"/>
+          <p:cNvPr id="12" name="Picture 11" descr="check_white.png"/>
           <p:cNvPicPr>
             <a:picLocks noChangeAspect="1"/>
           </p:cNvPicPr>
@@ -6769,8 +7184,8 @@
         </p:blipFill>
         <p:spPr>
           <a:xfrm>
-            <a:off x="987552" y="3145536"/>
-            <a:ext cx="237744" cy="237744"/>
+            <a:off x="6523695" y="2655783"/>
+            <a:ext cx="266273" cy="266273"/>
           </a:xfrm>
           <a:prstGeom prst="rect">
             <a:avLst/>
@@ -6779,14 +7194,14 @@
       </p:pic>
       <p:sp>
         <p:nvSpPr>
-          <p:cNvPr id="11" name="TextBox 10"/>
+          <p:cNvPr id="13" name="TextBox 12"/>
           <p:cNvSpPr txBox="1"/>
           <p:nvPr/>
         </p:nvSpPr>
         <p:spPr>
           <a:xfrm>
-            <a:off x="1353312" y="2999232"/>
-            <a:ext cx="5029200" cy="530352"/>
+            <a:off x="7040880" y="2395728"/>
+            <a:ext cx="4206240" cy="786384"/>
           </a:xfrm>
           <a:prstGeom prst="rect">
             <a:avLst/>
@@ -6811,7 +7226,7 @@
               </a:spcAft>
             </a:pPr>
             <a:r>
-              <a:rPr sz="1200" b="0">
+              <a:rPr sz="1150" b="0">
                 <a:solidFill>
                   <a:srgbClr val="1A1A1A"/>
                 </a:solidFill>
@@ -6824,18 +7239,18 @@
       </p:sp>
       <p:sp>
         <p:nvSpPr>
-          <p:cNvPr id="12" name="Rounded Rectangle 11"/>
+          <p:cNvPr id="14" name="Rounded Rectangle 13"/>
           <p:cNvSpPr/>
           <p:nvPr/>
         </p:nvSpPr>
         <p:spPr>
           <a:xfrm>
-            <a:off x="841248" y="3602736"/>
-            <a:ext cx="5715000" cy="530352"/>
+            <a:off x="841248" y="3328416"/>
+            <a:ext cx="5138928" cy="786384"/>
           </a:xfrm>
           <a:prstGeom prst="roundRect">
             <a:avLst>
-              <a:gd name="adj" fmla="val 6000"/>
+              <a:gd name="adj" fmla="val 7000"/>
             </a:avLst>
           </a:prstGeom>
           <a:solidFill>
@@ -6870,9 +7285,55 @@
           </a:p>
         </p:txBody>
       </p:sp>
+      <p:sp>
+        <p:nvSpPr>
+          <p:cNvPr id="15" name="Rounded Rectangle 14"/>
+          <p:cNvSpPr/>
+          <p:nvPr/>
+        </p:nvSpPr>
+        <p:spPr>
+          <a:xfrm>
+            <a:off x="987552" y="3465576"/>
+            <a:ext cx="512064" cy="512064"/>
+          </a:xfrm>
+          <a:prstGeom prst="roundRect">
+            <a:avLst>
+              <a:gd name="adj" fmla="val 26000"/>
+            </a:avLst>
+          </a:prstGeom>
+          <a:solidFill>
+            <a:srgbClr val="EE0000"/>
+          </a:solidFill>
+          <a:ln>
+            <a:noFill/>
+          </a:ln>
+          <a:effectLst/>
+        </p:spPr>
+        <p:style>
+          <a:lnRef idx="1">
+            <a:schemeClr val="accent1"/>
+          </a:lnRef>
+          <a:fillRef idx="3">
+            <a:schemeClr val="accent1"/>
+          </a:fillRef>
+          <a:effectRef idx="2">
+            <a:schemeClr val="accent1"/>
+          </a:effectRef>
+          <a:fontRef idx="minor">
+            <a:schemeClr val="lt1"/>
+          </a:fontRef>
+        </p:style>
+        <p:txBody>
+          <a:bodyPr rtlCol="0" anchor="ctr"/>
+          <a:lstStyle/>
+          <a:p>
+            <a:pPr algn="ctr"/>
+          </a:p>
+        </p:txBody>
+      </p:sp>
       <p:pic>
         <p:nvPicPr>
-          <p:cNvPr id="13" name="Picture 12" descr="check_steel.png"/>
+          <p:cNvPr id="16" name="Picture 15" descr="check_white.png"/>
           <p:cNvPicPr>
             <a:picLocks noChangeAspect="1"/>
           </p:cNvPicPr>
@@ -6886,8 +7347,8 @@
         </p:blipFill>
         <p:spPr>
           <a:xfrm>
-            <a:off x="987552" y="3749040"/>
-            <a:ext cx="237744" cy="237744"/>
+            <a:off x="1110447" y="3588471"/>
+            <a:ext cx="266273" cy="266273"/>
           </a:xfrm>
           <a:prstGeom prst="rect">
             <a:avLst/>
@@ -6896,14 +7357,14 @@
       </p:pic>
       <p:sp>
         <p:nvSpPr>
-          <p:cNvPr id="14" name="TextBox 13"/>
+          <p:cNvPr id="17" name="TextBox 16"/>
           <p:cNvSpPr txBox="1"/>
           <p:nvPr/>
         </p:nvSpPr>
         <p:spPr>
           <a:xfrm>
-            <a:off x="1353312" y="3602736"/>
-            <a:ext cx="5029200" cy="530352"/>
+            <a:off x="1627632" y="3328416"/>
+            <a:ext cx="4206240" cy="786384"/>
           </a:xfrm>
           <a:prstGeom prst="rect">
             <a:avLst/>
@@ -6928,7 +7389,7 @@
               </a:spcAft>
             </a:pPr>
             <a:r>
-              <a:rPr sz="1200" b="0">
+              <a:rPr sz="1150" b="0">
                 <a:solidFill>
                   <a:srgbClr val="1A1A1A"/>
                 </a:solidFill>
@@ -6941,18 +7402,18 @@
       </p:sp>
       <p:sp>
         <p:nvSpPr>
-          <p:cNvPr id="15" name="Rounded Rectangle 14"/>
+          <p:cNvPr id="18" name="Rounded Rectangle 17"/>
           <p:cNvSpPr/>
           <p:nvPr/>
         </p:nvSpPr>
         <p:spPr>
           <a:xfrm>
-            <a:off x="841248" y="4206240"/>
-            <a:ext cx="5715000" cy="530352"/>
+            <a:off x="6254496" y="3328416"/>
+            <a:ext cx="5138928" cy="786384"/>
           </a:xfrm>
           <a:prstGeom prst="roundRect">
             <a:avLst>
-              <a:gd name="adj" fmla="val 6000"/>
+              <a:gd name="adj" fmla="val 7000"/>
             </a:avLst>
           </a:prstGeom>
           <a:solidFill>
@@ -6987,9 +7448,55 @@
           </a:p>
         </p:txBody>
       </p:sp>
+      <p:sp>
+        <p:nvSpPr>
+          <p:cNvPr id="19" name="Rounded Rectangle 18"/>
+          <p:cNvSpPr/>
+          <p:nvPr/>
+        </p:nvSpPr>
+        <p:spPr>
+          <a:xfrm>
+            <a:off x="6400800" y="3465576"/>
+            <a:ext cx="512064" cy="512064"/>
+          </a:xfrm>
+          <a:prstGeom prst="roundRect">
+            <a:avLst>
+              <a:gd name="adj" fmla="val 26000"/>
+            </a:avLst>
+          </a:prstGeom>
+          <a:solidFill>
+            <a:srgbClr val="EE0000"/>
+          </a:solidFill>
+          <a:ln>
+            <a:noFill/>
+          </a:ln>
+          <a:effectLst/>
+        </p:spPr>
+        <p:style>
+          <a:lnRef idx="1">
+            <a:schemeClr val="accent1"/>
+          </a:lnRef>
+          <a:fillRef idx="3">
+            <a:schemeClr val="accent1"/>
+          </a:fillRef>
+          <a:effectRef idx="2">
+            <a:schemeClr val="accent1"/>
+          </a:effectRef>
+          <a:fontRef idx="minor">
+            <a:schemeClr val="lt1"/>
+          </a:fontRef>
+        </p:style>
+        <p:txBody>
+          <a:bodyPr rtlCol="0" anchor="ctr"/>
+          <a:lstStyle/>
+          <a:p>
+            <a:pPr algn="ctr"/>
+          </a:p>
+        </p:txBody>
+      </p:sp>
       <p:pic>
         <p:nvPicPr>
-          <p:cNvPr id="16" name="Picture 15" descr="check_steel.png"/>
+          <p:cNvPr id="20" name="Picture 19" descr="check_white.png"/>
           <p:cNvPicPr>
             <a:picLocks noChangeAspect="1"/>
           </p:cNvPicPr>
@@ -7003,8 +7510,8 @@
         </p:blipFill>
         <p:spPr>
           <a:xfrm>
-            <a:off x="987552" y="4352544"/>
-            <a:ext cx="237744" cy="237744"/>
+            <a:off x="6523695" y="3588471"/>
+            <a:ext cx="266273" cy="266273"/>
           </a:xfrm>
           <a:prstGeom prst="rect">
             <a:avLst/>
@@ -7013,14 +7520,14 @@
       </p:pic>
       <p:sp>
         <p:nvSpPr>
-          <p:cNvPr id="17" name="TextBox 16"/>
+          <p:cNvPr id="21" name="TextBox 20"/>
           <p:cNvSpPr txBox="1"/>
           <p:nvPr/>
         </p:nvSpPr>
         <p:spPr>
           <a:xfrm>
-            <a:off x="1353312" y="4206240"/>
-            <a:ext cx="5029200" cy="530352"/>
+            <a:off x="7040880" y="3328416"/>
+            <a:ext cx="4206240" cy="786384"/>
           </a:xfrm>
           <a:prstGeom prst="rect">
             <a:avLst/>
@@ -7045,7 +7552,7 @@
               </a:spcAft>
             </a:pPr>
             <a:r>
-              <a:rPr sz="1200" b="0">
+              <a:rPr sz="1150" b="0">
                 <a:solidFill>
                   <a:srgbClr val="1A1A1A"/>
                 </a:solidFill>
@@ -7058,18 +7565,18 @@
       </p:sp>
       <p:sp>
         <p:nvSpPr>
-          <p:cNvPr id="18" name="Rounded Rectangle 17"/>
+          <p:cNvPr id="22" name="Rounded Rectangle 21"/>
           <p:cNvSpPr/>
           <p:nvPr/>
         </p:nvSpPr>
         <p:spPr>
           <a:xfrm>
-            <a:off x="841248" y="4809744"/>
-            <a:ext cx="5715000" cy="530352"/>
+            <a:off x="841248" y="4261104"/>
+            <a:ext cx="5138928" cy="786384"/>
           </a:xfrm>
           <a:prstGeom prst="roundRect">
             <a:avLst>
-              <a:gd name="adj" fmla="val 6000"/>
+              <a:gd name="adj" fmla="val 7000"/>
             </a:avLst>
           </a:prstGeom>
           <a:solidFill>
@@ -7104,9 +7611,55 @@
           </a:p>
         </p:txBody>
       </p:sp>
+      <p:sp>
+        <p:nvSpPr>
+          <p:cNvPr id="23" name="Rounded Rectangle 22"/>
+          <p:cNvSpPr/>
+          <p:nvPr/>
+        </p:nvSpPr>
+        <p:spPr>
+          <a:xfrm>
+            <a:off x="987552" y="4398264"/>
+            <a:ext cx="512064" cy="512064"/>
+          </a:xfrm>
+          <a:prstGeom prst="roundRect">
+            <a:avLst>
+              <a:gd name="adj" fmla="val 26000"/>
+            </a:avLst>
+          </a:prstGeom>
+          <a:solidFill>
+            <a:srgbClr val="EE0000"/>
+          </a:solidFill>
+          <a:ln>
+            <a:noFill/>
+          </a:ln>
+          <a:effectLst/>
+        </p:spPr>
+        <p:style>
+          <a:lnRef idx="1">
+            <a:schemeClr val="accent1"/>
+          </a:lnRef>
+          <a:fillRef idx="3">
+            <a:schemeClr val="accent1"/>
+          </a:fillRef>
+          <a:effectRef idx="2">
+            <a:schemeClr val="accent1"/>
+          </a:effectRef>
+          <a:fontRef idx="minor">
+            <a:schemeClr val="lt1"/>
+          </a:fontRef>
+        </p:style>
+        <p:txBody>
+          <a:bodyPr rtlCol="0" anchor="ctr"/>
+          <a:lstStyle/>
+          <a:p>
+            <a:pPr algn="ctr"/>
+          </a:p>
+        </p:txBody>
+      </p:sp>
       <p:pic>
         <p:nvPicPr>
-          <p:cNvPr id="19" name="Picture 18" descr="check_steel.png"/>
+          <p:cNvPr id="24" name="Picture 23" descr="check_white.png"/>
           <p:cNvPicPr>
             <a:picLocks noChangeAspect="1"/>
           </p:cNvPicPr>
@@ -7120,8 +7673,8 @@
         </p:blipFill>
         <p:spPr>
           <a:xfrm>
-            <a:off x="987552" y="4956048"/>
-            <a:ext cx="237744" cy="237744"/>
+            <a:off x="1110447" y="4521159"/>
+            <a:ext cx="266273" cy="266273"/>
           </a:xfrm>
           <a:prstGeom prst="rect">
             <a:avLst/>
@@ -7130,14 +7683,14 @@
       </p:pic>
       <p:sp>
         <p:nvSpPr>
-          <p:cNvPr id="20" name="TextBox 19"/>
+          <p:cNvPr id="25" name="TextBox 24"/>
           <p:cNvSpPr txBox="1"/>
           <p:nvPr/>
         </p:nvSpPr>
         <p:spPr>
           <a:xfrm>
-            <a:off x="1353312" y="4809744"/>
-            <a:ext cx="5029200" cy="530352"/>
+            <a:off x="1627632" y="4261104"/>
+            <a:ext cx="4206240" cy="786384"/>
           </a:xfrm>
           <a:prstGeom prst="rect">
             <a:avLst/>
@@ -7162,221 +7715,13 @@
               </a:spcAft>
             </a:pPr>
             <a:r>
-              <a:rPr sz="1200" b="0">
+              <a:rPr sz="1150" b="0">
                 <a:solidFill>
                   <a:srgbClr val="1A1A1A"/>
                 </a:solidFill>
                 <a:latin typeface="Red Hat Text"/>
               </a:rPr>
               <a:t>A control point: route/secure/slow/retry by applying a resource</a:t>
-            </a:r>
-          </a:p>
-        </p:txBody>
-      </p:sp>
-      <p:sp>
-        <p:nvSpPr>
-          <p:cNvPr id="21" name="Rounded Rectangle 20"/>
-          <p:cNvSpPr/>
-          <p:nvPr/>
-        </p:nvSpPr>
-        <p:spPr>
-          <a:xfrm>
-            <a:off x="6812280" y="2395728"/>
-            <a:ext cx="4538167" cy="2944368"/>
-          </a:xfrm>
-          <a:prstGeom prst="roundRect">
-            <a:avLst>
-              <a:gd name="adj" fmla="val 4000"/>
-            </a:avLst>
-          </a:prstGeom>
-          <a:solidFill>
-            <a:srgbClr val="FFFFFF"/>
-          </a:solidFill>
-          <a:ln w="15240">
-            <a:solidFill>
-              <a:srgbClr val="DDE1E6"/>
-            </a:solidFill>
-          </a:ln>
-          <a:effectLst/>
-        </p:spPr>
-        <p:style>
-          <a:lnRef idx="1">
-            <a:schemeClr val="accent1"/>
-          </a:lnRef>
-          <a:fillRef idx="3">
-            <a:schemeClr val="accent1"/>
-          </a:fillRef>
-          <a:effectRef idx="2">
-            <a:schemeClr val="accent1"/>
-          </a:effectRef>
-          <a:fontRef idx="minor">
-            <a:schemeClr val="lt1"/>
-          </a:fontRef>
-        </p:style>
-        <p:txBody>
-          <a:bodyPr rtlCol="0" anchor="ctr"/>
-          <a:lstStyle/>
-          <a:p>
-            <a:pPr algn="ctr"/>
-          </a:p>
-        </p:txBody>
-      </p:sp>
-      <p:sp>
-        <p:nvSpPr>
-          <p:cNvPr id="22" name="Rounded Rectangle 21"/>
-          <p:cNvSpPr/>
-          <p:nvPr/>
-        </p:nvSpPr>
-        <p:spPr>
-          <a:xfrm>
-            <a:off x="7013448" y="2596896"/>
-            <a:ext cx="1298448" cy="310896"/>
-          </a:xfrm>
-          <a:prstGeom prst="roundRect">
-            <a:avLst>
-              <a:gd name="adj" fmla="val 50000"/>
-            </a:avLst>
-          </a:prstGeom>
-          <a:solidFill>
-            <a:srgbClr val="FCECEC"/>
-          </a:solidFill>
-          <a:ln>
-            <a:noFill/>
-          </a:ln>
-          <a:effectLst/>
-        </p:spPr>
-        <p:style>
-          <a:lnRef idx="1">
-            <a:schemeClr val="accent1"/>
-          </a:lnRef>
-          <a:fillRef idx="3">
-            <a:schemeClr val="accent1"/>
-          </a:fillRef>
-          <a:effectRef idx="2">
-            <a:schemeClr val="accent1"/>
-          </a:effectRef>
-          <a:fontRef idx="minor">
-            <a:schemeClr val="lt1"/>
-          </a:fontRef>
-        </p:style>
-        <p:txBody>
-          <a:bodyPr rtlCol="0" anchor="ctr"/>
-          <a:lstStyle/>
-          <a:p>
-            <a:pPr algn="ctr"/>
-          </a:p>
-        </p:txBody>
-      </p:sp>
-      <p:sp>
-        <p:nvSpPr>
-          <p:cNvPr id="23" name="TextBox 22"/>
-          <p:cNvSpPr txBox="1"/>
-          <p:nvPr/>
-        </p:nvSpPr>
-        <p:spPr>
-          <a:xfrm>
-            <a:off x="7013448" y="2596896"/>
-            <a:ext cx="1298448" cy="310896"/>
-          </a:xfrm>
-          <a:prstGeom prst="rect">
-            <a:avLst/>
-          </a:prstGeom>
-          <a:noFill/>
-        </p:spPr>
-        <p:txBody>
-          <a:bodyPr wrap="none" anchor="ctr" lIns="0" rIns="0" tIns="0" bIns="0">
-            <a:spAutoFit/>
-          </a:bodyPr>
-          <a:lstStyle/>
-          <a:p>
-            <a:pPr algn="ctr">
-              <a:lnSpc>
-                <a:spcPct val="106000"/>
-              </a:lnSpc>
-              <a:spcBef>
-                <a:spcPts val="0"/>
-              </a:spcBef>
-              <a:spcAft>
-                <a:spcPts val="0"/>
-              </a:spcAft>
-            </a:pPr>
-            <a:r>
-              <a:rPr sz="850" b="1">
-                <a:solidFill>
-                  <a:srgbClr val="B80000"/>
-                </a:solidFill>
-                <a:latin typeface="Red Hat Display"/>
-              </a:rPr>
-              <a:t>MEDIA PASS</a:t>
-            </a:r>
-          </a:p>
-        </p:txBody>
-      </p:sp>
-      <p:pic>
-        <p:nvPicPr>
-          <p:cNvPr id="24" name="Picture 23" descr="eye_slate.png"/>
-          <p:cNvPicPr>
-            <a:picLocks noChangeAspect="1"/>
-          </p:cNvPicPr>
-          <p:nvPr/>
-        </p:nvPicPr>
-        <p:blipFill>
-          <a:blip r:embed="rId4"/>
-          <a:stretch>
-            <a:fillRect/>
-          </a:stretch>
-        </p:blipFill>
-        <p:spPr>
-          <a:xfrm>
-            <a:off x="8843619" y="3108960"/>
-            <a:ext cx="475488" cy="475488"/>
-          </a:xfrm>
-          <a:prstGeom prst="rect">
-            <a:avLst/>
-          </a:prstGeom>
-        </p:spPr>
-      </p:pic>
-      <p:sp>
-        <p:nvSpPr>
-          <p:cNvPr id="25" name="TextBox 24"/>
-          <p:cNvSpPr txBox="1"/>
-          <p:nvPr/>
-        </p:nvSpPr>
-        <p:spPr>
-          <a:xfrm>
-            <a:off x="7050024" y="3721608"/>
-            <a:ext cx="4062679" cy="1481328"/>
-          </a:xfrm>
-          <a:prstGeom prst="rect">
-            <a:avLst/>
-          </a:prstGeom>
-          <a:noFill/>
-        </p:spPr>
-        <p:txBody>
-          <a:bodyPr wrap="square" anchor="t" lIns="0" rIns="0" tIns="0" bIns="0">
-            <a:spAutoFit/>
-          </a:bodyPr>
-          <a:lstStyle/>
-          <a:p>
-            <a:pPr algn="l">
-              <a:lnSpc>
-                <a:spcPct val="120000"/>
-              </a:lnSpc>
-              <a:spcBef>
-                <a:spcPts val="0"/>
-              </a:spcBef>
-              <a:spcAft>
-                <a:spcPts val="0"/>
-              </a:spcAft>
-            </a:pPr>
-            <a:r>
-              <a:rPr sz="950" b="0">
-                <a:solidFill>
-                  <a:srgbClr val="8A9099"/>
-                </a:solidFill>
-                <a:latin typeface="Red Hat Text"/>
-              </a:rPr>
-              <a:t>A pod going from one box to two (app + proxy), with three payoff chips flying out: a padlock (mTLS), a graph icon (Kiali), and a sliders icon (control) — plus a small "per-workload label, not namespace" callout.</a:t>
             </a:r>
           </a:p>
         </p:txBody>
@@ -7684,11 +8029,11 @@
         <p:spPr>
           <a:xfrm>
             <a:off x="841248" y="2395728"/>
-            <a:ext cx="5715000" cy="530352"/>
+            <a:ext cx="5138928" cy="786384"/>
           </a:xfrm>
           <a:prstGeom prst="roundRect">
             <a:avLst>
-              <a:gd name="adj" fmla="val 6000"/>
+              <a:gd name="adj" fmla="val 7000"/>
             </a:avLst>
           </a:prstGeom>
           <a:solidFill>
@@ -7723,9 +8068,55 @@
           </a:p>
         </p:txBody>
       </p:sp>
+      <p:sp>
+        <p:nvSpPr>
+          <p:cNvPr id="7" name="Rounded Rectangle 6"/>
+          <p:cNvSpPr/>
+          <p:nvPr/>
+        </p:nvSpPr>
+        <p:spPr>
+          <a:xfrm>
+            <a:off x="987552" y="2532888"/>
+            <a:ext cx="512064" cy="512064"/>
+          </a:xfrm>
+          <a:prstGeom prst="roundRect">
+            <a:avLst>
+              <a:gd name="adj" fmla="val 26000"/>
+            </a:avLst>
+          </a:prstGeom>
+          <a:solidFill>
+            <a:srgbClr val="EE0000"/>
+          </a:solidFill>
+          <a:ln>
+            <a:noFill/>
+          </a:ln>
+          <a:effectLst/>
+        </p:spPr>
+        <p:style>
+          <a:lnRef idx="1">
+            <a:schemeClr val="accent1"/>
+          </a:lnRef>
+          <a:fillRef idx="3">
+            <a:schemeClr val="accent1"/>
+          </a:fillRef>
+          <a:effectRef idx="2">
+            <a:schemeClr val="accent1"/>
+          </a:effectRef>
+          <a:fontRef idx="minor">
+            <a:schemeClr val="lt1"/>
+          </a:fontRef>
+        </p:style>
+        <p:txBody>
+          <a:bodyPr rtlCol="0" anchor="ctr"/>
+          <a:lstStyle/>
+          <a:p>
+            <a:pPr algn="ctr"/>
+          </a:p>
+        </p:txBody>
+      </p:sp>
       <p:pic>
         <p:nvPicPr>
-          <p:cNvPr id="7" name="Picture 6" descr="check_steel.png"/>
+          <p:cNvPr id="8" name="Picture 7" descr="check_white.png"/>
           <p:cNvPicPr>
             <a:picLocks noChangeAspect="1"/>
           </p:cNvPicPr>
@@ -7739,8 +8130,8 @@
         </p:blipFill>
         <p:spPr>
           <a:xfrm>
-            <a:off x="987552" y="2542032"/>
-            <a:ext cx="237744" cy="237744"/>
+            <a:off x="1110447" y="2655783"/>
+            <a:ext cx="266273" cy="266273"/>
           </a:xfrm>
           <a:prstGeom prst="rect">
             <a:avLst/>
@@ -7749,14 +8140,14 @@
       </p:pic>
       <p:sp>
         <p:nvSpPr>
-          <p:cNvPr id="8" name="TextBox 7"/>
+          <p:cNvPr id="9" name="TextBox 8"/>
           <p:cNvSpPr txBox="1"/>
           <p:nvPr/>
         </p:nvSpPr>
         <p:spPr>
           <a:xfrm>
-            <a:off x="1353312" y="2395728"/>
-            <a:ext cx="5029200" cy="530352"/>
+            <a:off x="1627632" y="2395728"/>
+            <a:ext cx="4206240" cy="786384"/>
           </a:xfrm>
           <a:prstGeom prst="rect">
             <a:avLst/>
@@ -7781,7 +8172,7 @@
               </a:spcAft>
             </a:pPr>
             <a:r>
-              <a:rPr sz="1200" b="0">
+              <a:rPr sz="1150" b="0">
                 <a:solidFill>
                   <a:srgbClr val="1A1A1A"/>
                 </a:solidFill>
@@ -7794,18 +8185,18 @@
       </p:sp>
       <p:sp>
         <p:nvSpPr>
-          <p:cNvPr id="9" name="Rounded Rectangle 8"/>
+          <p:cNvPr id="10" name="Rounded Rectangle 9"/>
           <p:cNvSpPr/>
           <p:nvPr/>
         </p:nvSpPr>
         <p:spPr>
           <a:xfrm>
-            <a:off x="841248" y="2999232"/>
-            <a:ext cx="5715000" cy="530352"/>
+            <a:off x="6254496" y="2395728"/>
+            <a:ext cx="5138928" cy="786384"/>
           </a:xfrm>
           <a:prstGeom prst="roundRect">
             <a:avLst>
-              <a:gd name="adj" fmla="val 6000"/>
+              <a:gd name="adj" fmla="val 7000"/>
             </a:avLst>
           </a:prstGeom>
           <a:solidFill>
@@ -7840,9 +8231,55 @@
           </a:p>
         </p:txBody>
       </p:sp>
+      <p:sp>
+        <p:nvSpPr>
+          <p:cNvPr id="11" name="Rounded Rectangle 10"/>
+          <p:cNvSpPr/>
+          <p:nvPr/>
+        </p:nvSpPr>
+        <p:spPr>
+          <a:xfrm>
+            <a:off x="6400800" y="2532888"/>
+            <a:ext cx="512064" cy="512064"/>
+          </a:xfrm>
+          <a:prstGeom prst="roundRect">
+            <a:avLst>
+              <a:gd name="adj" fmla="val 26000"/>
+            </a:avLst>
+          </a:prstGeom>
+          <a:solidFill>
+            <a:srgbClr val="EE0000"/>
+          </a:solidFill>
+          <a:ln>
+            <a:noFill/>
+          </a:ln>
+          <a:effectLst/>
+        </p:spPr>
+        <p:style>
+          <a:lnRef idx="1">
+            <a:schemeClr val="accent1"/>
+          </a:lnRef>
+          <a:fillRef idx="3">
+            <a:schemeClr val="accent1"/>
+          </a:fillRef>
+          <a:effectRef idx="2">
+            <a:schemeClr val="accent1"/>
+          </a:effectRef>
+          <a:fontRef idx="minor">
+            <a:schemeClr val="lt1"/>
+          </a:fontRef>
+        </p:style>
+        <p:txBody>
+          <a:bodyPr rtlCol="0" anchor="ctr"/>
+          <a:lstStyle/>
+          <a:p>
+            <a:pPr algn="ctr"/>
+          </a:p>
+        </p:txBody>
+      </p:sp>
       <p:pic>
         <p:nvPicPr>
-          <p:cNvPr id="10" name="Picture 9" descr="check_steel.png"/>
+          <p:cNvPr id="12" name="Picture 11" descr="check_white.png"/>
           <p:cNvPicPr>
             <a:picLocks noChangeAspect="1"/>
           </p:cNvPicPr>
@@ -7856,8 +8293,8 @@
         </p:blipFill>
         <p:spPr>
           <a:xfrm>
-            <a:off x="987552" y="3145536"/>
-            <a:ext cx="237744" cy="237744"/>
+            <a:off x="6523695" y="2655783"/>
+            <a:ext cx="266273" cy="266273"/>
           </a:xfrm>
           <a:prstGeom prst="rect">
             <a:avLst/>
@@ -7866,14 +8303,14 @@
       </p:pic>
       <p:sp>
         <p:nvSpPr>
-          <p:cNvPr id="11" name="TextBox 10"/>
+          <p:cNvPr id="13" name="TextBox 12"/>
           <p:cNvSpPr txBox="1"/>
           <p:nvPr/>
         </p:nvSpPr>
         <p:spPr>
           <a:xfrm>
-            <a:off x="1353312" y="2999232"/>
-            <a:ext cx="5029200" cy="530352"/>
+            <a:off x="7040880" y="2395728"/>
+            <a:ext cx="4206240" cy="786384"/>
           </a:xfrm>
           <a:prstGeom prst="rect">
             <a:avLst/>
@@ -7898,7 +8335,7 @@
               </a:spcAft>
             </a:pPr>
             <a:r>
-              <a:rPr sz="1200" b="0">
+              <a:rPr sz="1150" b="0">
                 <a:solidFill>
                   <a:srgbClr val="1A1A1A"/>
                 </a:solidFill>
@@ -7911,18 +8348,18 @@
       </p:sp>
       <p:sp>
         <p:nvSpPr>
-          <p:cNvPr id="12" name="Rounded Rectangle 11"/>
+          <p:cNvPr id="14" name="Rounded Rectangle 13"/>
           <p:cNvSpPr/>
           <p:nvPr/>
         </p:nvSpPr>
         <p:spPr>
           <a:xfrm>
-            <a:off x="841248" y="3602736"/>
-            <a:ext cx="5715000" cy="530352"/>
+            <a:off x="841248" y="3328416"/>
+            <a:ext cx="5138928" cy="786384"/>
           </a:xfrm>
           <a:prstGeom prst="roundRect">
             <a:avLst>
-              <a:gd name="adj" fmla="val 6000"/>
+              <a:gd name="adj" fmla="val 7000"/>
             </a:avLst>
           </a:prstGeom>
           <a:solidFill>
@@ -7957,9 +8394,55 @@
           </a:p>
         </p:txBody>
       </p:sp>
+      <p:sp>
+        <p:nvSpPr>
+          <p:cNvPr id="15" name="Rounded Rectangle 14"/>
+          <p:cNvSpPr/>
+          <p:nvPr/>
+        </p:nvSpPr>
+        <p:spPr>
+          <a:xfrm>
+            <a:off x="987552" y="3465576"/>
+            <a:ext cx="512064" cy="512064"/>
+          </a:xfrm>
+          <a:prstGeom prst="roundRect">
+            <a:avLst>
+              <a:gd name="adj" fmla="val 26000"/>
+            </a:avLst>
+          </a:prstGeom>
+          <a:solidFill>
+            <a:srgbClr val="EE0000"/>
+          </a:solidFill>
+          <a:ln>
+            <a:noFill/>
+          </a:ln>
+          <a:effectLst/>
+        </p:spPr>
+        <p:style>
+          <a:lnRef idx="1">
+            <a:schemeClr val="accent1"/>
+          </a:lnRef>
+          <a:fillRef idx="3">
+            <a:schemeClr val="accent1"/>
+          </a:fillRef>
+          <a:effectRef idx="2">
+            <a:schemeClr val="accent1"/>
+          </a:effectRef>
+          <a:fontRef idx="minor">
+            <a:schemeClr val="lt1"/>
+          </a:fontRef>
+        </p:style>
+        <p:txBody>
+          <a:bodyPr rtlCol="0" anchor="ctr"/>
+          <a:lstStyle/>
+          <a:p>
+            <a:pPr algn="ctr"/>
+          </a:p>
+        </p:txBody>
+      </p:sp>
       <p:pic>
         <p:nvPicPr>
-          <p:cNvPr id="13" name="Picture 12" descr="check_steel.png"/>
+          <p:cNvPr id="16" name="Picture 15" descr="check_white.png"/>
           <p:cNvPicPr>
             <a:picLocks noChangeAspect="1"/>
           </p:cNvPicPr>
@@ -7973,8 +8456,8 @@
         </p:blipFill>
         <p:spPr>
           <a:xfrm>
-            <a:off x="987552" y="3749040"/>
-            <a:ext cx="237744" cy="237744"/>
+            <a:off x="1110447" y="3588471"/>
+            <a:ext cx="266273" cy="266273"/>
           </a:xfrm>
           <a:prstGeom prst="rect">
             <a:avLst/>
@@ -7983,14 +8466,14 @@
       </p:pic>
       <p:sp>
         <p:nvSpPr>
-          <p:cNvPr id="14" name="TextBox 13"/>
+          <p:cNvPr id="17" name="TextBox 16"/>
           <p:cNvSpPr txBox="1"/>
           <p:nvPr/>
         </p:nvSpPr>
         <p:spPr>
           <a:xfrm>
-            <a:off x="1353312" y="3602736"/>
-            <a:ext cx="5029200" cy="530352"/>
+            <a:off x="1627632" y="3328416"/>
+            <a:ext cx="4206240" cy="786384"/>
           </a:xfrm>
           <a:prstGeom prst="rect">
             <a:avLst/>
@@ -8015,7 +8498,7 @@
               </a:spcAft>
             </a:pPr>
             <a:r>
-              <a:rPr sz="1200" b="0">
+              <a:rPr sz="1150" b="0">
                 <a:solidFill>
                   <a:srgbClr val="1A1A1A"/>
                 </a:solidFill>
@@ -8028,18 +8511,18 @@
       </p:sp>
       <p:sp>
         <p:nvSpPr>
-          <p:cNvPr id="15" name="Rounded Rectangle 14"/>
+          <p:cNvPr id="18" name="Rounded Rectangle 17"/>
           <p:cNvSpPr/>
           <p:nvPr/>
         </p:nvSpPr>
         <p:spPr>
           <a:xfrm>
-            <a:off x="841248" y="4206240"/>
-            <a:ext cx="5715000" cy="530352"/>
+            <a:off x="6254496" y="3328416"/>
+            <a:ext cx="5138928" cy="786384"/>
           </a:xfrm>
           <a:prstGeom prst="roundRect">
             <a:avLst>
-              <a:gd name="adj" fmla="val 6000"/>
+              <a:gd name="adj" fmla="val 7000"/>
             </a:avLst>
           </a:prstGeom>
           <a:solidFill>
@@ -8074,9 +8557,55 @@
           </a:p>
         </p:txBody>
       </p:sp>
+      <p:sp>
+        <p:nvSpPr>
+          <p:cNvPr id="19" name="Rounded Rectangle 18"/>
+          <p:cNvSpPr/>
+          <p:nvPr/>
+        </p:nvSpPr>
+        <p:spPr>
+          <a:xfrm>
+            <a:off x="6400800" y="3465576"/>
+            <a:ext cx="512064" cy="512064"/>
+          </a:xfrm>
+          <a:prstGeom prst="roundRect">
+            <a:avLst>
+              <a:gd name="adj" fmla="val 26000"/>
+            </a:avLst>
+          </a:prstGeom>
+          <a:solidFill>
+            <a:srgbClr val="EE0000"/>
+          </a:solidFill>
+          <a:ln>
+            <a:noFill/>
+          </a:ln>
+          <a:effectLst/>
+        </p:spPr>
+        <p:style>
+          <a:lnRef idx="1">
+            <a:schemeClr val="accent1"/>
+          </a:lnRef>
+          <a:fillRef idx="3">
+            <a:schemeClr val="accent1"/>
+          </a:fillRef>
+          <a:effectRef idx="2">
+            <a:schemeClr val="accent1"/>
+          </a:effectRef>
+          <a:fontRef idx="minor">
+            <a:schemeClr val="lt1"/>
+          </a:fontRef>
+        </p:style>
+        <p:txBody>
+          <a:bodyPr rtlCol="0" anchor="ctr"/>
+          <a:lstStyle/>
+          <a:p>
+            <a:pPr algn="ctr"/>
+          </a:p>
+        </p:txBody>
+      </p:sp>
       <p:pic>
         <p:nvPicPr>
-          <p:cNvPr id="16" name="Picture 15" descr="check_steel.png"/>
+          <p:cNvPr id="20" name="Picture 19" descr="check_white.png"/>
           <p:cNvPicPr>
             <a:picLocks noChangeAspect="1"/>
           </p:cNvPicPr>
@@ -8090,8 +8619,8 @@
         </p:blipFill>
         <p:spPr>
           <a:xfrm>
-            <a:off x="987552" y="4352544"/>
-            <a:ext cx="237744" cy="237744"/>
+            <a:off x="6523695" y="3588471"/>
+            <a:ext cx="266273" cy="266273"/>
           </a:xfrm>
           <a:prstGeom prst="rect">
             <a:avLst/>
@@ -8100,14 +8629,14 @@
       </p:pic>
       <p:sp>
         <p:nvSpPr>
-          <p:cNvPr id="17" name="TextBox 16"/>
+          <p:cNvPr id="21" name="TextBox 20"/>
           <p:cNvSpPr txBox="1"/>
           <p:nvPr/>
         </p:nvSpPr>
         <p:spPr>
           <a:xfrm>
-            <a:off x="1353312" y="4206240"/>
-            <a:ext cx="5029200" cy="530352"/>
+            <a:off x="7040880" y="3328416"/>
+            <a:ext cx="4206240" cy="786384"/>
           </a:xfrm>
           <a:prstGeom prst="rect">
             <a:avLst/>
@@ -8132,7 +8661,7 @@
               </a:spcAft>
             </a:pPr>
             <a:r>
-              <a:rPr sz="1200" b="0">
+              <a:rPr sz="1150" b="0">
                 <a:solidFill>
                   <a:srgbClr val="1A1A1A"/>
                 </a:solidFill>
@@ -8145,18 +8674,18 @@
       </p:sp>
       <p:sp>
         <p:nvSpPr>
-          <p:cNvPr id="18" name="Rounded Rectangle 17"/>
+          <p:cNvPr id="22" name="Rounded Rectangle 21"/>
           <p:cNvSpPr/>
           <p:nvPr/>
         </p:nvSpPr>
         <p:spPr>
           <a:xfrm>
-            <a:off x="841248" y="4809744"/>
-            <a:ext cx="5715000" cy="530352"/>
+            <a:off x="841248" y="4261104"/>
+            <a:ext cx="5138928" cy="786384"/>
           </a:xfrm>
           <a:prstGeom prst="roundRect">
             <a:avLst>
-              <a:gd name="adj" fmla="val 6000"/>
+              <a:gd name="adj" fmla="val 7000"/>
             </a:avLst>
           </a:prstGeom>
           <a:solidFill>
@@ -8191,9 +8720,55 @@
           </a:p>
         </p:txBody>
       </p:sp>
+      <p:sp>
+        <p:nvSpPr>
+          <p:cNvPr id="23" name="Rounded Rectangle 22"/>
+          <p:cNvSpPr/>
+          <p:nvPr/>
+        </p:nvSpPr>
+        <p:spPr>
+          <a:xfrm>
+            <a:off x="987552" y="4398264"/>
+            <a:ext cx="512064" cy="512064"/>
+          </a:xfrm>
+          <a:prstGeom prst="roundRect">
+            <a:avLst>
+              <a:gd name="adj" fmla="val 26000"/>
+            </a:avLst>
+          </a:prstGeom>
+          <a:solidFill>
+            <a:srgbClr val="EE0000"/>
+          </a:solidFill>
+          <a:ln>
+            <a:noFill/>
+          </a:ln>
+          <a:effectLst/>
+        </p:spPr>
+        <p:style>
+          <a:lnRef idx="1">
+            <a:schemeClr val="accent1"/>
+          </a:lnRef>
+          <a:fillRef idx="3">
+            <a:schemeClr val="accent1"/>
+          </a:fillRef>
+          <a:effectRef idx="2">
+            <a:schemeClr val="accent1"/>
+          </a:effectRef>
+          <a:fontRef idx="minor">
+            <a:schemeClr val="lt1"/>
+          </a:fontRef>
+        </p:style>
+        <p:txBody>
+          <a:bodyPr rtlCol="0" anchor="ctr"/>
+          <a:lstStyle/>
+          <a:p>
+            <a:pPr algn="ctr"/>
+          </a:p>
+        </p:txBody>
+      </p:sp>
       <p:pic>
         <p:nvPicPr>
-          <p:cNvPr id="19" name="Picture 18" descr="check_steel.png"/>
+          <p:cNvPr id="24" name="Picture 23" descr="check_white.png"/>
           <p:cNvPicPr>
             <a:picLocks noChangeAspect="1"/>
           </p:cNvPicPr>
@@ -8207,8 +8782,8 @@
         </p:blipFill>
         <p:spPr>
           <a:xfrm>
-            <a:off x="987552" y="4956048"/>
-            <a:ext cx="237744" cy="237744"/>
+            <a:off x="1110447" y="4521159"/>
+            <a:ext cx="266273" cy="266273"/>
           </a:xfrm>
           <a:prstGeom prst="rect">
             <a:avLst/>
@@ -8217,14 +8792,14 @@
       </p:pic>
       <p:sp>
         <p:nvSpPr>
-          <p:cNvPr id="20" name="TextBox 19"/>
+          <p:cNvPr id="25" name="TextBox 24"/>
           <p:cNvSpPr txBox="1"/>
           <p:nvPr/>
         </p:nvSpPr>
         <p:spPr>
           <a:xfrm>
-            <a:off x="1353312" y="4809744"/>
-            <a:ext cx="5029200" cy="530352"/>
+            <a:off x="1627632" y="4261104"/>
+            <a:ext cx="4206240" cy="786384"/>
           </a:xfrm>
           <a:prstGeom prst="rect">
             <a:avLst/>
@@ -8249,221 +8824,13 @@
               </a:spcAft>
             </a:pPr>
             <a:r>
-              <a:rPr sz="1200" b="0">
+              <a:rPr sz="1150" b="0">
                 <a:solidFill>
                   <a:srgbClr val="1A1A1A"/>
                 </a:solidFill>
                 <a:latin typeface="Red Hat Text"/>
               </a:rPr>
               <a:t>On this cluster: Istio v1.28.6, reported by the `Istio` resource</a:t>
-            </a:r>
-          </a:p>
-        </p:txBody>
-      </p:sp>
-      <p:sp>
-        <p:nvSpPr>
-          <p:cNvPr id="21" name="Rounded Rectangle 20"/>
-          <p:cNvSpPr/>
-          <p:nvPr/>
-        </p:nvSpPr>
-        <p:spPr>
-          <a:xfrm>
-            <a:off x="6812280" y="2395728"/>
-            <a:ext cx="4538167" cy="2944368"/>
-          </a:xfrm>
-          <a:prstGeom prst="roundRect">
-            <a:avLst>
-              <a:gd name="adj" fmla="val 4000"/>
-            </a:avLst>
-          </a:prstGeom>
-          <a:solidFill>
-            <a:srgbClr val="FFFFFF"/>
-          </a:solidFill>
-          <a:ln w="15240">
-            <a:solidFill>
-              <a:srgbClr val="DDE1E6"/>
-            </a:solidFill>
-          </a:ln>
-          <a:effectLst/>
-        </p:spPr>
-        <p:style>
-          <a:lnRef idx="1">
-            <a:schemeClr val="accent1"/>
-          </a:lnRef>
-          <a:fillRef idx="3">
-            <a:schemeClr val="accent1"/>
-          </a:fillRef>
-          <a:effectRef idx="2">
-            <a:schemeClr val="accent1"/>
-          </a:effectRef>
-          <a:fontRef idx="minor">
-            <a:schemeClr val="lt1"/>
-          </a:fontRef>
-        </p:style>
-        <p:txBody>
-          <a:bodyPr rtlCol="0" anchor="ctr"/>
-          <a:lstStyle/>
-          <a:p>
-            <a:pPr algn="ctr"/>
-          </a:p>
-        </p:txBody>
-      </p:sp>
-      <p:sp>
-        <p:nvSpPr>
-          <p:cNvPr id="22" name="Rounded Rectangle 21"/>
-          <p:cNvSpPr/>
-          <p:nvPr/>
-        </p:nvSpPr>
-        <p:spPr>
-          <a:xfrm>
-            <a:off x="7013448" y="2596896"/>
-            <a:ext cx="1298448" cy="310896"/>
-          </a:xfrm>
-          <a:prstGeom prst="roundRect">
-            <a:avLst>
-              <a:gd name="adj" fmla="val 50000"/>
-            </a:avLst>
-          </a:prstGeom>
-          <a:solidFill>
-            <a:srgbClr val="FCECEC"/>
-          </a:solidFill>
-          <a:ln>
-            <a:noFill/>
-          </a:ln>
-          <a:effectLst/>
-        </p:spPr>
-        <p:style>
-          <a:lnRef idx="1">
-            <a:schemeClr val="accent1"/>
-          </a:lnRef>
-          <a:fillRef idx="3">
-            <a:schemeClr val="accent1"/>
-          </a:fillRef>
-          <a:effectRef idx="2">
-            <a:schemeClr val="accent1"/>
-          </a:effectRef>
-          <a:fontRef idx="minor">
-            <a:schemeClr val="lt1"/>
-          </a:fontRef>
-        </p:style>
-        <p:txBody>
-          <a:bodyPr rtlCol="0" anchor="ctr"/>
-          <a:lstStyle/>
-          <a:p>
-            <a:pPr algn="ctr"/>
-          </a:p>
-        </p:txBody>
-      </p:sp>
-      <p:sp>
-        <p:nvSpPr>
-          <p:cNvPr id="23" name="TextBox 22"/>
-          <p:cNvSpPr txBox="1"/>
-          <p:nvPr/>
-        </p:nvSpPr>
-        <p:spPr>
-          <a:xfrm>
-            <a:off x="7013448" y="2596896"/>
-            <a:ext cx="1298448" cy="310896"/>
-          </a:xfrm>
-          <a:prstGeom prst="rect">
-            <a:avLst/>
-          </a:prstGeom>
-          <a:noFill/>
-        </p:spPr>
-        <p:txBody>
-          <a:bodyPr wrap="none" anchor="ctr" lIns="0" rIns="0" tIns="0" bIns="0">
-            <a:spAutoFit/>
-          </a:bodyPr>
-          <a:lstStyle/>
-          <a:p>
-            <a:pPr algn="ctr">
-              <a:lnSpc>
-                <a:spcPct val="106000"/>
-              </a:lnSpc>
-              <a:spcBef>
-                <a:spcPts val="0"/>
-              </a:spcBef>
-              <a:spcAft>
-                <a:spcPts val="0"/>
-              </a:spcAft>
-            </a:pPr>
-            <a:r>
-              <a:rPr sz="850" b="1">
-                <a:solidFill>
-                  <a:srgbClr val="B80000"/>
-                </a:solidFill>
-                <a:latin typeface="Red Hat Display"/>
-              </a:rPr>
-              <a:t>MEDIA PASS</a:t>
-            </a:r>
-          </a:p>
-        </p:txBody>
-      </p:sp>
-      <p:pic>
-        <p:nvPicPr>
-          <p:cNvPr id="24" name="Picture 23" descr="eye_slate.png"/>
-          <p:cNvPicPr>
-            <a:picLocks noChangeAspect="1"/>
-          </p:cNvPicPr>
-          <p:nvPr/>
-        </p:nvPicPr>
-        <p:blipFill>
-          <a:blip r:embed="rId4"/>
-          <a:stretch>
-            <a:fillRect/>
-          </a:stretch>
-        </p:blipFill>
-        <p:spPr>
-          <a:xfrm>
-            <a:off x="8843619" y="3108960"/>
-            <a:ext cx="475488" cy="475488"/>
-          </a:xfrm>
-          <a:prstGeom prst="rect">
-            <a:avLst/>
-          </a:prstGeom>
-        </p:spPr>
-      </p:pic>
-      <p:sp>
-        <p:nvSpPr>
-          <p:cNvPr id="25" name="TextBox 24"/>
-          <p:cNvSpPr txBox="1"/>
-          <p:nvPr/>
-        </p:nvSpPr>
-        <p:spPr>
-          <a:xfrm>
-            <a:off x="7050024" y="3721608"/>
-            <a:ext cx="4062679" cy="1481328"/>
-          </a:xfrm>
-          <a:prstGeom prst="rect">
-            <a:avLst/>
-          </a:prstGeom>
-          <a:noFill/>
-        </p:spPr>
-        <p:txBody>
-          <a:bodyPr wrap="square" anchor="t" lIns="0" rIns="0" tIns="0" bIns="0">
-            <a:spAutoFit/>
-          </a:bodyPr>
-          <a:lstStyle/>
-          <a:p>
-            <a:pPr algn="l">
-              <a:lnSpc>
-                <a:spcPct val="120000"/>
-              </a:lnSpc>
-              <a:spcBef>
-                <a:spcPts val="0"/>
-              </a:spcBef>
-              <a:spcAft>
-                <a:spcPts val="0"/>
-              </a:spcAft>
-            </a:pPr>
-            <a:r>
-              <a:rPr sz="950" b="0">
-                <a:solidFill>
-                  <a:srgbClr val="8A9099"/>
-                </a:solidFill>
-                <a:latin typeface="Red Hat Text"/>
-              </a:rPr>
-              <a:t>A before/after: left "2.x — Red Hat control-plane CR + member-roll" struck through; right "3.x — Sail operator + standard `Istio` CR + injection labels," with an "upstream Istio v1.28.6" badge.</a:t>
             </a:r>
           </a:p>
         </p:txBody>
@@ -8771,11 +9138,11 @@
         <p:spPr>
           <a:xfrm>
             <a:off x="841248" y="2395728"/>
-            <a:ext cx="5715000" cy="530352"/>
+            <a:ext cx="5138928" cy="786384"/>
           </a:xfrm>
           <a:prstGeom prst="roundRect">
             <a:avLst>
-              <a:gd name="adj" fmla="val 6000"/>
+              <a:gd name="adj" fmla="val 7000"/>
             </a:avLst>
           </a:prstGeom>
           <a:solidFill>
@@ -8810,9 +9177,55 @@
           </a:p>
         </p:txBody>
       </p:sp>
+      <p:sp>
+        <p:nvSpPr>
+          <p:cNvPr id="7" name="Rounded Rectangle 6"/>
+          <p:cNvSpPr/>
+          <p:nvPr/>
+        </p:nvSpPr>
+        <p:spPr>
+          <a:xfrm>
+            <a:off x="987552" y="2532888"/>
+            <a:ext cx="512064" cy="512064"/>
+          </a:xfrm>
+          <a:prstGeom prst="roundRect">
+            <a:avLst>
+              <a:gd name="adj" fmla="val 26000"/>
+            </a:avLst>
+          </a:prstGeom>
+          <a:solidFill>
+            <a:srgbClr val="EE0000"/>
+          </a:solidFill>
+          <a:ln>
+            <a:noFill/>
+          </a:ln>
+          <a:effectLst/>
+        </p:spPr>
+        <p:style>
+          <a:lnRef idx="1">
+            <a:schemeClr val="accent1"/>
+          </a:lnRef>
+          <a:fillRef idx="3">
+            <a:schemeClr val="accent1"/>
+          </a:fillRef>
+          <a:effectRef idx="2">
+            <a:schemeClr val="accent1"/>
+          </a:effectRef>
+          <a:fontRef idx="minor">
+            <a:schemeClr val="lt1"/>
+          </a:fontRef>
+        </p:style>
+        <p:txBody>
+          <a:bodyPr rtlCol="0" anchor="ctr"/>
+          <a:lstStyle/>
+          <a:p>
+            <a:pPr algn="ctr"/>
+          </a:p>
+        </p:txBody>
+      </p:sp>
       <p:pic>
         <p:nvPicPr>
-          <p:cNvPr id="7" name="Picture 6" descr="check_steel.png"/>
+          <p:cNvPr id="8" name="Picture 7" descr="check_white.png"/>
           <p:cNvPicPr>
             <a:picLocks noChangeAspect="1"/>
           </p:cNvPicPr>
@@ -8826,8 +9239,8 @@
         </p:blipFill>
         <p:spPr>
           <a:xfrm>
-            <a:off x="987552" y="2542032"/>
-            <a:ext cx="237744" cy="237744"/>
+            <a:off x="1110447" y="2655783"/>
+            <a:ext cx="266273" cy="266273"/>
           </a:xfrm>
           <a:prstGeom prst="rect">
             <a:avLst/>
@@ -8836,14 +9249,14 @@
       </p:pic>
       <p:sp>
         <p:nvSpPr>
-          <p:cNvPr id="8" name="TextBox 7"/>
+          <p:cNvPr id="9" name="TextBox 8"/>
           <p:cNvSpPr txBox="1"/>
           <p:nvPr/>
         </p:nvSpPr>
         <p:spPr>
           <a:xfrm>
-            <a:off x="1353312" y="2395728"/>
-            <a:ext cx="5029200" cy="530352"/>
+            <a:off x="1627632" y="2395728"/>
+            <a:ext cx="4206240" cy="786384"/>
           </a:xfrm>
           <a:prstGeom prst="rect">
             <a:avLst/>
@@ -8868,7 +9281,7 @@
               </a:spcAft>
             </a:pPr>
             <a:r>
-              <a:rPr sz="1200" b="0">
+              <a:rPr sz="1150" b="0">
                 <a:solidFill>
                   <a:srgbClr val="1A1A1A"/>
                 </a:solidFill>
@@ -8881,18 +9294,18 @@
       </p:sp>
       <p:sp>
         <p:nvSpPr>
-          <p:cNvPr id="9" name="Rounded Rectangle 8"/>
+          <p:cNvPr id="10" name="Rounded Rectangle 9"/>
           <p:cNvSpPr/>
           <p:nvPr/>
         </p:nvSpPr>
         <p:spPr>
           <a:xfrm>
-            <a:off x="841248" y="2999232"/>
-            <a:ext cx="5715000" cy="530352"/>
+            <a:off x="6254496" y="2395728"/>
+            <a:ext cx="5138928" cy="786384"/>
           </a:xfrm>
           <a:prstGeom prst="roundRect">
             <a:avLst>
-              <a:gd name="adj" fmla="val 6000"/>
+              <a:gd name="adj" fmla="val 7000"/>
             </a:avLst>
           </a:prstGeom>
           <a:solidFill>
@@ -8927,9 +9340,55 @@
           </a:p>
         </p:txBody>
       </p:sp>
+      <p:sp>
+        <p:nvSpPr>
+          <p:cNvPr id="11" name="Rounded Rectangle 10"/>
+          <p:cNvSpPr/>
+          <p:nvPr/>
+        </p:nvSpPr>
+        <p:spPr>
+          <a:xfrm>
+            <a:off x="6400800" y="2532888"/>
+            <a:ext cx="512064" cy="512064"/>
+          </a:xfrm>
+          <a:prstGeom prst="roundRect">
+            <a:avLst>
+              <a:gd name="adj" fmla="val 26000"/>
+            </a:avLst>
+          </a:prstGeom>
+          <a:solidFill>
+            <a:srgbClr val="EE0000"/>
+          </a:solidFill>
+          <a:ln>
+            <a:noFill/>
+          </a:ln>
+          <a:effectLst/>
+        </p:spPr>
+        <p:style>
+          <a:lnRef idx="1">
+            <a:schemeClr val="accent1"/>
+          </a:lnRef>
+          <a:fillRef idx="3">
+            <a:schemeClr val="accent1"/>
+          </a:fillRef>
+          <a:effectRef idx="2">
+            <a:schemeClr val="accent1"/>
+          </a:effectRef>
+          <a:fontRef idx="minor">
+            <a:schemeClr val="lt1"/>
+          </a:fontRef>
+        </p:style>
+        <p:txBody>
+          <a:bodyPr rtlCol="0" anchor="ctr"/>
+          <a:lstStyle/>
+          <a:p>
+            <a:pPr algn="ctr"/>
+          </a:p>
+        </p:txBody>
+      </p:sp>
       <p:pic>
         <p:nvPicPr>
-          <p:cNvPr id="10" name="Picture 9" descr="check_steel.png"/>
+          <p:cNvPr id="12" name="Picture 11" descr="check_white.png"/>
           <p:cNvPicPr>
             <a:picLocks noChangeAspect="1"/>
           </p:cNvPicPr>
@@ -8943,8 +9402,8 @@
         </p:blipFill>
         <p:spPr>
           <a:xfrm>
-            <a:off x="987552" y="3145536"/>
-            <a:ext cx="237744" cy="237744"/>
+            <a:off x="6523695" y="2655783"/>
+            <a:ext cx="266273" cy="266273"/>
           </a:xfrm>
           <a:prstGeom prst="rect">
             <a:avLst/>
@@ -8953,14 +9412,14 @@
       </p:pic>
       <p:sp>
         <p:nvSpPr>
-          <p:cNvPr id="11" name="TextBox 10"/>
+          <p:cNvPr id="13" name="TextBox 12"/>
           <p:cNvSpPr txBox="1"/>
           <p:nvPr/>
         </p:nvSpPr>
         <p:spPr>
           <a:xfrm>
-            <a:off x="1353312" y="2999232"/>
-            <a:ext cx="5029200" cy="530352"/>
+            <a:off x="7040880" y="2395728"/>
+            <a:ext cx="4206240" cy="786384"/>
           </a:xfrm>
           <a:prstGeom prst="rect">
             <a:avLst/>
@@ -8985,7 +9444,7 @@
               </a:spcAft>
             </a:pPr>
             <a:r>
-              <a:rPr sz="1200" b="0">
+              <a:rPr sz="1150" b="0">
                 <a:solidFill>
                   <a:srgbClr val="1A1A1A"/>
                 </a:solidFill>
@@ -8998,18 +9457,18 @@
       </p:sp>
       <p:sp>
         <p:nvSpPr>
-          <p:cNvPr id="12" name="Rounded Rectangle 11"/>
+          <p:cNvPr id="14" name="Rounded Rectangle 13"/>
           <p:cNvSpPr/>
           <p:nvPr/>
         </p:nvSpPr>
         <p:spPr>
           <a:xfrm>
-            <a:off x="841248" y="3602736"/>
-            <a:ext cx="5715000" cy="530352"/>
+            <a:off x="841248" y="3328416"/>
+            <a:ext cx="5138928" cy="786384"/>
           </a:xfrm>
           <a:prstGeom prst="roundRect">
             <a:avLst>
-              <a:gd name="adj" fmla="val 6000"/>
+              <a:gd name="adj" fmla="val 7000"/>
             </a:avLst>
           </a:prstGeom>
           <a:solidFill>
@@ -9044,9 +9503,55 @@
           </a:p>
         </p:txBody>
       </p:sp>
+      <p:sp>
+        <p:nvSpPr>
+          <p:cNvPr id="15" name="Rounded Rectangle 14"/>
+          <p:cNvSpPr/>
+          <p:nvPr/>
+        </p:nvSpPr>
+        <p:spPr>
+          <a:xfrm>
+            <a:off x="987552" y="3465576"/>
+            <a:ext cx="512064" cy="512064"/>
+          </a:xfrm>
+          <a:prstGeom prst="roundRect">
+            <a:avLst>
+              <a:gd name="adj" fmla="val 26000"/>
+            </a:avLst>
+          </a:prstGeom>
+          <a:solidFill>
+            <a:srgbClr val="EE0000"/>
+          </a:solidFill>
+          <a:ln>
+            <a:noFill/>
+          </a:ln>
+          <a:effectLst/>
+        </p:spPr>
+        <p:style>
+          <a:lnRef idx="1">
+            <a:schemeClr val="accent1"/>
+          </a:lnRef>
+          <a:fillRef idx="3">
+            <a:schemeClr val="accent1"/>
+          </a:fillRef>
+          <a:effectRef idx="2">
+            <a:schemeClr val="accent1"/>
+          </a:effectRef>
+          <a:fontRef idx="minor">
+            <a:schemeClr val="lt1"/>
+          </a:fontRef>
+        </p:style>
+        <p:txBody>
+          <a:bodyPr rtlCol="0" anchor="ctr"/>
+          <a:lstStyle/>
+          <a:p>
+            <a:pPr algn="ctr"/>
+          </a:p>
+        </p:txBody>
+      </p:sp>
       <p:pic>
         <p:nvPicPr>
-          <p:cNvPr id="13" name="Picture 12" descr="check_steel.png"/>
+          <p:cNvPr id="16" name="Picture 15" descr="check_white.png"/>
           <p:cNvPicPr>
             <a:picLocks noChangeAspect="1"/>
           </p:cNvPicPr>
@@ -9060,8 +9565,8 @@
         </p:blipFill>
         <p:spPr>
           <a:xfrm>
-            <a:off x="987552" y="3749040"/>
-            <a:ext cx="237744" cy="237744"/>
+            <a:off x="1110447" y="3588471"/>
+            <a:ext cx="266273" cy="266273"/>
           </a:xfrm>
           <a:prstGeom prst="rect">
             <a:avLst/>
@@ -9070,14 +9575,14 @@
       </p:pic>
       <p:sp>
         <p:nvSpPr>
-          <p:cNvPr id="14" name="TextBox 13"/>
+          <p:cNvPr id="17" name="TextBox 16"/>
           <p:cNvSpPr txBox="1"/>
           <p:nvPr/>
         </p:nvSpPr>
         <p:spPr>
           <a:xfrm>
-            <a:off x="1353312" y="3602736"/>
-            <a:ext cx="5029200" cy="530352"/>
+            <a:off x="1627632" y="3328416"/>
+            <a:ext cx="4206240" cy="786384"/>
           </a:xfrm>
           <a:prstGeom prst="rect">
             <a:avLst/>
@@ -9102,7 +9607,7 @@
               </a:spcAft>
             </a:pPr>
             <a:r>
-              <a:rPr sz="1200" b="0">
+              <a:rPr sz="1150" b="0">
                 <a:solidFill>
                   <a:srgbClr val="1A1A1A"/>
                 </a:solidFill>
@@ -9115,18 +9620,18 @@
       </p:sp>
       <p:sp>
         <p:nvSpPr>
-          <p:cNvPr id="15" name="Rounded Rectangle 14"/>
+          <p:cNvPr id="18" name="Rounded Rectangle 17"/>
           <p:cNvSpPr/>
           <p:nvPr/>
         </p:nvSpPr>
         <p:spPr>
           <a:xfrm>
-            <a:off x="841248" y="4206240"/>
-            <a:ext cx="5715000" cy="530352"/>
+            <a:off x="6254496" y="3328416"/>
+            <a:ext cx="5138928" cy="786384"/>
           </a:xfrm>
           <a:prstGeom prst="roundRect">
             <a:avLst>
-              <a:gd name="adj" fmla="val 6000"/>
+              <a:gd name="adj" fmla="val 7000"/>
             </a:avLst>
           </a:prstGeom>
           <a:solidFill>
@@ -9161,9 +9666,55 @@
           </a:p>
         </p:txBody>
       </p:sp>
+      <p:sp>
+        <p:nvSpPr>
+          <p:cNvPr id="19" name="Rounded Rectangle 18"/>
+          <p:cNvSpPr/>
+          <p:nvPr/>
+        </p:nvSpPr>
+        <p:spPr>
+          <a:xfrm>
+            <a:off x="6400800" y="3465576"/>
+            <a:ext cx="512064" cy="512064"/>
+          </a:xfrm>
+          <a:prstGeom prst="roundRect">
+            <a:avLst>
+              <a:gd name="adj" fmla="val 26000"/>
+            </a:avLst>
+          </a:prstGeom>
+          <a:solidFill>
+            <a:srgbClr val="EE0000"/>
+          </a:solidFill>
+          <a:ln>
+            <a:noFill/>
+          </a:ln>
+          <a:effectLst/>
+        </p:spPr>
+        <p:style>
+          <a:lnRef idx="1">
+            <a:schemeClr val="accent1"/>
+          </a:lnRef>
+          <a:fillRef idx="3">
+            <a:schemeClr val="accent1"/>
+          </a:fillRef>
+          <a:effectRef idx="2">
+            <a:schemeClr val="accent1"/>
+          </a:effectRef>
+          <a:fontRef idx="minor">
+            <a:schemeClr val="lt1"/>
+          </a:fontRef>
+        </p:style>
+        <p:txBody>
+          <a:bodyPr rtlCol="0" anchor="ctr"/>
+          <a:lstStyle/>
+          <a:p>
+            <a:pPr algn="ctr"/>
+          </a:p>
+        </p:txBody>
+      </p:sp>
       <p:pic>
         <p:nvPicPr>
-          <p:cNvPr id="16" name="Picture 15" descr="check_steel.png"/>
+          <p:cNvPr id="20" name="Picture 19" descr="check_white.png"/>
           <p:cNvPicPr>
             <a:picLocks noChangeAspect="1"/>
           </p:cNvPicPr>
@@ -9177,8 +9728,8 @@
         </p:blipFill>
         <p:spPr>
           <a:xfrm>
-            <a:off x="987552" y="4352544"/>
-            <a:ext cx="237744" cy="237744"/>
+            <a:off x="6523695" y="3588471"/>
+            <a:ext cx="266273" cy="266273"/>
           </a:xfrm>
           <a:prstGeom prst="rect">
             <a:avLst/>
@@ -9187,14 +9738,14 @@
       </p:pic>
       <p:sp>
         <p:nvSpPr>
-          <p:cNvPr id="17" name="TextBox 16"/>
+          <p:cNvPr id="21" name="TextBox 20"/>
           <p:cNvSpPr txBox="1"/>
           <p:nvPr/>
         </p:nvSpPr>
         <p:spPr>
           <a:xfrm>
-            <a:off x="1353312" y="4206240"/>
-            <a:ext cx="5029200" cy="530352"/>
+            <a:off x="7040880" y="3328416"/>
+            <a:ext cx="4206240" cy="786384"/>
           </a:xfrm>
           <a:prstGeom prst="rect">
             <a:avLst/>
@@ -9219,7 +9770,7 @@
               </a:spcAft>
             </a:pPr>
             <a:r>
-              <a:rPr sz="1200" b="0">
+              <a:rPr sz="1150" b="0">
                 <a:solidFill>
                   <a:srgbClr val="1A1A1A"/>
                 </a:solidFill>
@@ -9232,18 +9783,18 @@
       </p:sp>
       <p:sp>
         <p:nvSpPr>
-          <p:cNvPr id="18" name="Rounded Rectangle 17"/>
+          <p:cNvPr id="22" name="Rounded Rectangle 21"/>
           <p:cNvSpPr/>
           <p:nvPr/>
         </p:nvSpPr>
         <p:spPr>
           <a:xfrm>
-            <a:off x="841248" y="4809744"/>
-            <a:ext cx="5715000" cy="530352"/>
+            <a:off x="841248" y="4261104"/>
+            <a:ext cx="5138928" cy="786384"/>
           </a:xfrm>
           <a:prstGeom prst="roundRect">
             <a:avLst>
-              <a:gd name="adj" fmla="val 6000"/>
+              <a:gd name="adj" fmla="val 7000"/>
             </a:avLst>
           </a:prstGeom>
           <a:solidFill>
@@ -9278,9 +9829,55 @@
           </a:p>
         </p:txBody>
       </p:sp>
+      <p:sp>
+        <p:nvSpPr>
+          <p:cNvPr id="23" name="Rounded Rectangle 22"/>
+          <p:cNvSpPr/>
+          <p:nvPr/>
+        </p:nvSpPr>
+        <p:spPr>
+          <a:xfrm>
+            <a:off x="987552" y="4398264"/>
+            <a:ext cx="512064" cy="512064"/>
+          </a:xfrm>
+          <a:prstGeom prst="roundRect">
+            <a:avLst>
+              <a:gd name="adj" fmla="val 26000"/>
+            </a:avLst>
+          </a:prstGeom>
+          <a:solidFill>
+            <a:srgbClr val="EE0000"/>
+          </a:solidFill>
+          <a:ln>
+            <a:noFill/>
+          </a:ln>
+          <a:effectLst/>
+        </p:spPr>
+        <p:style>
+          <a:lnRef idx="1">
+            <a:schemeClr val="accent1"/>
+          </a:lnRef>
+          <a:fillRef idx="3">
+            <a:schemeClr val="accent1"/>
+          </a:fillRef>
+          <a:effectRef idx="2">
+            <a:schemeClr val="accent1"/>
+          </a:effectRef>
+          <a:fontRef idx="minor">
+            <a:schemeClr val="lt1"/>
+          </a:fontRef>
+        </p:style>
+        <p:txBody>
+          <a:bodyPr rtlCol="0" anchor="ctr"/>
+          <a:lstStyle/>
+          <a:p>
+            <a:pPr algn="ctr"/>
+          </a:p>
+        </p:txBody>
+      </p:sp>
       <p:pic>
         <p:nvPicPr>
-          <p:cNvPr id="19" name="Picture 18" descr="check_steel.png"/>
+          <p:cNvPr id="24" name="Picture 23" descr="check_white.png"/>
           <p:cNvPicPr>
             <a:picLocks noChangeAspect="1"/>
           </p:cNvPicPr>
@@ -9294,8 +9891,8 @@
         </p:blipFill>
         <p:spPr>
           <a:xfrm>
-            <a:off x="987552" y="4956048"/>
-            <a:ext cx="237744" cy="237744"/>
+            <a:off x="1110447" y="4521159"/>
+            <a:ext cx="266273" cy="266273"/>
           </a:xfrm>
           <a:prstGeom prst="rect">
             <a:avLst/>
@@ -9304,14 +9901,14 @@
       </p:pic>
       <p:sp>
         <p:nvSpPr>
-          <p:cNvPr id="20" name="TextBox 19"/>
+          <p:cNvPr id="25" name="TextBox 24"/>
           <p:cNvSpPr txBox="1"/>
           <p:nvPr/>
         </p:nvSpPr>
         <p:spPr>
           <a:xfrm>
-            <a:off x="1353312" y="4809744"/>
-            <a:ext cx="5029200" cy="530352"/>
+            <a:off x="1627632" y="4261104"/>
+            <a:ext cx="4206240" cy="786384"/>
           </a:xfrm>
           <a:prstGeom prst="rect">
             <a:avLst/>
@@ -9336,221 +9933,13 @@
               </a:spcAft>
             </a:pPr>
             <a:r>
-              <a:rPr sz="1200" b="0">
+              <a:rPr sz="1150" b="0">
                 <a:solidFill>
                   <a:srgbClr val="1A1A1A"/>
                 </a:solidFill>
                 <a:latin typeface="Red Hat Text"/>
               </a:rPr>
               <a:t>Read the split from mesh telemetry (identical bodies here)</a:t>
-            </a:r>
-          </a:p>
-        </p:txBody>
-      </p:sp>
-      <p:sp>
-        <p:nvSpPr>
-          <p:cNvPr id="21" name="Rounded Rectangle 20"/>
-          <p:cNvSpPr/>
-          <p:nvPr/>
-        </p:nvSpPr>
-        <p:spPr>
-          <a:xfrm>
-            <a:off x="6812280" y="2395728"/>
-            <a:ext cx="4538167" cy="2944368"/>
-          </a:xfrm>
-          <a:prstGeom prst="roundRect">
-            <a:avLst>
-              <a:gd name="adj" fmla="val 4000"/>
-            </a:avLst>
-          </a:prstGeom>
-          <a:solidFill>
-            <a:srgbClr val="FFFFFF"/>
-          </a:solidFill>
-          <a:ln w="15240">
-            <a:solidFill>
-              <a:srgbClr val="DDE1E6"/>
-            </a:solidFill>
-          </a:ln>
-          <a:effectLst/>
-        </p:spPr>
-        <p:style>
-          <a:lnRef idx="1">
-            <a:schemeClr val="accent1"/>
-          </a:lnRef>
-          <a:fillRef idx="3">
-            <a:schemeClr val="accent1"/>
-          </a:fillRef>
-          <a:effectRef idx="2">
-            <a:schemeClr val="accent1"/>
-          </a:effectRef>
-          <a:fontRef idx="minor">
-            <a:schemeClr val="lt1"/>
-          </a:fontRef>
-        </p:style>
-        <p:txBody>
-          <a:bodyPr rtlCol="0" anchor="ctr"/>
-          <a:lstStyle/>
-          <a:p>
-            <a:pPr algn="ctr"/>
-          </a:p>
-        </p:txBody>
-      </p:sp>
-      <p:sp>
-        <p:nvSpPr>
-          <p:cNvPr id="22" name="Rounded Rectangle 21"/>
-          <p:cNvSpPr/>
-          <p:nvPr/>
-        </p:nvSpPr>
-        <p:spPr>
-          <a:xfrm>
-            <a:off x="7013448" y="2596896"/>
-            <a:ext cx="1298448" cy="310896"/>
-          </a:xfrm>
-          <a:prstGeom prst="roundRect">
-            <a:avLst>
-              <a:gd name="adj" fmla="val 50000"/>
-            </a:avLst>
-          </a:prstGeom>
-          <a:solidFill>
-            <a:srgbClr val="FCECEC"/>
-          </a:solidFill>
-          <a:ln>
-            <a:noFill/>
-          </a:ln>
-          <a:effectLst/>
-        </p:spPr>
-        <p:style>
-          <a:lnRef idx="1">
-            <a:schemeClr val="accent1"/>
-          </a:lnRef>
-          <a:fillRef idx="3">
-            <a:schemeClr val="accent1"/>
-          </a:fillRef>
-          <a:effectRef idx="2">
-            <a:schemeClr val="accent1"/>
-          </a:effectRef>
-          <a:fontRef idx="minor">
-            <a:schemeClr val="lt1"/>
-          </a:fontRef>
-        </p:style>
-        <p:txBody>
-          <a:bodyPr rtlCol="0" anchor="ctr"/>
-          <a:lstStyle/>
-          <a:p>
-            <a:pPr algn="ctr"/>
-          </a:p>
-        </p:txBody>
-      </p:sp>
-      <p:sp>
-        <p:nvSpPr>
-          <p:cNvPr id="23" name="TextBox 22"/>
-          <p:cNvSpPr txBox="1"/>
-          <p:nvPr/>
-        </p:nvSpPr>
-        <p:spPr>
-          <a:xfrm>
-            <a:off x="7013448" y="2596896"/>
-            <a:ext cx="1298448" cy="310896"/>
-          </a:xfrm>
-          <a:prstGeom prst="rect">
-            <a:avLst/>
-          </a:prstGeom>
-          <a:noFill/>
-        </p:spPr>
-        <p:txBody>
-          <a:bodyPr wrap="none" anchor="ctr" lIns="0" rIns="0" tIns="0" bIns="0">
-            <a:spAutoFit/>
-          </a:bodyPr>
-          <a:lstStyle/>
-          <a:p>
-            <a:pPr algn="ctr">
-              <a:lnSpc>
-                <a:spcPct val="106000"/>
-              </a:lnSpc>
-              <a:spcBef>
-                <a:spcPts val="0"/>
-              </a:spcBef>
-              <a:spcAft>
-                <a:spcPts val="0"/>
-              </a:spcAft>
-            </a:pPr>
-            <a:r>
-              <a:rPr sz="850" b="1">
-                <a:solidFill>
-                  <a:srgbClr val="B80000"/>
-                </a:solidFill>
-                <a:latin typeface="Red Hat Display"/>
-              </a:rPr>
-              <a:t>MEDIA PASS</a:t>
-            </a:r>
-          </a:p>
-        </p:txBody>
-      </p:sp>
-      <p:pic>
-        <p:nvPicPr>
-          <p:cNvPr id="24" name="Picture 23" descr="eye_slate.png"/>
-          <p:cNvPicPr>
-            <a:picLocks noChangeAspect="1"/>
-          </p:cNvPicPr>
-          <p:nvPr/>
-        </p:nvPicPr>
-        <p:blipFill>
-          <a:blip r:embed="rId4"/>
-          <a:stretch>
-            <a:fillRect/>
-          </a:stretch>
-        </p:blipFill>
-        <p:spPr>
-          <a:xfrm>
-            <a:off x="8843619" y="3108960"/>
-            <a:ext cx="475488" cy="475488"/>
-          </a:xfrm>
-          <a:prstGeom prst="rect">
-            <a:avLst/>
-          </a:prstGeom>
-        </p:spPr>
-      </p:pic>
-      <p:sp>
-        <p:nvSpPr>
-          <p:cNvPr id="25" name="TextBox 24"/>
-          <p:cNvSpPr txBox="1"/>
-          <p:nvPr/>
-        </p:nvSpPr>
-        <p:spPr>
-          <a:xfrm>
-            <a:off x="7050024" y="3721608"/>
-            <a:ext cx="4062679" cy="1481328"/>
-          </a:xfrm>
-          <a:prstGeom prst="rect">
-            <a:avLst/>
-          </a:prstGeom>
-          <a:noFill/>
-        </p:spPr>
-        <p:txBody>
-          <a:bodyPr wrap="square" anchor="t" lIns="0" rIns="0" tIns="0" bIns="0">
-            <a:spAutoFit/>
-          </a:bodyPr>
-          <a:lstStyle/>
-          <a:p>
-            <a:pPr algn="l">
-              <a:lnSpc>
-                <a:spcPct val="120000"/>
-              </a:lnSpc>
-              <a:spcBef>
-                <a:spcPts val="0"/>
-              </a:spcBef>
-              <a:spcAft>
-                <a:spcPts val="0"/>
-              </a:spcAft>
-            </a:pPr>
-            <a:r>
-              <a:rPr sz="950" b="0">
-                <a:solidFill>
-                  <a:srgbClr val="8A9099"/>
-                </a:solidFill>
-                <a:latin typeface="Red Hat Text"/>
-              </a:rPr>
-              <a:t>A weighted-split diagram: claims' sidecar fanning to a fat 90% arrow (v1) and a thin 10% arrow (v2), with a header-tagged request taking a dedicated line straight to v2; a small "read from istio_requests_total" telemetry chip.</a:t>
             </a:r>
           </a:p>
         </p:txBody>
@@ -9858,11 +10247,11 @@
         <p:spPr>
           <a:xfrm>
             <a:off x="841248" y="2395728"/>
-            <a:ext cx="5715000" cy="530352"/>
+            <a:ext cx="5138928" cy="786384"/>
           </a:xfrm>
           <a:prstGeom prst="roundRect">
             <a:avLst>
-              <a:gd name="adj" fmla="val 6000"/>
+              <a:gd name="adj" fmla="val 7000"/>
             </a:avLst>
           </a:prstGeom>
           <a:solidFill>
@@ -9897,9 +10286,55 @@
           </a:p>
         </p:txBody>
       </p:sp>
+      <p:sp>
+        <p:nvSpPr>
+          <p:cNvPr id="7" name="Rounded Rectangle 6"/>
+          <p:cNvSpPr/>
+          <p:nvPr/>
+        </p:nvSpPr>
+        <p:spPr>
+          <a:xfrm>
+            <a:off x="987552" y="2532888"/>
+            <a:ext cx="512064" cy="512064"/>
+          </a:xfrm>
+          <a:prstGeom prst="roundRect">
+            <a:avLst>
+              <a:gd name="adj" fmla="val 26000"/>
+            </a:avLst>
+          </a:prstGeom>
+          <a:solidFill>
+            <a:srgbClr val="EE0000"/>
+          </a:solidFill>
+          <a:ln>
+            <a:noFill/>
+          </a:ln>
+          <a:effectLst/>
+        </p:spPr>
+        <p:style>
+          <a:lnRef idx="1">
+            <a:schemeClr val="accent1"/>
+          </a:lnRef>
+          <a:fillRef idx="3">
+            <a:schemeClr val="accent1"/>
+          </a:fillRef>
+          <a:effectRef idx="2">
+            <a:schemeClr val="accent1"/>
+          </a:effectRef>
+          <a:fontRef idx="minor">
+            <a:schemeClr val="lt1"/>
+          </a:fontRef>
+        </p:style>
+        <p:txBody>
+          <a:bodyPr rtlCol="0" anchor="ctr"/>
+          <a:lstStyle/>
+          <a:p>
+            <a:pPr algn="ctr"/>
+          </a:p>
+        </p:txBody>
+      </p:sp>
       <p:pic>
         <p:nvPicPr>
-          <p:cNvPr id="7" name="Picture 6" descr="check_steel.png"/>
+          <p:cNvPr id="8" name="Picture 7" descr="check_white.png"/>
           <p:cNvPicPr>
             <a:picLocks noChangeAspect="1"/>
           </p:cNvPicPr>
@@ -9913,8 +10348,8 @@
         </p:blipFill>
         <p:spPr>
           <a:xfrm>
-            <a:off x="987552" y="2542032"/>
-            <a:ext cx="237744" cy="237744"/>
+            <a:off x="1110447" y="2655783"/>
+            <a:ext cx="266273" cy="266273"/>
           </a:xfrm>
           <a:prstGeom prst="rect">
             <a:avLst/>
@@ -9923,14 +10358,14 @@
       </p:pic>
       <p:sp>
         <p:nvSpPr>
-          <p:cNvPr id="8" name="TextBox 7"/>
+          <p:cNvPr id="9" name="TextBox 8"/>
           <p:cNvSpPr txBox="1"/>
           <p:nvPr/>
         </p:nvSpPr>
         <p:spPr>
           <a:xfrm>
-            <a:off x="1353312" y="2395728"/>
-            <a:ext cx="5029200" cy="530352"/>
+            <a:off x="1627632" y="2395728"/>
+            <a:ext cx="4206240" cy="786384"/>
           </a:xfrm>
           <a:prstGeom prst="rect">
             <a:avLst/>
@@ -9955,7 +10390,7 @@
               </a:spcAft>
             </a:pPr>
             <a:r>
-              <a:rPr sz="1200" b="0">
+              <a:rPr sz="1150" b="0">
                 <a:solidFill>
                   <a:srgbClr val="1A1A1A"/>
                 </a:solidFill>
@@ -9968,18 +10403,18 @@
       </p:sp>
       <p:sp>
         <p:nvSpPr>
-          <p:cNvPr id="9" name="Rounded Rectangle 8"/>
+          <p:cNvPr id="10" name="Rounded Rectangle 9"/>
           <p:cNvSpPr/>
           <p:nvPr/>
         </p:nvSpPr>
         <p:spPr>
           <a:xfrm>
-            <a:off x="841248" y="2999232"/>
-            <a:ext cx="5715000" cy="530352"/>
+            <a:off x="6254496" y="2395728"/>
+            <a:ext cx="5138928" cy="786384"/>
           </a:xfrm>
           <a:prstGeom prst="roundRect">
             <a:avLst>
-              <a:gd name="adj" fmla="val 6000"/>
+              <a:gd name="adj" fmla="val 7000"/>
             </a:avLst>
           </a:prstGeom>
           <a:solidFill>
@@ -10014,9 +10449,55 @@
           </a:p>
         </p:txBody>
       </p:sp>
+      <p:sp>
+        <p:nvSpPr>
+          <p:cNvPr id="11" name="Rounded Rectangle 10"/>
+          <p:cNvSpPr/>
+          <p:nvPr/>
+        </p:nvSpPr>
+        <p:spPr>
+          <a:xfrm>
+            <a:off x="6400800" y="2532888"/>
+            <a:ext cx="512064" cy="512064"/>
+          </a:xfrm>
+          <a:prstGeom prst="roundRect">
+            <a:avLst>
+              <a:gd name="adj" fmla="val 26000"/>
+            </a:avLst>
+          </a:prstGeom>
+          <a:solidFill>
+            <a:srgbClr val="EE0000"/>
+          </a:solidFill>
+          <a:ln>
+            <a:noFill/>
+          </a:ln>
+          <a:effectLst/>
+        </p:spPr>
+        <p:style>
+          <a:lnRef idx="1">
+            <a:schemeClr val="accent1"/>
+          </a:lnRef>
+          <a:fillRef idx="3">
+            <a:schemeClr val="accent1"/>
+          </a:fillRef>
+          <a:effectRef idx="2">
+            <a:schemeClr val="accent1"/>
+          </a:effectRef>
+          <a:fontRef idx="minor">
+            <a:schemeClr val="lt1"/>
+          </a:fontRef>
+        </p:style>
+        <p:txBody>
+          <a:bodyPr rtlCol="0" anchor="ctr"/>
+          <a:lstStyle/>
+          <a:p>
+            <a:pPr algn="ctr"/>
+          </a:p>
+        </p:txBody>
+      </p:sp>
       <p:pic>
         <p:nvPicPr>
-          <p:cNvPr id="10" name="Picture 9" descr="check_steel.png"/>
+          <p:cNvPr id="12" name="Picture 11" descr="check_white.png"/>
           <p:cNvPicPr>
             <a:picLocks noChangeAspect="1"/>
           </p:cNvPicPr>
@@ -10030,8 +10511,8 @@
         </p:blipFill>
         <p:spPr>
           <a:xfrm>
-            <a:off x="987552" y="3145536"/>
-            <a:ext cx="237744" cy="237744"/>
+            <a:off x="6523695" y="2655783"/>
+            <a:ext cx="266273" cy="266273"/>
           </a:xfrm>
           <a:prstGeom prst="rect">
             <a:avLst/>
@@ -10040,14 +10521,14 @@
       </p:pic>
       <p:sp>
         <p:nvSpPr>
-          <p:cNvPr id="11" name="TextBox 10"/>
+          <p:cNvPr id="13" name="TextBox 12"/>
           <p:cNvSpPr txBox="1"/>
           <p:nvPr/>
         </p:nvSpPr>
         <p:spPr>
           <a:xfrm>
-            <a:off x="1353312" y="2999232"/>
-            <a:ext cx="5029200" cy="530352"/>
+            <a:off x="7040880" y="2395728"/>
+            <a:ext cx="4206240" cy="786384"/>
           </a:xfrm>
           <a:prstGeom prst="rect">
             <a:avLst/>
@@ -10072,7 +10553,7 @@
               </a:spcAft>
             </a:pPr>
             <a:r>
-              <a:rPr sz="1200" b="0">
+              <a:rPr sz="1150" b="0">
                 <a:solidFill>
                   <a:srgbClr val="1A1A1A"/>
                 </a:solidFill>
@@ -10085,18 +10566,18 @@
       </p:sp>
       <p:sp>
         <p:nvSpPr>
-          <p:cNvPr id="12" name="Rounded Rectangle 11"/>
+          <p:cNvPr id="14" name="Rounded Rectangle 13"/>
           <p:cNvSpPr/>
           <p:nvPr/>
         </p:nvSpPr>
         <p:spPr>
           <a:xfrm>
-            <a:off x="841248" y="3602736"/>
-            <a:ext cx="5715000" cy="530352"/>
+            <a:off x="841248" y="3328416"/>
+            <a:ext cx="5138928" cy="786384"/>
           </a:xfrm>
           <a:prstGeom prst="roundRect">
             <a:avLst>
-              <a:gd name="adj" fmla="val 6000"/>
+              <a:gd name="adj" fmla="val 7000"/>
             </a:avLst>
           </a:prstGeom>
           <a:solidFill>
@@ -10131,9 +10612,55 @@
           </a:p>
         </p:txBody>
       </p:sp>
+      <p:sp>
+        <p:nvSpPr>
+          <p:cNvPr id="15" name="Rounded Rectangle 14"/>
+          <p:cNvSpPr/>
+          <p:nvPr/>
+        </p:nvSpPr>
+        <p:spPr>
+          <a:xfrm>
+            <a:off x="987552" y="3465576"/>
+            <a:ext cx="512064" cy="512064"/>
+          </a:xfrm>
+          <a:prstGeom prst="roundRect">
+            <a:avLst>
+              <a:gd name="adj" fmla="val 26000"/>
+            </a:avLst>
+          </a:prstGeom>
+          <a:solidFill>
+            <a:srgbClr val="EE0000"/>
+          </a:solidFill>
+          <a:ln>
+            <a:noFill/>
+          </a:ln>
+          <a:effectLst/>
+        </p:spPr>
+        <p:style>
+          <a:lnRef idx="1">
+            <a:schemeClr val="accent1"/>
+          </a:lnRef>
+          <a:fillRef idx="3">
+            <a:schemeClr val="accent1"/>
+          </a:fillRef>
+          <a:effectRef idx="2">
+            <a:schemeClr val="accent1"/>
+          </a:effectRef>
+          <a:fontRef idx="minor">
+            <a:schemeClr val="lt1"/>
+          </a:fontRef>
+        </p:style>
+        <p:txBody>
+          <a:bodyPr rtlCol="0" anchor="ctr"/>
+          <a:lstStyle/>
+          <a:p>
+            <a:pPr algn="ctr"/>
+          </a:p>
+        </p:txBody>
+      </p:sp>
       <p:pic>
         <p:nvPicPr>
-          <p:cNvPr id="13" name="Picture 12" descr="check_steel.png"/>
+          <p:cNvPr id="16" name="Picture 15" descr="check_white.png"/>
           <p:cNvPicPr>
             <a:picLocks noChangeAspect="1"/>
           </p:cNvPicPr>
@@ -10147,8 +10674,8 @@
         </p:blipFill>
         <p:spPr>
           <a:xfrm>
-            <a:off x="987552" y="3749040"/>
-            <a:ext cx="237744" cy="237744"/>
+            <a:off x="1110447" y="3588471"/>
+            <a:ext cx="266273" cy="266273"/>
           </a:xfrm>
           <a:prstGeom prst="rect">
             <a:avLst/>
@@ -10157,14 +10684,14 @@
       </p:pic>
       <p:sp>
         <p:nvSpPr>
-          <p:cNvPr id="14" name="TextBox 13"/>
+          <p:cNvPr id="17" name="TextBox 16"/>
           <p:cNvSpPr txBox="1"/>
           <p:nvPr/>
         </p:nvSpPr>
         <p:spPr>
           <a:xfrm>
-            <a:off x="1353312" y="3602736"/>
-            <a:ext cx="5029200" cy="530352"/>
+            <a:off x="1627632" y="3328416"/>
+            <a:ext cx="4206240" cy="786384"/>
           </a:xfrm>
           <a:prstGeom prst="rect">
             <a:avLst/>
@@ -10189,7 +10716,7 @@
               </a:spcAft>
             </a:pPr>
             <a:r>
-              <a:rPr sz="1200" b="0">
+              <a:rPr sz="1150" b="0">
                 <a:solidFill>
                   <a:srgbClr val="1A1A1A"/>
                 </a:solidFill>
@@ -10202,18 +10729,18 @@
       </p:sp>
       <p:sp>
         <p:nvSpPr>
-          <p:cNvPr id="15" name="Rounded Rectangle 14"/>
+          <p:cNvPr id="18" name="Rounded Rectangle 17"/>
           <p:cNvSpPr/>
           <p:nvPr/>
         </p:nvSpPr>
         <p:spPr>
           <a:xfrm>
-            <a:off x="841248" y="4206240"/>
-            <a:ext cx="5715000" cy="530352"/>
+            <a:off x="6254496" y="3328416"/>
+            <a:ext cx="5138928" cy="786384"/>
           </a:xfrm>
           <a:prstGeom prst="roundRect">
             <a:avLst>
-              <a:gd name="adj" fmla="val 6000"/>
+              <a:gd name="adj" fmla="val 7000"/>
             </a:avLst>
           </a:prstGeom>
           <a:solidFill>
@@ -10248,9 +10775,55 @@
           </a:p>
         </p:txBody>
       </p:sp>
+      <p:sp>
+        <p:nvSpPr>
+          <p:cNvPr id="19" name="Rounded Rectangle 18"/>
+          <p:cNvSpPr/>
+          <p:nvPr/>
+        </p:nvSpPr>
+        <p:spPr>
+          <a:xfrm>
+            <a:off x="6400800" y="3465576"/>
+            <a:ext cx="512064" cy="512064"/>
+          </a:xfrm>
+          <a:prstGeom prst="roundRect">
+            <a:avLst>
+              <a:gd name="adj" fmla="val 26000"/>
+            </a:avLst>
+          </a:prstGeom>
+          <a:solidFill>
+            <a:srgbClr val="EE0000"/>
+          </a:solidFill>
+          <a:ln>
+            <a:noFill/>
+          </a:ln>
+          <a:effectLst/>
+        </p:spPr>
+        <p:style>
+          <a:lnRef idx="1">
+            <a:schemeClr val="accent1"/>
+          </a:lnRef>
+          <a:fillRef idx="3">
+            <a:schemeClr val="accent1"/>
+          </a:fillRef>
+          <a:effectRef idx="2">
+            <a:schemeClr val="accent1"/>
+          </a:effectRef>
+          <a:fontRef idx="minor">
+            <a:schemeClr val="lt1"/>
+          </a:fontRef>
+        </p:style>
+        <p:txBody>
+          <a:bodyPr rtlCol="0" anchor="ctr"/>
+          <a:lstStyle/>
+          <a:p>
+            <a:pPr algn="ctr"/>
+          </a:p>
+        </p:txBody>
+      </p:sp>
       <p:pic>
         <p:nvPicPr>
-          <p:cNvPr id="16" name="Picture 15" descr="check_steel.png"/>
+          <p:cNvPr id="20" name="Picture 19" descr="check_white.png"/>
           <p:cNvPicPr>
             <a:picLocks noChangeAspect="1"/>
           </p:cNvPicPr>
@@ -10264,8 +10837,8 @@
         </p:blipFill>
         <p:spPr>
           <a:xfrm>
-            <a:off x="987552" y="4352544"/>
-            <a:ext cx="237744" cy="237744"/>
+            <a:off x="6523695" y="3588471"/>
+            <a:ext cx="266273" cy="266273"/>
           </a:xfrm>
           <a:prstGeom prst="rect">
             <a:avLst/>
@@ -10274,14 +10847,14 @@
       </p:pic>
       <p:sp>
         <p:nvSpPr>
-          <p:cNvPr id="17" name="TextBox 16"/>
+          <p:cNvPr id="21" name="TextBox 20"/>
           <p:cNvSpPr txBox="1"/>
           <p:nvPr/>
         </p:nvSpPr>
         <p:spPr>
           <a:xfrm>
-            <a:off x="1353312" y="4206240"/>
-            <a:ext cx="5029200" cy="530352"/>
+            <a:off x="7040880" y="3328416"/>
+            <a:ext cx="4206240" cy="786384"/>
           </a:xfrm>
           <a:prstGeom prst="rect">
             <a:avLst/>
@@ -10306,7 +10879,7 @@
               </a:spcAft>
             </a:pPr>
             <a:r>
-              <a:rPr sz="1200" b="0">
+              <a:rPr sz="1150" b="0">
                 <a:solidFill>
                   <a:srgbClr val="1A1A1A"/>
                 </a:solidFill>
@@ -10319,18 +10892,18 @@
       </p:sp>
       <p:sp>
         <p:nvSpPr>
-          <p:cNvPr id="18" name="Rounded Rectangle 17"/>
+          <p:cNvPr id="22" name="Rounded Rectangle 21"/>
           <p:cNvSpPr/>
           <p:nvPr/>
         </p:nvSpPr>
         <p:spPr>
           <a:xfrm>
-            <a:off x="841248" y="4809744"/>
-            <a:ext cx="5715000" cy="530352"/>
+            <a:off x="841248" y="4261104"/>
+            <a:ext cx="5138928" cy="786384"/>
           </a:xfrm>
           <a:prstGeom prst="roundRect">
             <a:avLst>
-              <a:gd name="adj" fmla="val 6000"/>
+              <a:gd name="adj" fmla="val 7000"/>
             </a:avLst>
           </a:prstGeom>
           <a:solidFill>
@@ -10365,9 +10938,55 @@
           </a:p>
         </p:txBody>
       </p:sp>
+      <p:sp>
+        <p:nvSpPr>
+          <p:cNvPr id="23" name="Rounded Rectangle 22"/>
+          <p:cNvSpPr/>
+          <p:nvPr/>
+        </p:nvSpPr>
+        <p:spPr>
+          <a:xfrm>
+            <a:off x="987552" y="4398264"/>
+            <a:ext cx="512064" cy="512064"/>
+          </a:xfrm>
+          <a:prstGeom prst="roundRect">
+            <a:avLst>
+              <a:gd name="adj" fmla="val 26000"/>
+            </a:avLst>
+          </a:prstGeom>
+          <a:solidFill>
+            <a:srgbClr val="EE0000"/>
+          </a:solidFill>
+          <a:ln>
+            <a:noFill/>
+          </a:ln>
+          <a:effectLst/>
+        </p:spPr>
+        <p:style>
+          <a:lnRef idx="1">
+            <a:schemeClr val="accent1"/>
+          </a:lnRef>
+          <a:fillRef idx="3">
+            <a:schemeClr val="accent1"/>
+          </a:fillRef>
+          <a:effectRef idx="2">
+            <a:schemeClr val="accent1"/>
+          </a:effectRef>
+          <a:fontRef idx="minor">
+            <a:schemeClr val="lt1"/>
+          </a:fontRef>
+        </p:style>
+        <p:txBody>
+          <a:bodyPr rtlCol="0" anchor="ctr"/>
+          <a:lstStyle/>
+          <a:p>
+            <a:pPr algn="ctr"/>
+          </a:p>
+        </p:txBody>
+      </p:sp>
       <p:pic>
         <p:nvPicPr>
-          <p:cNvPr id="19" name="Picture 18" descr="check_steel.png"/>
+          <p:cNvPr id="24" name="Picture 23" descr="check_white.png"/>
           <p:cNvPicPr>
             <a:picLocks noChangeAspect="1"/>
           </p:cNvPicPr>
@@ -10381,8 +11000,8 @@
         </p:blipFill>
         <p:spPr>
           <a:xfrm>
-            <a:off x="987552" y="4956048"/>
-            <a:ext cx="237744" cy="237744"/>
+            <a:off x="1110447" y="4521159"/>
+            <a:ext cx="266273" cy="266273"/>
           </a:xfrm>
           <a:prstGeom prst="rect">
             <a:avLst/>
@@ -10391,14 +11010,14 @@
       </p:pic>
       <p:sp>
         <p:nvSpPr>
-          <p:cNvPr id="20" name="TextBox 19"/>
+          <p:cNvPr id="25" name="TextBox 24"/>
           <p:cNvSpPr txBox="1"/>
           <p:nvPr/>
         </p:nvSpPr>
         <p:spPr>
           <a:xfrm>
-            <a:off x="1353312" y="4809744"/>
-            <a:ext cx="5029200" cy="530352"/>
+            <a:off x="1627632" y="4261104"/>
+            <a:ext cx="4206240" cy="786384"/>
           </a:xfrm>
           <a:prstGeom prst="rect">
             <a:avLst/>
@@ -10423,221 +11042,13 @@
               </a:spcAft>
             </a:pPr>
             <a:r>
-              <a:rPr sz="1200" b="0">
+              <a:rPr sz="1150" b="0">
                 <a:solidFill>
                   <a:srgbClr val="1A1A1A"/>
                 </a:solidFill>
                 <a:latin typeface="Red Hat Text"/>
               </a:rPr>
               <a:t>So an injected delay isn't clipped by that route's timeout</a:t>
-            </a:r>
-          </a:p>
-        </p:txBody>
-      </p:sp>
-      <p:sp>
-        <p:nvSpPr>
-          <p:cNvPr id="21" name="Rounded Rectangle 20"/>
-          <p:cNvSpPr/>
-          <p:nvPr/>
-        </p:nvSpPr>
-        <p:spPr>
-          <a:xfrm>
-            <a:off x="6812280" y="2395728"/>
-            <a:ext cx="4538167" cy="2944368"/>
-          </a:xfrm>
-          <a:prstGeom prst="roundRect">
-            <a:avLst>
-              <a:gd name="adj" fmla="val 4000"/>
-            </a:avLst>
-          </a:prstGeom>
-          <a:solidFill>
-            <a:srgbClr val="FFFFFF"/>
-          </a:solidFill>
-          <a:ln w="15240">
-            <a:solidFill>
-              <a:srgbClr val="DDE1E6"/>
-            </a:solidFill>
-          </a:ln>
-          <a:effectLst/>
-        </p:spPr>
-        <p:style>
-          <a:lnRef idx="1">
-            <a:schemeClr val="accent1"/>
-          </a:lnRef>
-          <a:fillRef idx="3">
-            <a:schemeClr val="accent1"/>
-          </a:fillRef>
-          <a:effectRef idx="2">
-            <a:schemeClr val="accent1"/>
-          </a:effectRef>
-          <a:fontRef idx="minor">
-            <a:schemeClr val="lt1"/>
-          </a:fontRef>
-        </p:style>
-        <p:txBody>
-          <a:bodyPr rtlCol="0" anchor="ctr"/>
-          <a:lstStyle/>
-          <a:p>
-            <a:pPr algn="ctr"/>
-          </a:p>
-        </p:txBody>
-      </p:sp>
-      <p:sp>
-        <p:nvSpPr>
-          <p:cNvPr id="22" name="Rounded Rectangle 21"/>
-          <p:cNvSpPr/>
-          <p:nvPr/>
-        </p:nvSpPr>
-        <p:spPr>
-          <a:xfrm>
-            <a:off x="7013448" y="2596896"/>
-            <a:ext cx="1298448" cy="310896"/>
-          </a:xfrm>
-          <a:prstGeom prst="roundRect">
-            <a:avLst>
-              <a:gd name="adj" fmla="val 50000"/>
-            </a:avLst>
-          </a:prstGeom>
-          <a:solidFill>
-            <a:srgbClr val="FCECEC"/>
-          </a:solidFill>
-          <a:ln>
-            <a:noFill/>
-          </a:ln>
-          <a:effectLst/>
-        </p:spPr>
-        <p:style>
-          <a:lnRef idx="1">
-            <a:schemeClr val="accent1"/>
-          </a:lnRef>
-          <a:fillRef idx="3">
-            <a:schemeClr val="accent1"/>
-          </a:fillRef>
-          <a:effectRef idx="2">
-            <a:schemeClr val="accent1"/>
-          </a:effectRef>
-          <a:fontRef idx="minor">
-            <a:schemeClr val="lt1"/>
-          </a:fontRef>
-        </p:style>
-        <p:txBody>
-          <a:bodyPr rtlCol="0" anchor="ctr"/>
-          <a:lstStyle/>
-          <a:p>
-            <a:pPr algn="ctr"/>
-          </a:p>
-        </p:txBody>
-      </p:sp>
-      <p:sp>
-        <p:nvSpPr>
-          <p:cNvPr id="23" name="TextBox 22"/>
-          <p:cNvSpPr txBox="1"/>
-          <p:nvPr/>
-        </p:nvSpPr>
-        <p:spPr>
-          <a:xfrm>
-            <a:off x="7013448" y="2596896"/>
-            <a:ext cx="1298448" cy="310896"/>
-          </a:xfrm>
-          <a:prstGeom prst="rect">
-            <a:avLst/>
-          </a:prstGeom>
-          <a:noFill/>
-        </p:spPr>
-        <p:txBody>
-          <a:bodyPr wrap="none" anchor="ctr" lIns="0" rIns="0" tIns="0" bIns="0">
-            <a:spAutoFit/>
-          </a:bodyPr>
-          <a:lstStyle/>
-          <a:p>
-            <a:pPr algn="ctr">
-              <a:lnSpc>
-                <a:spcPct val="106000"/>
-              </a:lnSpc>
-              <a:spcBef>
-                <a:spcPts val="0"/>
-              </a:spcBef>
-              <a:spcAft>
-                <a:spcPts val="0"/>
-              </a:spcAft>
-            </a:pPr>
-            <a:r>
-              <a:rPr sz="850" b="1">
-                <a:solidFill>
-                  <a:srgbClr val="B80000"/>
-                </a:solidFill>
-                <a:latin typeface="Red Hat Display"/>
-              </a:rPr>
-              <a:t>MEDIA PASS</a:t>
-            </a:r>
-          </a:p>
-        </p:txBody>
-      </p:sp>
-      <p:pic>
-        <p:nvPicPr>
-          <p:cNvPr id="24" name="Picture 23" descr="eye_slate.png"/>
-          <p:cNvPicPr>
-            <a:picLocks noChangeAspect="1"/>
-          </p:cNvPicPr>
-          <p:nvPr/>
-        </p:nvPicPr>
-        <p:blipFill>
-          <a:blip r:embed="rId4"/>
-          <a:stretch>
-            <a:fillRect/>
-          </a:stretch>
-        </p:blipFill>
-        <p:spPr>
-          <a:xfrm>
-            <a:off x="8843619" y="3108960"/>
-            <a:ext cx="475488" cy="475488"/>
-          </a:xfrm>
-          <a:prstGeom prst="rect">
-            <a:avLst/>
-          </a:prstGeom>
-        </p:spPr>
-      </p:pic>
-      <p:sp>
-        <p:nvSpPr>
-          <p:cNvPr id="25" name="TextBox 24"/>
-          <p:cNvSpPr txBox="1"/>
-          <p:nvPr/>
-        </p:nvSpPr>
-        <p:spPr>
-          <a:xfrm>
-            <a:off x="7050024" y="3721608"/>
-            <a:ext cx="4062679" cy="1481328"/>
-          </a:xfrm>
-          <a:prstGeom prst="rect">
-            <a:avLst/>
-          </a:prstGeom>
-          <a:noFill/>
-        </p:spPr>
-        <p:txBody>
-          <a:bodyPr wrap="square" anchor="t" lIns="0" rIns="0" tIns="0" bIns="0">
-            <a:spAutoFit/>
-          </a:bodyPr>
-          <a:lstStyle/>
-          <a:p>
-            <a:pPr algn="l">
-              <a:lnSpc>
-                <a:spcPct val="120000"/>
-              </a:lnSpc>
-              <a:spcBef>
-                <a:spcPts val="0"/>
-              </a:spcBef>
-              <a:spcAft>
-                <a:spcPts val="0"/>
-              </a:spcAft>
-            </a:pPr>
-            <a:r>
-              <a:rPr sz="950" b="0">
-                <a:solidFill>
-                  <a:srgbClr val="8A9099"/>
-                </a:solidFill>
-                <a:latin typeface="Red Hat Text"/>
-              </a:rPr>
-              <a:t>A route with three guard icons (timeout, retry, circuit-breaker) and a fault "syringe" positioned BEFORE the router box — an arrow annotation "injected here, ahead of the timeout."</a:t>
             </a:r>
           </a:p>
         </p:txBody>
@@ -10945,11 +11356,11 @@
         <p:spPr>
           <a:xfrm>
             <a:off x="841248" y="2395728"/>
-            <a:ext cx="5715000" cy="530352"/>
+            <a:ext cx="5138928" cy="786384"/>
           </a:xfrm>
           <a:prstGeom prst="roundRect">
             <a:avLst>
-              <a:gd name="adj" fmla="val 6000"/>
+              <a:gd name="adj" fmla="val 7000"/>
             </a:avLst>
           </a:prstGeom>
           <a:solidFill>
@@ -10984,9 +11395,55 @@
           </a:p>
         </p:txBody>
       </p:sp>
+      <p:sp>
+        <p:nvSpPr>
+          <p:cNvPr id="7" name="Rounded Rectangle 6"/>
+          <p:cNvSpPr/>
+          <p:nvPr/>
+        </p:nvSpPr>
+        <p:spPr>
+          <a:xfrm>
+            <a:off x="987552" y="2532888"/>
+            <a:ext cx="512064" cy="512064"/>
+          </a:xfrm>
+          <a:prstGeom prst="roundRect">
+            <a:avLst>
+              <a:gd name="adj" fmla="val 26000"/>
+            </a:avLst>
+          </a:prstGeom>
+          <a:solidFill>
+            <a:srgbClr val="EE0000"/>
+          </a:solidFill>
+          <a:ln>
+            <a:noFill/>
+          </a:ln>
+          <a:effectLst/>
+        </p:spPr>
+        <p:style>
+          <a:lnRef idx="1">
+            <a:schemeClr val="accent1"/>
+          </a:lnRef>
+          <a:fillRef idx="3">
+            <a:schemeClr val="accent1"/>
+          </a:fillRef>
+          <a:effectRef idx="2">
+            <a:schemeClr val="accent1"/>
+          </a:effectRef>
+          <a:fontRef idx="minor">
+            <a:schemeClr val="lt1"/>
+          </a:fontRef>
+        </p:style>
+        <p:txBody>
+          <a:bodyPr rtlCol="0" anchor="ctr"/>
+          <a:lstStyle/>
+          <a:p>
+            <a:pPr algn="ctr"/>
+          </a:p>
+        </p:txBody>
+      </p:sp>
       <p:pic>
         <p:nvPicPr>
-          <p:cNvPr id="7" name="Picture 6" descr="check_steel.png"/>
+          <p:cNvPr id="8" name="Picture 7" descr="check_white.png"/>
           <p:cNvPicPr>
             <a:picLocks noChangeAspect="1"/>
           </p:cNvPicPr>
@@ -11000,8 +11457,8 @@
         </p:blipFill>
         <p:spPr>
           <a:xfrm>
-            <a:off x="987552" y="2542032"/>
-            <a:ext cx="237744" cy="237744"/>
+            <a:off x="1110447" y="2655783"/>
+            <a:ext cx="266273" cy="266273"/>
           </a:xfrm>
           <a:prstGeom prst="rect">
             <a:avLst/>
@@ -11010,14 +11467,14 @@
       </p:pic>
       <p:sp>
         <p:nvSpPr>
-          <p:cNvPr id="8" name="TextBox 7"/>
+          <p:cNvPr id="9" name="TextBox 8"/>
           <p:cNvSpPr txBox="1"/>
           <p:nvPr/>
         </p:nvSpPr>
         <p:spPr>
           <a:xfrm>
-            <a:off x="1353312" y="2395728"/>
-            <a:ext cx="5029200" cy="530352"/>
+            <a:off x="1627632" y="2395728"/>
+            <a:ext cx="4206240" cy="786384"/>
           </a:xfrm>
           <a:prstGeom prst="rect">
             <a:avLst/>
@@ -11042,7 +11499,7 @@
               </a:spcAft>
             </a:pPr>
             <a:r>
-              <a:rPr sz="1200" b="0">
+              <a:rPr sz="1150" b="0">
                 <a:solidFill>
                   <a:srgbClr val="1A1A1A"/>
                 </a:solidFill>
@@ -11055,18 +11512,18 @@
       </p:sp>
       <p:sp>
         <p:nvSpPr>
-          <p:cNvPr id="9" name="Rounded Rectangle 8"/>
+          <p:cNvPr id="10" name="Rounded Rectangle 9"/>
           <p:cNvSpPr/>
           <p:nvPr/>
         </p:nvSpPr>
         <p:spPr>
           <a:xfrm>
-            <a:off x="841248" y="2999232"/>
-            <a:ext cx="5715000" cy="530352"/>
+            <a:off x="6254496" y="2395728"/>
+            <a:ext cx="5138928" cy="786384"/>
           </a:xfrm>
           <a:prstGeom prst="roundRect">
             <a:avLst>
-              <a:gd name="adj" fmla="val 6000"/>
+              <a:gd name="adj" fmla="val 7000"/>
             </a:avLst>
           </a:prstGeom>
           <a:solidFill>
@@ -11101,9 +11558,55 @@
           </a:p>
         </p:txBody>
       </p:sp>
+      <p:sp>
+        <p:nvSpPr>
+          <p:cNvPr id="11" name="Rounded Rectangle 10"/>
+          <p:cNvSpPr/>
+          <p:nvPr/>
+        </p:nvSpPr>
+        <p:spPr>
+          <a:xfrm>
+            <a:off x="6400800" y="2532888"/>
+            <a:ext cx="512064" cy="512064"/>
+          </a:xfrm>
+          <a:prstGeom prst="roundRect">
+            <a:avLst>
+              <a:gd name="adj" fmla="val 26000"/>
+            </a:avLst>
+          </a:prstGeom>
+          <a:solidFill>
+            <a:srgbClr val="EE0000"/>
+          </a:solidFill>
+          <a:ln>
+            <a:noFill/>
+          </a:ln>
+          <a:effectLst/>
+        </p:spPr>
+        <p:style>
+          <a:lnRef idx="1">
+            <a:schemeClr val="accent1"/>
+          </a:lnRef>
+          <a:fillRef idx="3">
+            <a:schemeClr val="accent1"/>
+          </a:fillRef>
+          <a:effectRef idx="2">
+            <a:schemeClr val="accent1"/>
+          </a:effectRef>
+          <a:fontRef idx="minor">
+            <a:schemeClr val="lt1"/>
+          </a:fontRef>
+        </p:style>
+        <p:txBody>
+          <a:bodyPr rtlCol="0" anchor="ctr"/>
+          <a:lstStyle/>
+          <a:p>
+            <a:pPr algn="ctr"/>
+          </a:p>
+        </p:txBody>
+      </p:sp>
       <p:pic>
         <p:nvPicPr>
-          <p:cNvPr id="10" name="Picture 9" descr="check_steel.png"/>
+          <p:cNvPr id="12" name="Picture 11" descr="check_white.png"/>
           <p:cNvPicPr>
             <a:picLocks noChangeAspect="1"/>
           </p:cNvPicPr>
@@ -11117,8 +11620,8 @@
         </p:blipFill>
         <p:spPr>
           <a:xfrm>
-            <a:off x="987552" y="3145536"/>
-            <a:ext cx="237744" cy="237744"/>
+            <a:off x="6523695" y="2655783"/>
+            <a:ext cx="266273" cy="266273"/>
           </a:xfrm>
           <a:prstGeom prst="rect">
             <a:avLst/>
@@ -11127,14 +11630,14 @@
       </p:pic>
       <p:sp>
         <p:nvSpPr>
-          <p:cNvPr id="11" name="TextBox 10"/>
+          <p:cNvPr id="13" name="TextBox 12"/>
           <p:cNvSpPr txBox="1"/>
           <p:nvPr/>
         </p:nvSpPr>
         <p:spPr>
           <a:xfrm>
-            <a:off x="1353312" y="2999232"/>
-            <a:ext cx="5029200" cy="530352"/>
+            <a:off x="7040880" y="2395728"/>
+            <a:ext cx="4206240" cy="786384"/>
           </a:xfrm>
           <a:prstGeom prst="rect">
             <a:avLst/>
@@ -11159,7 +11662,7 @@
               </a:spcAft>
             </a:pPr>
             <a:r>
-              <a:rPr sz="1200" b="0">
+              <a:rPr sz="1150" b="0">
                 <a:solidFill>
                   <a:srgbClr val="1A1A1A"/>
                 </a:solidFill>
@@ -11172,18 +11675,18 @@
       </p:sp>
       <p:sp>
         <p:nvSpPr>
-          <p:cNvPr id="12" name="Rounded Rectangle 11"/>
+          <p:cNvPr id="14" name="Rounded Rectangle 13"/>
           <p:cNvSpPr/>
           <p:nvPr/>
         </p:nvSpPr>
         <p:spPr>
           <a:xfrm>
-            <a:off x="841248" y="3602736"/>
-            <a:ext cx="5715000" cy="530352"/>
+            <a:off x="841248" y="3328416"/>
+            <a:ext cx="5138928" cy="786384"/>
           </a:xfrm>
           <a:prstGeom prst="roundRect">
             <a:avLst>
-              <a:gd name="adj" fmla="val 6000"/>
+              <a:gd name="adj" fmla="val 7000"/>
             </a:avLst>
           </a:prstGeom>
           <a:solidFill>
@@ -11218,9 +11721,55 @@
           </a:p>
         </p:txBody>
       </p:sp>
+      <p:sp>
+        <p:nvSpPr>
+          <p:cNvPr id="15" name="Rounded Rectangle 14"/>
+          <p:cNvSpPr/>
+          <p:nvPr/>
+        </p:nvSpPr>
+        <p:spPr>
+          <a:xfrm>
+            <a:off x="987552" y="3465576"/>
+            <a:ext cx="512064" cy="512064"/>
+          </a:xfrm>
+          <a:prstGeom prst="roundRect">
+            <a:avLst>
+              <a:gd name="adj" fmla="val 26000"/>
+            </a:avLst>
+          </a:prstGeom>
+          <a:solidFill>
+            <a:srgbClr val="EE0000"/>
+          </a:solidFill>
+          <a:ln>
+            <a:noFill/>
+          </a:ln>
+          <a:effectLst/>
+        </p:spPr>
+        <p:style>
+          <a:lnRef idx="1">
+            <a:schemeClr val="accent1"/>
+          </a:lnRef>
+          <a:fillRef idx="3">
+            <a:schemeClr val="accent1"/>
+          </a:fillRef>
+          <a:effectRef idx="2">
+            <a:schemeClr val="accent1"/>
+          </a:effectRef>
+          <a:fontRef idx="minor">
+            <a:schemeClr val="lt1"/>
+          </a:fontRef>
+        </p:style>
+        <p:txBody>
+          <a:bodyPr rtlCol="0" anchor="ctr"/>
+          <a:lstStyle/>
+          <a:p>
+            <a:pPr algn="ctr"/>
+          </a:p>
+        </p:txBody>
+      </p:sp>
       <p:pic>
         <p:nvPicPr>
-          <p:cNvPr id="13" name="Picture 12" descr="check_steel.png"/>
+          <p:cNvPr id="16" name="Picture 15" descr="check_white.png"/>
           <p:cNvPicPr>
             <a:picLocks noChangeAspect="1"/>
           </p:cNvPicPr>
@@ -11234,8 +11783,8 @@
         </p:blipFill>
         <p:spPr>
           <a:xfrm>
-            <a:off x="987552" y="3749040"/>
-            <a:ext cx="237744" cy="237744"/>
+            <a:off x="1110447" y="3588471"/>
+            <a:ext cx="266273" cy="266273"/>
           </a:xfrm>
           <a:prstGeom prst="rect">
             <a:avLst/>
@@ -11244,14 +11793,14 @@
       </p:pic>
       <p:sp>
         <p:nvSpPr>
-          <p:cNvPr id="14" name="TextBox 13"/>
+          <p:cNvPr id="17" name="TextBox 16"/>
           <p:cNvSpPr txBox="1"/>
           <p:nvPr/>
         </p:nvSpPr>
         <p:spPr>
           <a:xfrm>
-            <a:off x="1353312" y="3602736"/>
-            <a:ext cx="5029200" cy="530352"/>
+            <a:off x="1627632" y="3328416"/>
+            <a:ext cx="4206240" cy="786384"/>
           </a:xfrm>
           <a:prstGeom prst="rect">
             <a:avLst/>
@@ -11276,7 +11825,7 @@
               </a:spcAft>
             </a:pPr>
             <a:r>
-              <a:rPr sz="1200" b="0">
+              <a:rPr sz="1150" b="0">
                 <a:solidFill>
                   <a:srgbClr val="1A1A1A"/>
                 </a:solidFill>
@@ -11289,18 +11838,18 @@
       </p:sp>
       <p:sp>
         <p:nvSpPr>
-          <p:cNvPr id="15" name="Rounded Rectangle 14"/>
+          <p:cNvPr id="18" name="Rounded Rectangle 17"/>
           <p:cNvSpPr/>
           <p:nvPr/>
         </p:nvSpPr>
         <p:spPr>
           <a:xfrm>
-            <a:off x="841248" y="4206240"/>
-            <a:ext cx="5715000" cy="530352"/>
+            <a:off x="6254496" y="3328416"/>
+            <a:ext cx="5138928" cy="786384"/>
           </a:xfrm>
           <a:prstGeom prst="roundRect">
             <a:avLst>
-              <a:gd name="adj" fmla="val 6000"/>
+              <a:gd name="adj" fmla="val 7000"/>
             </a:avLst>
           </a:prstGeom>
           <a:solidFill>
@@ -11335,9 +11884,55 @@
           </a:p>
         </p:txBody>
       </p:sp>
+      <p:sp>
+        <p:nvSpPr>
+          <p:cNvPr id="19" name="Rounded Rectangle 18"/>
+          <p:cNvSpPr/>
+          <p:nvPr/>
+        </p:nvSpPr>
+        <p:spPr>
+          <a:xfrm>
+            <a:off x="6400800" y="3465576"/>
+            <a:ext cx="512064" cy="512064"/>
+          </a:xfrm>
+          <a:prstGeom prst="roundRect">
+            <a:avLst>
+              <a:gd name="adj" fmla="val 26000"/>
+            </a:avLst>
+          </a:prstGeom>
+          <a:solidFill>
+            <a:srgbClr val="EE0000"/>
+          </a:solidFill>
+          <a:ln>
+            <a:noFill/>
+          </a:ln>
+          <a:effectLst/>
+        </p:spPr>
+        <p:style>
+          <a:lnRef idx="1">
+            <a:schemeClr val="accent1"/>
+          </a:lnRef>
+          <a:fillRef idx="3">
+            <a:schemeClr val="accent1"/>
+          </a:fillRef>
+          <a:effectRef idx="2">
+            <a:schemeClr val="accent1"/>
+          </a:effectRef>
+          <a:fontRef idx="minor">
+            <a:schemeClr val="lt1"/>
+          </a:fontRef>
+        </p:style>
+        <p:txBody>
+          <a:bodyPr rtlCol="0" anchor="ctr"/>
+          <a:lstStyle/>
+          <a:p>
+            <a:pPr algn="ctr"/>
+          </a:p>
+        </p:txBody>
+      </p:sp>
       <p:pic>
         <p:nvPicPr>
-          <p:cNvPr id="16" name="Picture 15" descr="check_steel.png"/>
+          <p:cNvPr id="20" name="Picture 19" descr="check_white.png"/>
           <p:cNvPicPr>
             <a:picLocks noChangeAspect="1"/>
           </p:cNvPicPr>
@@ -11351,8 +11946,8 @@
         </p:blipFill>
         <p:spPr>
           <a:xfrm>
-            <a:off x="987552" y="4352544"/>
-            <a:ext cx="237744" cy="237744"/>
+            <a:off x="6523695" y="3588471"/>
+            <a:ext cx="266273" cy="266273"/>
           </a:xfrm>
           <a:prstGeom prst="rect">
             <a:avLst/>
@@ -11361,14 +11956,14 @@
       </p:pic>
       <p:sp>
         <p:nvSpPr>
-          <p:cNvPr id="17" name="TextBox 16"/>
+          <p:cNvPr id="21" name="TextBox 20"/>
           <p:cNvSpPr txBox="1"/>
           <p:nvPr/>
         </p:nvSpPr>
         <p:spPr>
           <a:xfrm>
-            <a:off x="1353312" y="4206240"/>
-            <a:ext cx="5029200" cy="530352"/>
+            <a:off x="7040880" y="3328416"/>
+            <a:ext cx="4206240" cy="786384"/>
           </a:xfrm>
           <a:prstGeom prst="rect">
             <a:avLst/>
@@ -11393,7 +11988,7 @@
               </a:spcAft>
             </a:pPr>
             <a:r>
-              <a:rPr sz="1200" b="0">
+              <a:rPr sz="1150" b="0">
                 <a:solidFill>
                   <a:srgbClr val="1A1A1A"/>
                 </a:solidFill>
@@ -11406,18 +12001,18 @@
       </p:sp>
       <p:sp>
         <p:nvSpPr>
-          <p:cNvPr id="18" name="Rounded Rectangle 17"/>
+          <p:cNvPr id="22" name="Rounded Rectangle 21"/>
           <p:cNvSpPr/>
           <p:nvPr/>
         </p:nvSpPr>
         <p:spPr>
           <a:xfrm>
-            <a:off x="841248" y="4809744"/>
-            <a:ext cx="5715000" cy="530352"/>
+            <a:off x="841248" y="4261104"/>
+            <a:ext cx="5138928" cy="786384"/>
           </a:xfrm>
           <a:prstGeom prst="roundRect">
             <a:avLst>
-              <a:gd name="adj" fmla="val 6000"/>
+              <a:gd name="adj" fmla="val 7000"/>
             </a:avLst>
           </a:prstGeom>
           <a:solidFill>
@@ -11452,9 +12047,55 @@
           </a:p>
         </p:txBody>
       </p:sp>
+      <p:sp>
+        <p:nvSpPr>
+          <p:cNvPr id="23" name="Rounded Rectangle 22"/>
+          <p:cNvSpPr/>
+          <p:nvPr/>
+        </p:nvSpPr>
+        <p:spPr>
+          <a:xfrm>
+            <a:off x="987552" y="4398264"/>
+            <a:ext cx="512064" cy="512064"/>
+          </a:xfrm>
+          <a:prstGeom prst="roundRect">
+            <a:avLst>
+              <a:gd name="adj" fmla="val 26000"/>
+            </a:avLst>
+          </a:prstGeom>
+          <a:solidFill>
+            <a:srgbClr val="EE0000"/>
+          </a:solidFill>
+          <a:ln>
+            <a:noFill/>
+          </a:ln>
+          <a:effectLst/>
+        </p:spPr>
+        <p:style>
+          <a:lnRef idx="1">
+            <a:schemeClr val="accent1"/>
+          </a:lnRef>
+          <a:fillRef idx="3">
+            <a:schemeClr val="accent1"/>
+          </a:fillRef>
+          <a:effectRef idx="2">
+            <a:schemeClr val="accent1"/>
+          </a:effectRef>
+          <a:fontRef idx="minor">
+            <a:schemeClr val="lt1"/>
+          </a:fontRef>
+        </p:style>
+        <p:txBody>
+          <a:bodyPr rtlCol="0" anchor="ctr"/>
+          <a:lstStyle/>
+          <a:p>
+            <a:pPr algn="ctr"/>
+          </a:p>
+        </p:txBody>
+      </p:sp>
       <p:pic>
         <p:nvPicPr>
-          <p:cNvPr id="19" name="Picture 18" descr="check_steel.png"/>
+          <p:cNvPr id="24" name="Picture 23" descr="check_white.png"/>
           <p:cNvPicPr>
             <a:picLocks noChangeAspect="1"/>
           </p:cNvPicPr>
@@ -11468,8 +12109,8 @@
         </p:blipFill>
         <p:spPr>
           <a:xfrm>
-            <a:off x="987552" y="4956048"/>
-            <a:ext cx="237744" cy="237744"/>
+            <a:off x="1110447" y="4521159"/>
+            <a:ext cx="266273" cy="266273"/>
           </a:xfrm>
           <a:prstGeom prst="rect">
             <a:avLst/>
@@ -11478,14 +12119,14 @@
       </p:pic>
       <p:sp>
         <p:nvSpPr>
-          <p:cNvPr id="20" name="TextBox 19"/>
+          <p:cNvPr id="25" name="TextBox 24"/>
           <p:cNvSpPr txBox="1"/>
           <p:nvPr/>
         </p:nvSpPr>
         <p:spPr>
           <a:xfrm>
-            <a:off x="1353312" y="4809744"/>
-            <a:ext cx="5029200" cy="530352"/>
+            <a:off x="1627632" y="4261104"/>
+            <a:ext cx="4206240" cy="786384"/>
           </a:xfrm>
           <a:prstGeom prst="rect">
             <a:avLst/>
@@ -11510,221 +12151,13 @@
               </a:spcAft>
             </a:pPr>
             <a:r>
-              <a:rPr sz="1200" b="0">
+              <a:rPr sz="1150" b="0">
                 <a:solidFill>
                   <a:srgbClr val="1A1A1A"/>
                 </a:solidFill>
                 <a:latin typeface="Red Hat Text"/>
               </a:rPr>
               <a:t>Not by IP, not by namespace — by cryptographic identity</a:t>
-            </a:r>
-          </a:p>
-        </p:txBody>
-      </p:sp>
-      <p:sp>
-        <p:nvSpPr>
-          <p:cNvPr id="21" name="Rounded Rectangle 20"/>
-          <p:cNvSpPr/>
-          <p:nvPr/>
-        </p:nvSpPr>
-        <p:spPr>
-          <a:xfrm>
-            <a:off x="6812280" y="2395728"/>
-            <a:ext cx="4538167" cy="2944368"/>
-          </a:xfrm>
-          <a:prstGeom prst="roundRect">
-            <a:avLst>
-              <a:gd name="adj" fmla="val 4000"/>
-            </a:avLst>
-          </a:prstGeom>
-          <a:solidFill>
-            <a:srgbClr val="FFFFFF"/>
-          </a:solidFill>
-          <a:ln w="15240">
-            <a:solidFill>
-              <a:srgbClr val="DDE1E6"/>
-            </a:solidFill>
-          </a:ln>
-          <a:effectLst/>
-        </p:spPr>
-        <p:style>
-          <a:lnRef idx="1">
-            <a:schemeClr val="accent1"/>
-          </a:lnRef>
-          <a:fillRef idx="3">
-            <a:schemeClr val="accent1"/>
-          </a:fillRef>
-          <a:effectRef idx="2">
-            <a:schemeClr val="accent1"/>
-          </a:effectRef>
-          <a:fontRef idx="minor">
-            <a:schemeClr val="lt1"/>
-          </a:fontRef>
-        </p:style>
-        <p:txBody>
-          <a:bodyPr rtlCol="0" anchor="ctr"/>
-          <a:lstStyle/>
-          <a:p>
-            <a:pPr algn="ctr"/>
-          </a:p>
-        </p:txBody>
-      </p:sp>
-      <p:sp>
-        <p:nvSpPr>
-          <p:cNvPr id="22" name="Rounded Rectangle 21"/>
-          <p:cNvSpPr/>
-          <p:nvPr/>
-        </p:nvSpPr>
-        <p:spPr>
-          <a:xfrm>
-            <a:off x="7013448" y="2596896"/>
-            <a:ext cx="1298448" cy="310896"/>
-          </a:xfrm>
-          <a:prstGeom prst="roundRect">
-            <a:avLst>
-              <a:gd name="adj" fmla="val 50000"/>
-            </a:avLst>
-          </a:prstGeom>
-          <a:solidFill>
-            <a:srgbClr val="FCECEC"/>
-          </a:solidFill>
-          <a:ln>
-            <a:noFill/>
-          </a:ln>
-          <a:effectLst/>
-        </p:spPr>
-        <p:style>
-          <a:lnRef idx="1">
-            <a:schemeClr val="accent1"/>
-          </a:lnRef>
-          <a:fillRef idx="3">
-            <a:schemeClr val="accent1"/>
-          </a:fillRef>
-          <a:effectRef idx="2">
-            <a:schemeClr val="accent1"/>
-          </a:effectRef>
-          <a:fontRef idx="minor">
-            <a:schemeClr val="lt1"/>
-          </a:fontRef>
-        </p:style>
-        <p:txBody>
-          <a:bodyPr rtlCol="0" anchor="ctr"/>
-          <a:lstStyle/>
-          <a:p>
-            <a:pPr algn="ctr"/>
-          </a:p>
-        </p:txBody>
-      </p:sp>
-      <p:sp>
-        <p:nvSpPr>
-          <p:cNvPr id="23" name="TextBox 22"/>
-          <p:cNvSpPr txBox="1"/>
-          <p:nvPr/>
-        </p:nvSpPr>
-        <p:spPr>
-          <a:xfrm>
-            <a:off x="7013448" y="2596896"/>
-            <a:ext cx="1298448" cy="310896"/>
-          </a:xfrm>
-          <a:prstGeom prst="rect">
-            <a:avLst/>
-          </a:prstGeom>
-          <a:noFill/>
-        </p:spPr>
-        <p:txBody>
-          <a:bodyPr wrap="none" anchor="ctr" lIns="0" rIns="0" tIns="0" bIns="0">
-            <a:spAutoFit/>
-          </a:bodyPr>
-          <a:lstStyle/>
-          <a:p>
-            <a:pPr algn="ctr">
-              <a:lnSpc>
-                <a:spcPct val="106000"/>
-              </a:lnSpc>
-              <a:spcBef>
-                <a:spcPts val="0"/>
-              </a:spcBef>
-              <a:spcAft>
-                <a:spcPts val="0"/>
-              </a:spcAft>
-            </a:pPr>
-            <a:r>
-              <a:rPr sz="850" b="1">
-                <a:solidFill>
-                  <a:srgbClr val="B80000"/>
-                </a:solidFill>
-                <a:latin typeface="Red Hat Display"/>
-              </a:rPr>
-              <a:t>MEDIA PASS</a:t>
-            </a:r>
-          </a:p>
-        </p:txBody>
-      </p:sp>
-      <p:pic>
-        <p:nvPicPr>
-          <p:cNvPr id="24" name="Picture 23" descr="eye_slate.png"/>
-          <p:cNvPicPr>
-            <a:picLocks noChangeAspect="1"/>
-          </p:cNvPicPr>
-          <p:nvPr/>
-        </p:nvPicPr>
-        <p:blipFill>
-          <a:blip r:embed="rId4"/>
-          <a:stretch>
-            <a:fillRect/>
-          </a:stretch>
-        </p:blipFill>
-        <p:spPr>
-          <a:xfrm>
-            <a:off x="8843619" y="3108960"/>
-            <a:ext cx="475488" cy="475488"/>
-          </a:xfrm>
-          <a:prstGeom prst="rect">
-            <a:avLst/>
-          </a:prstGeom>
-        </p:spPr>
-      </p:pic>
-      <p:sp>
-        <p:nvSpPr>
-          <p:cNvPr id="25" name="TextBox 24"/>
-          <p:cNvSpPr txBox="1"/>
-          <p:nvPr/>
-        </p:nvSpPr>
-        <p:spPr>
-          <a:xfrm>
-            <a:off x="7050024" y="3721608"/>
-            <a:ext cx="4062679" cy="1481328"/>
-          </a:xfrm>
-          <a:prstGeom prst="rect">
-            <a:avLst/>
-          </a:prstGeom>
-          <a:noFill/>
-        </p:spPr>
-        <p:txBody>
-          <a:bodyPr wrap="square" anchor="t" lIns="0" rIns="0" tIns="0" bIns="0">
-            <a:spAutoFit/>
-          </a:bodyPr>
-          <a:lstStyle/>
-          <a:p>
-            <a:pPr algn="l">
-              <a:lnSpc>
-                <a:spcPct val="120000"/>
-              </a:lnSpc>
-              <a:spcBef>
-                <a:spcPts val="0"/>
-              </a:spcBef>
-              <a:spcAft>
-                <a:spcPts val="0"/>
-              </a:spcAft>
-            </a:pPr>
-            <a:r>
-              <a:rPr sz="950" b="0">
-                <a:solidFill>
-                  <a:srgbClr val="8A9099"/>
-                </a:solidFill>
-                <a:latin typeface="Red Hat Text"/>
-              </a:rPr>
-              <a:t>Three arrows converging on the fraud service: a green check from claims (sa/parasol-claims), a red 403 from the web tier (sa/default), a red 403 from the un-meshed client — labelled "identity, not location."</a:t>
             </a:r>
           </a:p>
         </p:txBody>
@@ -12032,11 +12465,11 @@
         <p:spPr>
           <a:xfrm>
             <a:off x="841248" y="2395728"/>
-            <a:ext cx="5715000" cy="530352"/>
+            <a:ext cx="5138928" cy="786384"/>
           </a:xfrm>
           <a:prstGeom prst="roundRect">
             <a:avLst>
-              <a:gd name="adj" fmla="val 6000"/>
+              <a:gd name="adj" fmla="val 7000"/>
             </a:avLst>
           </a:prstGeom>
           <a:solidFill>
@@ -12071,9 +12504,55 @@
           </a:p>
         </p:txBody>
       </p:sp>
+      <p:sp>
+        <p:nvSpPr>
+          <p:cNvPr id="7" name="Rounded Rectangle 6"/>
+          <p:cNvSpPr/>
+          <p:nvPr/>
+        </p:nvSpPr>
+        <p:spPr>
+          <a:xfrm>
+            <a:off x="987552" y="2532888"/>
+            <a:ext cx="512064" cy="512064"/>
+          </a:xfrm>
+          <a:prstGeom prst="roundRect">
+            <a:avLst>
+              <a:gd name="adj" fmla="val 26000"/>
+            </a:avLst>
+          </a:prstGeom>
+          <a:solidFill>
+            <a:srgbClr val="EE0000"/>
+          </a:solidFill>
+          <a:ln>
+            <a:noFill/>
+          </a:ln>
+          <a:effectLst/>
+        </p:spPr>
+        <p:style>
+          <a:lnRef idx="1">
+            <a:schemeClr val="accent1"/>
+          </a:lnRef>
+          <a:fillRef idx="3">
+            <a:schemeClr val="accent1"/>
+          </a:fillRef>
+          <a:effectRef idx="2">
+            <a:schemeClr val="accent1"/>
+          </a:effectRef>
+          <a:fontRef idx="minor">
+            <a:schemeClr val="lt1"/>
+          </a:fontRef>
+        </p:style>
+        <p:txBody>
+          <a:bodyPr rtlCol="0" anchor="ctr"/>
+          <a:lstStyle/>
+          <a:p>
+            <a:pPr algn="ctr"/>
+          </a:p>
+        </p:txBody>
+      </p:sp>
       <p:pic>
         <p:nvPicPr>
-          <p:cNvPr id="7" name="Picture 6" descr="check_steel.png"/>
+          <p:cNvPr id="8" name="Picture 7" descr="check_white.png"/>
           <p:cNvPicPr>
             <a:picLocks noChangeAspect="1"/>
           </p:cNvPicPr>
@@ -12087,8 +12566,8 @@
         </p:blipFill>
         <p:spPr>
           <a:xfrm>
-            <a:off x="987552" y="2542032"/>
-            <a:ext cx="237744" cy="237744"/>
+            <a:off x="1110447" y="2655783"/>
+            <a:ext cx="266273" cy="266273"/>
           </a:xfrm>
           <a:prstGeom prst="rect">
             <a:avLst/>
@@ -12097,14 +12576,14 @@
       </p:pic>
       <p:sp>
         <p:nvSpPr>
-          <p:cNvPr id="8" name="TextBox 7"/>
+          <p:cNvPr id="9" name="TextBox 8"/>
           <p:cNvSpPr txBox="1"/>
           <p:nvPr/>
         </p:nvSpPr>
         <p:spPr>
           <a:xfrm>
-            <a:off x="1353312" y="2395728"/>
-            <a:ext cx="5029200" cy="530352"/>
+            <a:off x="1627632" y="2395728"/>
+            <a:ext cx="4206240" cy="786384"/>
           </a:xfrm>
           <a:prstGeom prst="rect">
             <a:avLst/>
@@ -12129,7 +12608,7 @@
               </a:spcAft>
             </a:pPr>
             <a:r>
-              <a:rPr sz="1200" b="0">
+              <a:rPr sz="1150" b="0">
                 <a:solidFill>
                   <a:srgbClr val="1A1A1A"/>
                 </a:solidFill>
@@ -12142,18 +12621,18 @@
       </p:sp>
       <p:sp>
         <p:nvSpPr>
-          <p:cNvPr id="9" name="Rounded Rectangle 8"/>
+          <p:cNvPr id="10" name="Rounded Rectangle 9"/>
           <p:cNvSpPr/>
           <p:nvPr/>
         </p:nvSpPr>
         <p:spPr>
           <a:xfrm>
-            <a:off x="841248" y="2999232"/>
-            <a:ext cx="5715000" cy="530352"/>
+            <a:off x="6254496" y="2395728"/>
+            <a:ext cx="5138928" cy="786384"/>
           </a:xfrm>
           <a:prstGeom prst="roundRect">
             <a:avLst>
-              <a:gd name="adj" fmla="val 6000"/>
+              <a:gd name="adj" fmla="val 7000"/>
             </a:avLst>
           </a:prstGeom>
           <a:solidFill>
@@ -12188,9 +12667,55 @@
           </a:p>
         </p:txBody>
       </p:sp>
+      <p:sp>
+        <p:nvSpPr>
+          <p:cNvPr id="11" name="Rounded Rectangle 10"/>
+          <p:cNvSpPr/>
+          <p:nvPr/>
+        </p:nvSpPr>
+        <p:spPr>
+          <a:xfrm>
+            <a:off x="6400800" y="2532888"/>
+            <a:ext cx="512064" cy="512064"/>
+          </a:xfrm>
+          <a:prstGeom prst="roundRect">
+            <a:avLst>
+              <a:gd name="adj" fmla="val 26000"/>
+            </a:avLst>
+          </a:prstGeom>
+          <a:solidFill>
+            <a:srgbClr val="EE0000"/>
+          </a:solidFill>
+          <a:ln>
+            <a:noFill/>
+          </a:ln>
+          <a:effectLst/>
+        </p:spPr>
+        <p:style>
+          <a:lnRef idx="1">
+            <a:schemeClr val="accent1"/>
+          </a:lnRef>
+          <a:fillRef idx="3">
+            <a:schemeClr val="accent1"/>
+          </a:fillRef>
+          <a:effectRef idx="2">
+            <a:schemeClr val="accent1"/>
+          </a:effectRef>
+          <a:fontRef idx="minor">
+            <a:schemeClr val="lt1"/>
+          </a:fontRef>
+        </p:style>
+        <p:txBody>
+          <a:bodyPr rtlCol="0" anchor="ctr"/>
+          <a:lstStyle/>
+          <a:p>
+            <a:pPr algn="ctr"/>
+          </a:p>
+        </p:txBody>
+      </p:sp>
       <p:pic>
         <p:nvPicPr>
-          <p:cNvPr id="10" name="Picture 9" descr="check_steel.png"/>
+          <p:cNvPr id="12" name="Picture 11" descr="check_white.png"/>
           <p:cNvPicPr>
             <a:picLocks noChangeAspect="1"/>
           </p:cNvPicPr>
@@ -12204,8 +12729,8 @@
         </p:blipFill>
         <p:spPr>
           <a:xfrm>
-            <a:off x="987552" y="3145536"/>
-            <a:ext cx="237744" cy="237744"/>
+            <a:off x="6523695" y="2655783"/>
+            <a:ext cx="266273" cy="266273"/>
           </a:xfrm>
           <a:prstGeom prst="rect">
             <a:avLst/>
@@ -12214,14 +12739,14 @@
       </p:pic>
       <p:sp>
         <p:nvSpPr>
-          <p:cNvPr id="11" name="TextBox 10"/>
+          <p:cNvPr id="13" name="TextBox 12"/>
           <p:cNvSpPr txBox="1"/>
           <p:nvPr/>
         </p:nvSpPr>
         <p:spPr>
           <a:xfrm>
-            <a:off x="1353312" y="2999232"/>
-            <a:ext cx="5029200" cy="530352"/>
+            <a:off x="7040880" y="2395728"/>
+            <a:ext cx="4206240" cy="786384"/>
           </a:xfrm>
           <a:prstGeom prst="rect">
             <a:avLst/>
@@ -12246,7 +12771,7 @@
               </a:spcAft>
             </a:pPr>
             <a:r>
-              <a:rPr sz="1200" b="0">
+              <a:rPr sz="1150" b="0">
                 <a:solidFill>
                   <a:srgbClr val="1A1A1A"/>
                 </a:solidFill>
@@ -12259,18 +12784,18 @@
       </p:sp>
       <p:sp>
         <p:nvSpPr>
-          <p:cNvPr id="12" name="Rounded Rectangle 11"/>
+          <p:cNvPr id="14" name="Rounded Rectangle 13"/>
           <p:cNvSpPr/>
           <p:nvPr/>
         </p:nvSpPr>
         <p:spPr>
           <a:xfrm>
-            <a:off x="841248" y="3602736"/>
-            <a:ext cx="5715000" cy="530352"/>
+            <a:off x="841248" y="3328416"/>
+            <a:ext cx="5138928" cy="786384"/>
           </a:xfrm>
           <a:prstGeom prst="roundRect">
             <a:avLst>
-              <a:gd name="adj" fmla="val 6000"/>
+              <a:gd name="adj" fmla="val 7000"/>
             </a:avLst>
           </a:prstGeom>
           <a:solidFill>
@@ -12305,9 +12830,55 @@
           </a:p>
         </p:txBody>
       </p:sp>
+      <p:sp>
+        <p:nvSpPr>
+          <p:cNvPr id="15" name="Rounded Rectangle 14"/>
+          <p:cNvSpPr/>
+          <p:nvPr/>
+        </p:nvSpPr>
+        <p:spPr>
+          <a:xfrm>
+            <a:off x="987552" y="3465576"/>
+            <a:ext cx="512064" cy="512064"/>
+          </a:xfrm>
+          <a:prstGeom prst="roundRect">
+            <a:avLst>
+              <a:gd name="adj" fmla="val 26000"/>
+            </a:avLst>
+          </a:prstGeom>
+          <a:solidFill>
+            <a:srgbClr val="EE0000"/>
+          </a:solidFill>
+          <a:ln>
+            <a:noFill/>
+          </a:ln>
+          <a:effectLst/>
+        </p:spPr>
+        <p:style>
+          <a:lnRef idx="1">
+            <a:schemeClr val="accent1"/>
+          </a:lnRef>
+          <a:fillRef idx="3">
+            <a:schemeClr val="accent1"/>
+          </a:fillRef>
+          <a:effectRef idx="2">
+            <a:schemeClr val="accent1"/>
+          </a:effectRef>
+          <a:fontRef idx="minor">
+            <a:schemeClr val="lt1"/>
+          </a:fontRef>
+        </p:style>
+        <p:txBody>
+          <a:bodyPr rtlCol="0" anchor="ctr"/>
+          <a:lstStyle/>
+          <a:p>
+            <a:pPr algn="ctr"/>
+          </a:p>
+        </p:txBody>
+      </p:sp>
       <p:pic>
         <p:nvPicPr>
-          <p:cNvPr id="13" name="Picture 12" descr="check_steel.png"/>
+          <p:cNvPr id="16" name="Picture 15" descr="check_white.png"/>
           <p:cNvPicPr>
             <a:picLocks noChangeAspect="1"/>
           </p:cNvPicPr>
@@ -12321,8 +12892,8 @@
         </p:blipFill>
         <p:spPr>
           <a:xfrm>
-            <a:off x="987552" y="3749040"/>
-            <a:ext cx="237744" cy="237744"/>
+            <a:off x="1110447" y="3588471"/>
+            <a:ext cx="266273" cy="266273"/>
           </a:xfrm>
           <a:prstGeom prst="rect">
             <a:avLst/>
@@ -12331,14 +12902,14 @@
       </p:pic>
       <p:sp>
         <p:nvSpPr>
-          <p:cNvPr id="14" name="TextBox 13"/>
+          <p:cNvPr id="17" name="TextBox 16"/>
           <p:cNvSpPr txBox="1"/>
           <p:nvPr/>
         </p:nvSpPr>
         <p:spPr>
           <a:xfrm>
-            <a:off x="1353312" y="3602736"/>
-            <a:ext cx="5029200" cy="530352"/>
+            <a:off x="1627632" y="3328416"/>
+            <a:ext cx="4206240" cy="786384"/>
           </a:xfrm>
           <a:prstGeom prst="rect">
             <a:avLst/>
@@ -12363,7 +12934,7 @@
               </a:spcAft>
             </a:pPr>
             <a:r>
-              <a:rPr sz="1200" b="0">
+              <a:rPr sz="1150" b="0">
                 <a:solidFill>
                   <a:srgbClr val="1A1A1A"/>
                 </a:solidFill>
@@ -12376,18 +12947,18 @@
       </p:sp>
       <p:sp>
         <p:nvSpPr>
-          <p:cNvPr id="15" name="Rounded Rectangle 14"/>
+          <p:cNvPr id="18" name="Rounded Rectangle 17"/>
           <p:cNvSpPr/>
           <p:nvPr/>
         </p:nvSpPr>
         <p:spPr>
           <a:xfrm>
-            <a:off x="841248" y="4206240"/>
-            <a:ext cx="5715000" cy="530352"/>
+            <a:off x="6254496" y="3328416"/>
+            <a:ext cx="5138928" cy="786384"/>
           </a:xfrm>
           <a:prstGeom prst="roundRect">
             <a:avLst>
-              <a:gd name="adj" fmla="val 6000"/>
+              <a:gd name="adj" fmla="val 7000"/>
             </a:avLst>
           </a:prstGeom>
           <a:solidFill>
@@ -12422,9 +12993,55 @@
           </a:p>
         </p:txBody>
       </p:sp>
+      <p:sp>
+        <p:nvSpPr>
+          <p:cNvPr id="19" name="Rounded Rectangle 18"/>
+          <p:cNvSpPr/>
+          <p:nvPr/>
+        </p:nvSpPr>
+        <p:spPr>
+          <a:xfrm>
+            <a:off x="6400800" y="3465576"/>
+            <a:ext cx="512064" cy="512064"/>
+          </a:xfrm>
+          <a:prstGeom prst="roundRect">
+            <a:avLst>
+              <a:gd name="adj" fmla="val 26000"/>
+            </a:avLst>
+          </a:prstGeom>
+          <a:solidFill>
+            <a:srgbClr val="EE0000"/>
+          </a:solidFill>
+          <a:ln>
+            <a:noFill/>
+          </a:ln>
+          <a:effectLst/>
+        </p:spPr>
+        <p:style>
+          <a:lnRef idx="1">
+            <a:schemeClr val="accent1"/>
+          </a:lnRef>
+          <a:fillRef idx="3">
+            <a:schemeClr val="accent1"/>
+          </a:fillRef>
+          <a:effectRef idx="2">
+            <a:schemeClr val="accent1"/>
+          </a:effectRef>
+          <a:fontRef idx="minor">
+            <a:schemeClr val="lt1"/>
+          </a:fontRef>
+        </p:style>
+        <p:txBody>
+          <a:bodyPr rtlCol="0" anchor="ctr"/>
+          <a:lstStyle/>
+          <a:p>
+            <a:pPr algn="ctr"/>
+          </a:p>
+        </p:txBody>
+      </p:sp>
       <p:pic>
         <p:nvPicPr>
-          <p:cNvPr id="16" name="Picture 15" descr="check_steel.png"/>
+          <p:cNvPr id="20" name="Picture 19" descr="check_white.png"/>
           <p:cNvPicPr>
             <a:picLocks noChangeAspect="1"/>
           </p:cNvPicPr>
@@ -12438,8 +13055,8 @@
         </p:blipFill>
         <p:spPr>
           <a:xfrm>
-            <a:off x="987552" y="4352544"/>
-            <a:ext cx="237744" cy="237744"/>
+            <a:off x="6523695" y="3588471"/>
+            <a:ext cx="266273" cy="266273"/>
           </a:xfrm>
           <a:prstGeom prst="rect">
             <a:avLst/>
@@ -12448,14 +13065,14 @@
       </p:pic>
       <p:sp>
         <p:nvSpPr>
-          <p:cNvPr id="17" name="TextBox 16"/>
+          <p:cNvPr id="21" name="TextBox 20"/>
           <p:cNvSpPr txBox="1"/>
           <p:nvPr/>
         </p:nvSpPr>
         <p:spPr>
           <a:xfrm>
-            <a:off x="1353312" y="4206240"/>
-            <a:ext cx="5029200" cy="530352"/>
+            <a:off x="7040880" y="3328416"/>
+            <a:ext cx="4206240" cy="786384"/>
           </a:xfrm>
           <a:prstGeom prst="rect">
             <a:avLst/>
@@ -12480,7 +13097,7 @@
               </a:spcAft>
             </a:pPr>
             <a:r>
-              <a:rPr sz="1200" b="0">
+              <a:rPr sz="1150" b="0">
                 <a:solidFill>
                   <a:srgbClr val="1A1A1A"/>
                 </a:solidFill>
@@ -12493,18 +13110,18 @@
       </p:sp>
       <p:sp>
         <p:nvSpPr>
-          <p:cNvPr id="18" name="Rounded Rectangle 17"/>
+          <p:cNvPr id="22" name="Rounded Rectangle 21"/>
           <p:cNvSpPr/>
           <p:nvPr/>
         </p:nvSpPr>
         <p:spPr>
           <a:xfrm>
-            <a:off x="841248" y="4809744"/>
-            <a:ext cx="5715000" cy="530352"/>
+            <a:off x="841248" y="4261104"/>
+            <a:ext cx="5138928" cy="786384"/>
           </a:xfrm>
           <a:prstGeom prst="roundRect">
             <a:avLst>
-              <a:gd name="adj" fmla="val 6000"/>
+              <a:gd name="adj" fmla="val 7000"/>
             </a:avLst>
           </a:prstGeom>
           <a:solidFill>
@@ -12539,9 +13156,55 @@
           </a:p>
         </p:txBody>
       </p:sp>
+      <p:sp>
+        <p:nvSpPr>
+          <p:cNvPr id="23" name="Rounded Rectangle 22"/>
+          <p:cNvSpPr/>
+          <p:nvPr/>
+        </p:nvSpPr>
+        <p:spPr>
+          <a:xfrm>
+            <a:off x="987552" y="4398264"/>
+            <a:ext cx="512064" cy="512064"/>
+          </a:xfrm>
+          <a:prstGeom prst="roundRect">
+            <a:avLst>
+              <a:gd name="adj" fmla="val 26000"/>
+            </a:avLst>
+          </a:prstGeom>
+          <a:solidFill>
+            <a:srgbClr val="EE0000"/>
+          </a:solidFill>
+          <a:ln>
+            <a:noFill/>
+          </a:ln>
+          <a:effectLst/>
+        </p:spPr>
+        <p:style>
+          <a:lnRef idx="1">
+            <a:schemeClr val="accent1"/>
+          </a:lnRef>
+          <a:fillRef idx="3">
+            <a:schemeClr val="accent1"/>
+          </a:fillRef>
+          <a:effectRef idx="2">
+            <a:schemeClr val="accent1"/>
+          </a:effectRef>
+          <a:fontRef idx="minor">
+            <a:schemeClr val="lt1"/>
+          </a:fontRef>
+        </p:style>
+        <p:txBody>
+          <a:bodyPr rtlCol="0" anchor="ctr"/>
+          <a:lstStyle/>
+          <a:p>
+            <a:pPr algn="ctr"/>
+          </a:p>
+        </p:txBody>
+      </p:sp>
       <p:pic>
         <p:nvPicPr>
-          <p:cNvPr id="19" name="Picture 18" descr="check_steel.png"/>
+          <p:cNvPr id="24" name="Picture 23" descr="check_white.png"/>
           <p:cNvPicPr>
             <a:picLocks noChangeAspect="1"/>
           </p:cNvPicPr>
@@ -12555,8 +13218,8 @@
         </p:blipFill>
         <p:spPr>
           <a:xfrm>
-            <a:off x="987552" y="4956048"/>
-            <a:ext cx="237744" cy="237744"/>
+            <a:off x="1110447" y="4521159"/>
+            <a:ext cx="266273" cy="266273"/>
           </a:xfrm>
           <a:prstGeom prst="rect">
             <a:avLst/>
@@ -12565,14 +13228,14 @@
       </p:pic>
       <p:sp>
         <p:nvSpPr>
-          <p:cNvPr id="20" name="TextBox 19"/>
+          <p:cNvPr id="25" name="TextBox 24"/>
           <p:cNvSpPr txBox="1"/>
           <p:nvPr/>
         </p:nvSpPr>
         <p:spPr>
           <a:xfrm>
-            <a:off x="1353312" y="4809744"/>
-            <a:ext cx="5029200" cy="530352"/>
+            <a:off x="1627632" y="4261104"/>
+            <a:ext cx="4206240" cy="786384"/>
           </a:xfrm>
           <a:prstGeom prst="rect">
             <a:avLst/>
@@ -12597,221 +13260,13 @@
               </a:spcAft>
             </a:pPr>
             <a:r>
-              <a:rPr sz="1200" b="0">
+              <a:rPr sz="1150" b="0">
                 <a:solidFill>
                   <a:srgbClr val="1A1A1A"/>
                 </a:solidFill>
                 <a:latin typeface="Red Hat Text"/>
               </a:rPr>
               <a:t>Map to org: is your east-west traffic provably encrypted and identity-gated?</a:t>
-            </a:r>
-          </a:p>
-        </p:txBody>
-      </p:sp>
-      <p:sp>
-        <p:nvSpPr>
-          <p:cNvPr id="21" name="Rounded Rectangle 20"/>
-          <p:cNvSpPr/>
-          <p:nvPr/>
-        </p:nvSpPr>
-        <p:spPr>
-          <a:xfrm>
-            <a:off x="6812280" y="2395728"/>
-            <a:ext cx="4538167" cy="2944368"/>
-          </a:xfrm>
-          <a:prstGeom prst="roundRect">
-            <a:avLst>
-              <a:gd name="adj" fmla="val 4000"/>
-            </a:avLst>
-          </a:prstGeom>
-          <a:solidFill>
-            <a:srgbClr val="FFFFFF"/>
-          </a:solidFill>
-          <a:ln w="15240">
-            <a:solidFill>
-              <a:srgbClr val="DDE1E6"/>
-            </a:solidFill>
-          </a:ln>
-          <a:effectLst/>
-        </p:spPr>
-        <p:style>
-          <a:lnRef idx="1">
-            <a:schemeClr val="accent1"/>
-          </a:lnRef>
-          <a:fillRef idx="3">
-            <a:schemeClr val="accent1"/>
-          </a:fillRef>
-          <a:effectRef idx="2">
-            <a:schemeClr val="accent1"/>
-          </a:effectRef>
-          <a:fontRef idx="minor">
-            <a:schemeClr val="lt1"/>
-          </a:fontRef>
-        </p:style>
-        <p:txBody>
-          <a:bodyPr rtlCol="0" anchor="ctr"/>
-          <a:lstStyle/>
-          <a:p>
-            <a:pPr algn="ctr"/>
-          </a:p>
-        </p:txBody>
-      </p:sp>
-      <p:sp>
-        <p:nvSpPr>
-          <p:cNvPr id="22" name="Rounded Rectangle 21"/>
-          <p:cNvSpPr/>
-          <p:nvPr/>
-        </p:nvSpPr>
-        <p:spPr>
-          <a:xfrm>
-            <a:off x="7013448" y="2596896"/>
-            <a:ext cx="1298448" cy="310896"/>
-          </a:xfrm>
-          <a:prstGeom prst="roundRect">
-            <a:avLst>
-              <a:gd name="adj" fmla="val 50000"/>
-            </a:avLst>
-          </a:prstGeom>
-          <a:solidFill>
-            <a:srgbClr val="FCECEC"/>
-          </a:solidFill>
-          <a:ln>
-            <a:noFill/>
-          </a:ln>
-          <a:effectLst/>
-        </p:spPr>
-        <p:style>
-          <a:lnRef idx="1">
-            <a:schemeClr val="accent1"/>
-          </a:lnRef>
-          <a:fillRef idx="3">
-            <a:schemeClr val="accent1"/>
-          </a:fillRef>
-          <a:effectRef idx="2">
-            <a:schemeClr val="accent1"/>
-          </a:effectRef>
-          <a:fontRef idx="minor">
-            <a:schemeClr val="lt1"/>
-          </a:fontRef>
-        </p:style>
-        <p:txBody>
-          <a:bodyPr rtlCol="0" anchor="ctr"/>
-          <a:lstStyle/>
-          <a:p>
-            <a:pPr algn="ctr"/>
-          </a:p>
-        </p:txBody>
-      </p:sp>
-      <p:sp>
-        <p:nvSpPr>
-          <p:cNvPr id="23" name="TextBox 22"/>
-          <p:cNvSpPr txBox="1"/>
-          <p:nvPr/>
-        </p:nvSpPr>
-        <p:spPr>
-          <a:xfrm>
-            <a:off x="7013448" y="2596896"/>
-            <a:ext cx="1298448" cy="310896"/>
-          </a:xfrm>
-          <a:prstGeom prst="rect">
-            <a:avLst/>
-          </a:prstGeom>
-          <a:noFill/>
-        </p:spPr>
-        <p:txBody>
-          <a:bodyPr wrap="none" anchor="ctr" lIns="0" rIns="0" tIns="0" bIns="0">
-            <a:spAutoFit/>
-          </a:bodyPr>
-          <a:lstStyle/>
-          <a:p>
-            <a:pPr algn="ctr">
-              <a:lnSpc>
-                <a:spcPct val="106000"/>
-              </a:lnSpc>
-              <a:spcBef>
-                <a:spcPts val="0"/>
-              </a:spcBef>
-              <a:spcAft>
-                <a:spcPts val="0"/>
-              </a:spcAft>
-            </a:pPr>
-            <a:r>
-              <a:rPr sz="850" b="1">
-                <a:solidFill>
-                  <a:srgbClr val="B80000"/>
-                </a:solidFill>
-                <a:latin typeface="Red Hat Display"/>
-              </a:rPr>
-              <a:t>MEDIA PASS</a:t>
-            </a:r>
-          </a:p>
-        </p:txBody>
-      </p:sp>
-      <p:pic>
-        <p:nvPicPr>
-          <p:cNvPr id="24" name="Picture 23" descr="eye_slate.png"/>
-          <p:cNvPicPr>
-            <a:picLocks noChangeAspect="1"/>
-          </p:cNvPicPr>
-          <p:nvPr/>
-        </p:nvPicPr>
-        <p:blipFill>
-          <a:blip r:embed="rId4"/>
-          <a:stretch>
-            <a:fillRect/>
-          </a:stretch>
-        </p:blipFill>
-        <p:spPr>
-          <a:xfrm>
-            <a:off x="8843619" y="3108960"/>
-            <a:ext cx="475488" cy="475488"/>
-          </a:xfrm>
-          <a:prstGeom prst="rect">
-            <a:avLst/>
-          </a:prstGeom>
-        </p:spPr>
-      </p:pic>
-      <p:sp>
-        <p:nvSpPr>
-          <p:cNvPr id="25" name="TextBox 24"/>
-          <p:cNvSpPr txBox="1"/>
-          <p:nvPr/>
-        </p:nvSpPr>
-        <p:spPr>
-          <a:xfrm>
-            <a:off x="7050024" y="3721608"/>
-            <a:ext cx="4062679" cy="1481328"/>
-          </a:xfrm>
-          <a:prstGeom prst="rect">
-            <a:avLst/>
-          </a:prstGeom>
-          <a:noFill/>
-        </p:spPr>
-        <p:txBody>
-          <a:bodyPr wrap="square" anchor="t" lIns="0" rIns="0" tIns="0" bIns="0">
-            <a:spAutoFit/>
-          </a:bodyPr>
-          <a:lstStyle/>
-          <a:p>
-            <a:pPr algn="l">
-              <a:lnSpc>
-                <a:spcPct val="120000"/>
-              </a:lnSpc>
-              <a:spcBef>
-                <a:spcPts val="0"/>
-              </a:spcBef>
-              <a:spcAft>
-                <a:spcPts val="0"/>
-              </a:spcAft>
-            </a:pPr>
-            <a:r>
-              <a:rPr sz="950" b="0">
-                <a:solidFill>
-                  <a:srgbClr val="8A9099"/>
-                </a:solidFill>
-                <a:latin typeface="Red Hat Text"/>
-              </a:rPr>
-              <a:t>A decision fork — "HTTP(S)? → Route / Gateway API" vs "raw TCP / SNI passthrough? → Istio Gateway/VirtualService" — with an "EnvoyFilter rate limit → 429" chip on the gateway path and a footnote pointer to Networking for Dev &amp; DevOps (Routes / Gateway API) and Observability (tracing across the mesh).</a:t>
             </a:r>
           </a:p>
         </p:txBody>
